--- a/slides/datasets-in-10-minutes-math.pptx
+++ b/slides/datasets-in-10-minutes-math.pptx
@@ -11,20 +11,13 @@
     <p:sldId id="259" r:id="rId9"/>
     <p:sldId id="260" r:id="rId10"/>
     <p:sldId id="261" r:id="rId5"/>
-    <p:sldId id="262" r:id="rId4"/>
     <p:sldId id="263" r:id="rId3"/>
     <p:sldId id="264" r:id="rId2"/>
     <p:sldId id="265" r:id="rId15"/>
     <p:sldId id="266" r:id="rId16"/>
     <p:sldId id="267" r:id="rId17"/>
     <p:sldId id="268" r:id="rId18"/>
-    <p:sldId id="269" r:id="rId19"/>
-    <p:sldId id="270" r:id="rId20"/>
-    <p:sldId id="271" r:id="rId21"/>
     <p:sldId id="272" r:id="rId22"/>
-    <p:sldId id="273" r:id="rId23"/>
-    <p:sldId id="274" r:id="rId24"/>
-    <p:sldId id="275" r:id="rId25"/>
     <p:sldId id="276" r:id="rId26"/>
     <p:sldId id="277" r:id="rId27"/>
     <p:sldId id="278" r:id="rId28"/>
@@ -50,16 +43,11 @@
     <p:sldId id="298" r:id="rId48"/>
     <p:sldId id="299" r:id="rId49"/>
     <p:sldId id="300" r:id="rId50"/>
-    <p:sldId id="301" r:id="rId51"/>
-    <p:sldId id="302" r:id="rId52"/>
-    <p:sldId id="303" r:id="rId53"/>
-    <p:sldId id="304" r:id="rId54"/>
     <p:sldId id="305" r:id="rId55"/>
     <p:sldId id="306" r:id="rId56"/>
     <p:sldId id="307" r:id="rId57"/>
     <p:sldId id="308" r:id="rId58"/>
     <p:sldId id="309" r:id="rId59"/>
-    <p:sldId id="310" r:id="rId60"/>
   </p:sldIdLst>
   <p:sldSz cx="9144000" cy="5143500" type="screen16x9"/>
   <p:notesSz cx="6858000" cy="9144000"/>
@@ -7404,11 +7392,11 @@
         <p:spPr>
           <a:xfrm>
             <a:off x="548640" y="2647277"/>
-            <a:ext cx="8046720" cy="989965"/>
-          </a:xfrm>
-        </p:spPr>
-        <p:txBody>
-          <a:bodyPr lIns="0" rIns="0" tIns="0" bIns="0">
+            <a:ext cx="8046720" cy="1091565"/>
+          </a:xfrm>
+        </p:spPr>
+        <p:txBody>
+          <a:bodyPr lIns="0" rIns="0" tIns="0" bIns="101600">
             <a:noAutofit/>
           </a:bodyPr>
           <a:lstStyle/>
@@ -8073,22 +8061,8 @@
                 <a:ea typeface="Noto Sans CJK JP"/>
                 <a:cs typeface="Noto Sans"/>
               </a:rPr>
-              <a:t>[1] MATH, EleutherAI/hendrycks_math. 固定revisionのtest分割。元の競技問題・解説の著者に帰属。 counting_and_probability / test row 445</a:t>
-            </a:r>
-          </a:p>
-          <a:p>
-            <a:pPr>
-              <a:lnSpc>
-                <a:spcPts val="940"/>
-              </a:lnSpc>
-              <a:buNone/>
-              <a:defRPr sz="810" b="0">
-                <a:solidFill>
-                  <a:srgbClr val="303437"/>
-                </a:solidFill>
-                <a:latin typeface="Noto Sans"/>
-              </a:defRPr>
-            </a:pPr>
+              <a:t>[1] Hendrycks et al. MATH. 公開データ。 </a:t>
+            </a:r>
             <a:r>
               <a:rPr sz="810" b="0" lang="ja-JP" altLang="en-US">
                 <a:solidFill>
@@ -9203,18 +9177,7 @@
                 <a:ea typeface="Noto Sans CJK JP"/>
                 <a:cs typeface="Noto Sans"/>
               </a:rPr>
-              <a:t>[1] MATH, EleutherAI/hendrycks_math. 固定revisionのtest分割。元の競技問題・解説の著者に帰属。</a:t>
-            </a:r>
-            <a:r>
-              <a:rPr sz="810" b="0" lang="ja-JP" altLang="en-US">
-                <a:solidFill>
-                  <a:srgbClr val="626669"/>
-                </a:solidFill>
-                <a:latin typeface="Noto Sans"/>
-                <a:ea typeface="Noto Sans CJK JP"/>
-                <a:cs typeface="Noto Sans"/>
-              </a:rPr>
-              <a:t>  </a:t>
+              <a:t>[1] Hendrycks et al. MATH. 公開データ。 </a:t>
             </a:r>
             <a:r>
               <a:rPr sz="810" b="0" lang="ja-JP" altLang="en-US">
@@ -9292,7 +9255,7 @@
                 <a:ea typeface="Noto Sans CJK JP"/>
                 <a:cs typeface="Noto Sans"/>
               </a:rPr>
-              <a:t>採点とHELMの比較条件</a:t>
+              <a:t>最終解答の採点と2021年の成績</a:t>
             </a:r>
           </a:p>
         </p:txBody>
@@ -9340,7 +9303,7 @@
                 <a:ea typeface="Noto Sans CJK JP"/>
                 <a:cs typeface="Noto Sans"/>
               </a:rPr>
-              <a:t>2. 採点とHELMの比較条件</a:t>
+              <a:t>2. 最終解答の採点と2021年の成績</a:t>
             </a:r>
           </a:p>
         </p:txBody>
@@ -9459,7 +9422,7 @@
                 <a:ea typeface="Noto Sans CJK JP"/>
                 <a:cs typeface="Noto Sans"/>
               </a:rPr>
-              <a:t>生成した最終解答を、参照解答と照合する。空白やLaTeXの一部を整え、分数や平方根などの表記をそろえる。</a:t>
+              <a:t>生成した最終解答を、参照解答と照合する。解説を生成する場合は、最後のboxedの中から解答を取り出す。</a:t>
             </a:r>
           </a:p>
           <a:p>
@@ -9489,7 +9452,7 @@
                 <a:ea typeface="Noto Sans CJK JP"/>
                 <a:cs typeface="Noto Sans"/>
               </a:rPr>
-              <a:t>各問を正解1・不正解0で採点し、評価集合の正解率を求める。</a:t>
+              <a:t>空白やLaTeXの一部を整え、分数や平方根などの表記をそろえて比較する。例えば1/2と\frac{1}{2}は同じ答えとして扱う。</a:t>
             </a:r>
           </a:p>
           <a:p>
@@ -9519,7 +9482,7 @@
                 <a:ea typeface="Noto Sans CJK JP"/>
                 <a:cs typeface="Noto Sans"/>
               </a:rPr>
-              <a:t>chain-of-thought条件でも、採点するのは最後のboxedから取り出した解答。途中の推論を個別には採点しない。</a:t>
+              <a:t>各問を正解1・不正解0で採点し、正解した問題の割合をAccuracy（正解率）として求める。</a:t>
             </a:r>
           </a:p>
         </p:txBody>
@@ -9567,7 +9530,7 @@
                 <a:ea typeface="Noto Sans CJK JP"/>
                 <a:cs typeface="Noto Sans"/>
               </a:rPr>
-              <a:t>2. 採点とHELMの比較条件</a:t>
+              <a:t>2. 最終解答の採点と2021年の成績</a:t>
             </a:r>
           </a:p>
         </p:txBody>
@@ -9621,7 +9584,7 @@
                 <a:ea typeface="Noto Sans CJK JP"/>
                 <a:cs typeface="Noto Sans"/>
               </a:rPr>
-              <a:t>[1] Stanford CRFM. MATHScenario v0.3.0. 参照解答の抽出と表記正規化。</a:t>
+              <a:t>[1] Hendrycks et al. (2021). Measuring Mathematical Problem Solving With the MATH Dataset. NeurIPS Datasets and Benchmarks.</a:t>
             </a:r>
           </a:p>
           <a:p>
@@ -9645,1639 +9608,9 @@
                 <a:latin typeface="Noto Sans"/>
                 <a:ea typeface="Noto Sans CJK JP"/>
                 <a:cs typeface="Noto Sans"/>
-                <a:hlinkClick r:id="rId2"/>
-              </a:rPr>
-              <a:t>https://github.com/stanford-crfm/helm/blob/v0.3.0/src/helm/benchmark/scenarios/math_scenario.py</a:t>
-            </a:r>
-          </a:p>
-        </p:txBody>
-      </p:sp>
-    </p:spTree>
-  </p:cSld>
-  <p:clrMapOvr>
-    <a:masterClrMapping/>
-  </p:clrMapOvr>
-</p:sld>
-</file>
-
-<file path=ppt/slides/slide14.xml><?xml version="1.0" encoding="utf-8"?>
-<p:sld xmlns:a="http://schemas.openxmlformats.org/drawingml/2006/main" xmlns:p="http://schemas.openxmlformats.org/presentationml/2006/main" xmlns:r="http://schemas.openxmlformats.org/officeDocument/2006/relationships">
-  <p:cSld>
-    <p:spTree>
-      <p:nvGrpSpPr>
-        <p:cNvPr id="1" name=""/>
-        <p:cNvGrpSpPr/>
-        <p:nvPr/>
-      </p:nvGrpSpPr>
-      <p:grpSpPr/>
-      <p:sp>
-        <p:nvSpPr>
-          <p:cNvPr id="2" name="Title 1"/>
-          <p:cNvSpPr>
-            <a:spLocks noGrp="1"/>
-          </p:cNvSpPr>
-          <p:nvPr>
-            <p:ph type="title"/>
-          </p:nvPr>
-        </p:nvSpPr>
-        <p:spPr>
-          <a:xfrm>
-            <a:off x="468172" y="650138"/>
-            <a:ext cx="8206740" cy="616305"/>
-          </a:xfrm>
-        </p:spPr>
-        <p:txBody>
-          <a:bodyPr wrap="square" lIns="0" rIns="0" tIns="0" bIns="0">
-            <a:noAutofit/>
-          </a:bodyPr>
-          <a:lstStyle/>
-          <a:p>
-            <a:pPr algn="l">
-              <a:lnSpc>
-                <a:spcPct val="110000"/>
-              </a:lnSpc>
-              <a:buNone/>
-              <a:defRPr sz="2800" b="0">
-                <a:solidFill>
-                  <a:srgbClr val="303437"/>
-                </a:solidFill>
-                <a:latin typeface="Noto Sans"/>
-              </a:defRPr>
-            </a:pPr>
-            <a:r>
-              <a:rPr sz="2800" b="1" lang="ja-JP" altLang="en-US">
-                <a:solidFill>
-                  <a:srgbClr val="303437"/>
-                </a:solidFill>
-                <a:latin typeface="Noto Sans"/>
-                <a:ea typeface="Noto Sans CJK JP"/>
-                <a:cs typeface="Noto Sans"/>
-              </a:rPr>
-              <a:t>HELMの解答抽出は条件で変わる</a:t>
-            </a:r>
-          </a:p>
-        </p:txBody>
-      </p:sp>
-      <p:sp>
-        <p:nvSpPr>
-          <p:cNvPr id="3" name="Title 2"/>
-          <p:cNvSpPr>
-            <a:spLocks noGrp="1"/>
-          </p:cNvSpPr>
-          <p:nvPr>
-            <p:ph type="title" idx="2"/>
-          </p:nvPr>
-        </p:nvSpPr>
-        <p:spPr>
-          <a:xfrm>
-            <a:off x="75895" y="0"/>
-            <a:ext cx="8115300" cy="480060"/>
-          </a:xfrm>
-        </p:spPr>
-        <p:txBody>
-          <a:bodyPr wrap="square" lIns="0" rIns="0" tIns="0" bIns="0" anchor="ctr">
-            <a:noAutofit/>
-          </a:bodyPr>
-          <a:lstStyle/>
-          <a:p>
-            <a:pPr algn="l">
-              <a:lnSpc>
-                <a:spcPct val="110000"/>
-              </a:lnSpc>
-              <a:buNone/>
-              <a:defRPr sz="1400" b="0">
-                <a:solidFill>
-                  <a:srgbClr val="303437"/>
-                </a:solidFill>
-                <a:latin typeface="Noto Sans"/>
-              </a:defRPr>
-            </a:pPr>
-            <a:r>
-              <a:rPr sz="1400" b="1" lang="ja-JP" altLang="en-US">
-                <a:solidFill>
-                  <a:srgbClr val="FFFEF8"/>
-                </a:solidFill>
-                <a:latin typeface="Noto Sans"/>
-                <a:ea typeface="Noto Sans CJK JP"/>
-                <a:cs typeface="Noto Sans"/>
-              </a:rPr>
-              <a:t>2. 採点とHELMの比較条件</a:t>
-            </a:r>
-          </a:p>
-        </p:txBody>
-      </p:sp>
-      <p:graphicFrame>
-        <p:nvGraphicFramePr>
-          <p:cNvPr id="4" name="Table 3"/>
-          <p:cNvGraphicFramePr>
-            <a:graphicFrameLocks noGrp="1"/>
-          </p:cNvGraphicFramePr>
-          <p:nvPr/>
-        </p:nvGraphicFramePr>
-        <p:xfrm>
-          <a:off x="548640" y="1508760"/>
-          <a:ext cx="8046720" cy="1510538"/>
-        </p:xfrm>
-        <a:graphic>
-          <a:graphicData uri="http://schemas.openxmlformats.org/drawingml/2006/table">
-            <a:tbl>
-              <a:tblPr firstRow="0" bandRow="0"/>
-              <a:tblGrid>
-                <a:gridCol w="2560320"/>
-                <a:gridCol w="2743200"/>
-                <a:gridCol w="2743200"/>
-              </a:tblGrid>
-              <a:tr h="420624">
-                <a:tc>
-                  <a:txBody>
-                    <a:bodyPr wrap="square">
-                      <a:noAutofit/>
-                    </a:bodyPr>
-                    <a:lstStyle/>
-                    <a:p>
-                      <a:pPr algn="l">
-                        <a:lnSpc>
-                          <a:spcPts val="2185"/>
-                        </a:lnSpc>
-                        <a:buNone/>
-                        <a:defRPr sz="1900" b="0">
-                          <a:solidFill>
-                            <a:srgbClr val="303437"/>
-                          </a:solidFill>
-                          <a:latin typeface="Noto Sans"/>
-                        </a:defRPr>
-                      </a:pPr>
-                      <a:r>
-                        <a:rPr sz="1900" b="0" lang="ja-JP" altLang="en-US">
-                          <a:solidFill>
-                            <a:srgbClr val="303437"/>
-                          </a:solidFill>
-                          <a:latin typeface="Noto Sans"/>
-                          <a:ea typeface="Noto Sans CJK JP"/>
-                          <a:cs typeface="Noto Sans"/>
-                        </a:rPr>
-                        <a:t>条件</a:t>
-                      </a:r>
-                    </a:p>
-                  </a:txBody>
-                  <a:tcPr marL="63500" marR="63500" marT="38100" marB="38100" anchor="ctr">
-                    <a:lnL w="7620">
-                      <a:noFill/>
-                    </a:lnL>
-                    <a:lnR w="7620">
-                      <a:noFill/>
-                    </a:lnR>
-                    <a:lnT w="15240">
-                      <a:solidFill>
-                        <a:srgbClr val="626669"/>
-                      </a:solidFill>
-                      <a:prstDash val="solid"/>
-                    </a:lnT>
-                    <a:lnB w="7620">
-                      <a:solidFill>
-                        <a:srgbClr val="626669"/>
-                      </a:solidFill>
-                      <a:prstDash val="solid"/>
-                    </a:lnB>
-                    <a:solidFill>
-                      <a:srgbClr val="FFFEF8"/>
-                    </a:solidFill>
-                  </a:tcPr>
-                </a:tc>
-                <a:tc>
-                  <a:txBody>
-                    <a:bodyPr wrap="square">
-                      <a:noAutofit/>
-                    </a:bodyPr>
-                    <a:lstStyle/>
-                    <a:p>
-                      <a:pPr algn="l">
-                        <a:lnSpc>
-                          <a:spcPts val="2185"/>
-                        </a:lnSpc>
-                        <a:buNone/>
-                        <a:defRPr sz="1900" b="0">
-                          <a:solidFill>
-                            <a:srgbClr val="303437"/>
-                          </a:solidFill>
-                          <a:latin typeface="Noto Sans"/>
-                        </a:defRPr>
-                      </a:pPr>
-                      <a:r>
-                        <a:rPr sz="1900" b="0" lang="ja-JP" altLang="en-US">
-                          <a:solidFill>
-                            <a:srgbClr val="303437"/>
-                          </a:solidFill>
-                          <a:latin typeface="Noto Sans"/>
-                          <a:ea typeface="Noto Sans CJK JP"/>
-                          <a:cs typeface="Noto Sans"/>
-                        </a:rPr>
-                        <a:t>提示する参照</a:t>
-                      </a:r>
-                    </a:p>
-                  </a:txBody>
-                  <a:tcPr marL="63500" marR="63500" marT="38100" marB="38100" anchor="ctr">
-                    <a:lnL w="7620">
-                      <a:noFill/>
-                    </a:lnL>
-                    <a:lnR w="7620">
-                      <a:noFill/>
-                    </a:lnR>
-                    <a:lnT w="15240">
-                      <a:solidFill>
-                        <a:srgbClr val="626669"/>
-                      </a:solidFill>
-                      <a:prstDash val="solid"/>
-                    </a:lnT>
-                    <a:lnB w="7620">
-                      <a:solidFill>
-                        <a:srgbClr val="626669"/>
-                      </a:solidFill>
-                      <a:prstDash val="solid"/>
-                    </a:lnB>
-                    <a:solidFill>
-                      <a:srgbClr val="FFFEF8"/>
-                    </a:solidFill>
-                  </a:tcPr>
-                </a:tc>
-                <a:tc>
-                  <a:txBody>
-                    <a:bodyPr wrap="square">
-                      <a:noAutofit/>
-                    </a:bodyPr>
-                    <a:lstStyle/>
-                    <a:p>
-                      <a:pPr algn="l">
-                        <a:lnSpc>
-                          <a:spcPts val="2185"/>
-                        </a:lnSpc>
-                        <a:buNone/>
-                        <a:defRPr sz="1900" b="0">
-                          <a:solidFill>
-                            <a:srgbClr val="303437"/>
-                          </a:solidFill>
-                          <a:latin typeface="Noto Sans"/>
-                        </a:defRPr>
-                      </a:pPr>
-                      <a:r>
-                        <a:rPr sz="1900" b="0" lang="ja-JP" altLang="en-US">
-                          <a:solidFill>
-                            <a:srgbClr val="303437"/>
-                          </a:solidFill>
-                          <a:latin typeface="Noto Sans"/>
-                          <a:ea typeface="Noto Sans CJK JP"/>
-                          <a:cs typeface="Noto Sans"/>
-                        </a:rPr>
-                        <a:t>生成から採点する部分</a:t>
-                      </a:r>
-                    </a:p>
-                  </a:txBody>
-                  <a:tcPr marL="63500" marR="63500" marT="38100" marB="38100" anchor="ctr">
-                    <a:lnL w="7620">
-                      <a:noFill/>
-                    </a:lnL>
-                    <a:lnR w="7620">
-                      <a:noFill/>
-                    </a:lnR>
-                    <a:lnT w="15240">
-                      <a:solidFill>
-                        <a:srgbClr val="626669"/>
-                      </a:solidFill>
-                      <a:prstDash val="solid"/>
-                    </a:lnT>
-                    <a:lnB w="7620">
-                      <a:solidFill>
-                        <a:srgbClr val="626669"/>
-                      </a:solidFill>
-                      <a:prstDash val="solid"/>
-                    </a:lnB>
-                    <a:solidFill>
-                      <a:srgbClr val="FFFEF8"/>
-                    </a:solidFill>
-                  </a:tcPr>
-                </a:tc>
-              </a:tr>
-              <a:tr h="420624">
-                <a:tc>
-                  <a:txBody>
-                    <a:bodyPr wrap="square">
-                      <a:noAutofit/>
-                    </a:bodyPr>
-                    <a:lstStyle/>
-                    <a:p>
-                      <a:pPr algn="l">
-                        <a:lnSpc>
-                          <a:spcPts val="2185"/>
-                        </a:lnSpc>
-                        <a:buNone/>
-                        <a:defRPr sz="1900" b="0">
-                          <a:solidFill>
-                            <a:srgbClr val="303437"/>
-                          </a:solidFill>
-                          <a:latin typeface="Noto Sans"/>
-                        </a:defRPr>
-                      </a:pPr>
-                      <a:r>
-                        <a:rPr sz="1900" b="0" lang="ja-JP" altLang="en-US">
-                          <a:solidFill>
-                            <a:srgbClr val="303437"/>
-                          </a:solidFill>
-                          <a:latin typeface="Noto Sans"/>
-                          <a:ea typeface="Noto Sans CJK JP"/>
-                          <a:cs typeface="Noto Sans"/>
-                        </a:rPr>
-                        <a:t>regular</a:t>
-                      </a:r>
-                    </a:p>
-                  </a:txBody>
-                  <a:tcPr marL="63500" marR="63500" marT="38100" marB="38100" anchor="ctr">
-                    <a:lnL w="7620">
-                      <a:noFill/>
-                    </a:lnL>
-                    <a:lnR w="7620">
-                      <a:noFill/>
-                    </a:lnR>
-                    <a:lnT w="7620">
-                      <a:solidFill>
-                        <a:srgbClr val="626669"/>
-                      </a:solidFill>
-                      <a:prstDash val="solid"/>
-                    </a:lnT>
-                    <a:lnB w="7620">
-                      <a:noFill/>
-                    </a:lnB>
-                    <a:solidFill>
-                      <a:srgbClr val="FFFEF8"/>
-                    </a:solidFill>
-                  </a:tcPr>
-                </a:tc>
-                <a:tc>
-                  <a:txBody>
-                    <a:bodyPr wrap="square">
-                      <a:noAutofit/>
-                    </a:bodyPr>
-                    <a:lstStyle/>
-                    <a:p>
-                      <a:pPr algn="l">
-                        <a:lnSpc>
-                          <a:spcPts val="2185"/>
-                        </a:lnSpc>
-                        <a:buNone/>
-                        <a:defRPr sz="1900" b="0">
-                          <a:solidFill>
-                            <a:srgbClr val="303437"/>
-                          </a:solidFill>
-                          <a:latin typeface="Noto Sans"/>
-                        </a:defRPr>
-                      </a:pPr>
-                      <a:r>
-                        <a:rPr sz="1900" b="0" lang="ja-JP" altLang="en-US">
-                          <a:solidFill>
-                            <a:srgbClr val="303437"/>
-                          </a:solidFill>
-                          <a:latin typeface="Noto Sans"/>
-                          <a:ea typeface="Noto Sans CJK JP"/>
-                          <a:cs typeface="Noto Sans"/>
-                        </a:rPr>
-                        <a:t>公式の8問と最終解答</a:t>
-                      </a:r>
-                    </a:p>
-                  </a:txBody>
-                  <a:tcPr marL="63500" marR="63500" marT="38100" marB="38100" anchor="ctr">
-                    <a:lnL w="7620">
-                      <a:noFill/>
-                    </a:lnL>
-                    <a:lnR w="7620">
-                      <a:noFill/>
-                    </a:lnR>
-                    <a:lnT w="7620">
-                      <a:solidFill>
-                        <a:srgbClr val="626669"/>
-                      </a:solidFill>
-                      <a:prstDash val="solid"/>
-                    </a:lnT>
-                    <a:lnB w="7620">
-                      <a:noFill/>
-                    </a:lnB>
-                    <a:solidFill>
-                      <a:srgbClr val="FFFEF8"/>
-                    </a:solidFill>
-                  </a:tcPr>
-                </a:tc>
-                <a:tc>
-                  <a:txBody>
-                    <a:bodyPr wrap="square">
-                      <a:noAutofit/>
-                    </a:bodyPr>
-                    <a:lstStyle/>
-                    <a:p>
-                      <a:pPr algn="l">
-                        <a:lnSpc>
-                          <a:spcPts val="2185"/>
-                        </a:lnSpc>
-                        <a:buNone/>
-                        <a:defRPr sz="1900" b="0">
-                          <a:solidFill>
-                            <a:srgbClr val="303437"/>
-                          </a:solidFill>
-                          <a:latin typeface="Noto Sans"/>
-                        </a:defRPr>
-                      </a:pPr>
-                      <a:r>
-                        <a:rPr sz="1900" b="0" lang="ja-JP" altLang="en-US">
-                          <a:solidFill>
-                            <a:srgbClr val="303437"/>
-                          </a:solidFill>
-                          <a:latin typeface="Noto Sans"/>
-                          <a:ea typeface="Noto Sans CJK JP"/>
-                          <a:cs typeface="Noto Sans"/>
-                        </a:rPr>
-                        <a:t>生成した解答文字列</a:t>
-                      </a:r>
-                    </a:p>
-                  </a:txBody>
-                  <a:tcPr marL="63500" marR="63500" marT="38100" marB="38100" anchor="ctr">
-                    <a:lnL w="7620">
-                      <a:noFill/>
-                    </a:lnL>
-                    <a:lnR w="7620">
-                      <a:noFill/>
-                    </a:lnR>
-                    <a:lnT w="7620">
-                      <a:solidFill>
-                        <a:srgbClr val="626669"/>
-                      </a:solidFill>
-                      <a:prstDash val="solid"/>
-                    </a:lnT>
-                    <a:lnB w="7620">
-                      <a:noFill/>
-                    </a:lnB>
-                    <a:solidFill>
-                      <a:srgbClr val="FFFEF8"/>
-                    </a:solidFill>
-                  </a:tcPr>
-                </a:tc>
-              </a:tr>
-              <a:tr h="669290">
-                <a:tc>
-                  <a:txBody>
-                    <a:bodyPr wrap="square">
-                      <a:noAutofit/>
-                    </a:bodyPr>
-                    <a:lstStyle/>
-                    <a:p>
-                      <a:pPr algn="l">
-                        <a:lnSpc>
-                          <a:spcPts val="2185"/>
-                        </a:lnSpc>
-                        <a:buNone/>
-                        <a:defRPr sz="1900" b="0">
-                          <a:solidFill>
-                            <a:srgbClr val="303437"/>
-                          </a:solidFill>
-                          <a:latin typeface="Noto Sans"/>
-                        </a:defRPr>
-                      </a:pPr>
-                      <a:r>
-                        <a:rPr sz="1900" b="0" lang="ja-JP" altLang="en-US">
-                          <a:solidFill>
-                            <a:srgbClr val="303437"/>
-                          </a:solidFill>
-                          <a:latin typeface="Noto Sans"/>
-                          <a:ea typeface="Noto Sans CJK JP"/>
-                          <a:cs typeface="Noto Sans"/>
-                        </a:rPr>
-                        <a:t>chain-of-thought</a:t>
-                      </a:r>
-                    </a:p>
-                  </a:txBody>
-                  <a:tcPr marL="63500" marR="63500" marT="38100" marB="38100" anchor="ctr">
-                    <a:lnL w="7620">
-                      <a:noFill/>
-                    </a:lnL>
-                    <a:lnR w="7620">
-                      <a:noFill/>
-                    </a:lnR>
-                    <a:lnT w="7620">
-                      <a:noFill/>
-                    </a:lnT>
-                    <a:lnB w="15240">
-                      <a:solidFill>
-                        <a:srgbClr val="626669"/>
-                      </a:solidFill>
-                      <a:prstDash val="solid"/>
-                    </a:lnB>
-                    <a:solidFill>
-                      <a:srgbClr val="FFFEF8"/>
-                    </a:solidFill>
-                  </a:tcPr>
-                </a:tc>
-                <a:tc>
-                  <a:txBody>
-                    <a:bodyPr wrap="square">
-                      <a:noAutofit/>
-                    </a:bodyPr>
-                    <a:lstStyle/>
-                    <a:p>
-                      <a:pPr algn="l">
-                        <a:lnSpc>
-                          <a:spcPts val="2185"/>
-                        </a:lnSpc>
-                        <a:buNone/>
-                        <a:defRPr sz="1900" b="0">
-                          <a:solidFill>
-                            <a:srgbClr val="303437"/>
-                          </a:solidFill>
-                          <a:latin typeface="Noto Sans"/>
-                        </a:defRPr>
-                      </a:pPr>
-                      <a:r>
-                        <a:rPr sz="1900" b="0" lang="ja-JP" altLang="en-US">
-                          <a:solidFill>
-                            <a:srgbClr val="303437"/>
-                          </a:solidFill>
-                          <a:latin typeface="Noto Sans"/>
-                          <a:ea typeface="Noto Sans CJK JP"/>
-                          <a:cs typeface="Noto Sans"/>
-                        </a:rPr>
-                        <a:t>同じ分野・Level 1の学習問題と解説</a:t>
-                      </a:r>
-                    </a:p>
-                  </a:txBody>
-                  <a:tcPr marL="63500" marR="63500" marT="38100" marB="38100" anchor="ctr">
-                    <a:lnL w="7620">
-                      <a:noFill/>
-                    </a:lnL>
-                    <a:lnR w="7620">
-                      <a:noFill/>
-                    </a:lnR>
-                    <a:lnT w="7620">
-                      <a:noFill/>
-                    </a:lnT>
-                    <a:lnB w="15240">
-                      <a:solidFill>
-                        <a:srgbClr val="626669"/>
-                      </a:solidFill>
-                      <a:prstDash val="solid"/>
-                    </a:lnB>
-                    <a:solidFill>
-                      <a:srgbClr val="FFFEF8"/>
-                    </a:solidFill>
-                  </a:tcPr>
-                </a:tc>
-                <a:tc>
-                  <a:txBody>
-                    <a:bodyPr wrap="square">
-                      <a:noAutofit/>
-                    </a:bodyPr>
-                    <a:lstStyle/>
-                    <a:p>
-                      <a:pPr algn="l">
-                        <a:lnSpc>
-                          <a:spcPts val="2185"/>
-                        </a:lnSpc>
-                        <a:buNone/>
-                        <a:defRPr sz="1900" b="0">
-                          <a:solidFill>
-                            <a:srgbClr val="303437"/>
-                          </a:solidFill>
-                          <a:latin typeface="Noto Sans"/>
-                        </a:defRPr>
-                      </a:pPr>
-                      <a:r>
-                        <a:rPr sz="1900" b="0" lang="ja-JP" altLang="en-US">
-                          <a:solidFill>
-                            <a:srgbClr val="303437"/>
-                          </a:solidFill>
-                          <a:latin typeface="Noto Sans"/>
-                          <a:ea typeface="Noto Sans CJK JP"/>
-                          <a:cs typeface="Noto Sans"/>
-                        </a:rPr>
-                        <a:t>最後のboxedの中身</a:t>
-                      </a:r>
-                    </a:p>
-                  </a:txBody>
-                  <a:tcPr marL="63500" marR="63500" marT="38100" marB="38100" anchor="ctr">
-                    <a:lnL w="7620">
-                      <a:noFill/>
-                    </a:lnL>
-                    <a:lnR w="7620">
-                      <a:noFill/>
-                    </a:lnR>
-                    <a:lnT w="7620">
-                      <a:noFill/>
-                    </a:lnT>
-                    <a:lnB w="15240">
-                      <a:solidFill>
-                        <a:srgbClr val="626669"/>
-                      </a:solidFill>
-                      <a:prstDash val="solid"/>
-                    </a:lnB>
-                    <a:solidFill>
-                      <a:srgbClr val="FFFEF8"/>
-                    </a:solidFill>
-                  </a:tcPr>
-                </a:tc>
-              </a:tr>
-            </a:tbl>
-          </a:graphicData>
-        </a:graphic>
-      </p:graphicFrame>
-      <p:sp>
-        <p:nvSpPr>
-          <p:cNvPr id="5" name="TextBox 4"/>
-          <p:cNvSpPr txBox="1"/>
-          <p:nvPr/>
-        </p:nvSpPr>
-        <p:spPr>
-          <a:xfrm>
-            <a:off x="594360" y="3220466"/>
-            <a:ext cx="7955279" cy="658368"/>
-          </a:xfrm>
-          <a:prstGeom prst="rect">
-            <a:avLst/>
-          </a:prstGeom>
-          <a:noFill/>
-        </p:spPr>
-        <p:txBody>
-          <a:bodyPr wrap="square" lIns="0" rIns="0" tIns="0" bIns="0">
-            <a:noAutofit/>
-          </a:bodyPr>
-          <a:lstStyle/>
-          <a:p>
-            <a:pPr algn="l">
-              <a:lnSpc>
-                <a:spcPts val="2047"/>
-              </a:lnSpc>
-              <a:spcBef>
-                <a:spcPts val="0"/>
-              </a:spcBef>
-              <a:spcAft>
-                <a:spcPts val="0"/>
-              </a:spcAft>
-              <a:buNone/>
-              <a:defRPr sz="1750" b="0">
-                <a:solidFill>
-                  <a:srgbClr val="303437"/>
-                </a:solidFill>
-                <a:latin typeface="Noto Sans"/>
-              </a:defRPr>
-            </a:pPr>
-            <a:r>
-              <a:rPr sz="1750" b="0" lang="ja-JP" altLang="en-US">
-                <a:solidFill>
-                  <a:srgbClr val="303437"/>
-                </a:solidFill>
-                <a:latin typeface="Noto Sans"/>
-                <a:ea typeface="Noto Sans CJK JP"/>
-                <a:cs typeface="Noto Sans"/>
-              </a:rPr>
-              <a:t>正規化した文字列の一致。一般の代数式を記号計算で同値判定する採点ではない。</a:t>
-            </a:r>
-          </a:p>
-        </p:txBody>
-      </p:sp>
-      <p:sp>
-        <p:nvSpPr>
-          <p:cNvPr id="6" name="sources"/>
-          <p:cNvSpPr txBox="1"/>
-          <p:nvPr/>
-        </p:nvSpPr>
-        <p:spPr>
-          <a:xfrm>
-            <a:off x="502920" y="4700016"/>
-            <a:ext cx="8183879" cy="530352"/>
-          </a:xfrm>
-          <a:prstGeom prst="rect">
-            <a:avLst/>
-          </a:prstGeom>
-          <a:noFill/>
-        </p:spPr>
-        <p:txBody>
-          <a:bodyPr wrap="square" lIns="0" rIns="0" tIns="0" bIns="0">
-            <a:noAutofit/>
-          </a:bodyPr>
-          <a:lstStyle/>
-          <a:p>
-            <a:pPr algn="l">
-              <a:lnSpc>
-                <a:spcPts val="940"/>
-              </a:lnSpc>
-              <a:spcBef>
-                <a:spcPts val="0"/>
-              </a:spcBef>
-              <a:spcAft>
-                <a:spcPts val="140"/>
-              </a:spcAft>
-              <a:buNone/>
-              <a:defRPr sz="810" b="0">
-                <a:solidFill>
-                  <a:srgbClr val="303437"/>
-                </a:solidFill>
-                <a:latin typeface="Noto Sans"/>
-              </a:defRPr>
-            </a:pPr>
-            <a:r>
-              <a:rPr sz="810" b="0" lang="ja-JP" altLang="en-US">
-                <a:solidFill>
-                  <a:srgbClr val="626669"/>
-                </a:solidFill>
-                <a:latin typeface="Noto Sans"/>
-                <a:ea typeface="Noto Sans CJK JP"/>
-                <a:cs typeface="Noto Sans"/>
-              </a:rPr>
-              <a:t>[1] Stanford CRFM. MATHScenario v0.3.0. 参照解答の抽出と表記正規化。</a:t>
-            </a:r>
-          </a:p>
-          <a:p>
-            <a:pPr>
-              <a:lnSpc>
-                <a:spcPts val="940"/>
-              </a:lnSpc>
-              <a:buNone/>
-              <a:defRPr sz="810" b="0">
-                <a:solidFill>
-                  <a:srgbClr val="303437"/>
-                </a:solidFill>
-                <a:latin typeface="Noto Sans"/>
-              </a:defRPr>
-            </a:pPr>
-            <a:r>
-              <a:rPr sz="810" b="0" lang="ja-JP" altLang="en-US">
-                <a:solidFill>
-                  <a:srgbClr val="626669"/>
-                </a:solidFill>
-                <a:latin typeface="Noto Sans"/>
-                <a:ea typeface="Noto Sans CJK JP"/>
-                <a:cs typeface="Noto Sans"/>
-                <a:hlinkClick r:id="rId2"/>
-              </a:rPr>
-              <a:t>https://github.com/stanford-crfm/helm/blob/v0.3.0/src/helm/benchmark/scenarios/math_scenario.py</a:t>
-            </a:r>
-          </a:p>
-        </p:txBody>
-      </p:sp>
-    </p:spTree>
-  </p:cSld>
-  <p:clrMapOvr>
-    <a:masterClrMapping/>
-  </p:clrMapOvr>
-</p:sld>
-</file>
-
-<file path=ppt/slides/slide15.xml><?xml version="1.0" encoding="utf-8"?>
-<p:sld xmlns:a="http://schemas.openxmlformats.org/drawingml/2006/main" xmlns:p="http://schemas.openxmlformats.org/presentationml/2006/main" xmlns:r="http://schemas.openxmlformats.org/officeDocument/2006/relationships">
-  <p:cSld>
-    <p:spTree>
-      <p:nvGrpSpPr>
-        <p:cNvPr id="1" name=""/>
-        <p:cNvGrpSpPr/>
-        <p:nvPr/>
-      </p:nvGrpSpPr>
-      <p:grpSpPr/>
-      <p:sp>
-        <p:nvSpPr>
-          <p:cNvPr id="2" name="Title 1"/>
-          <p:cNvSpPr>
-            <a:spLocks noGrp="1"/>
-          </p:cNvSpPr>
-          <p:nvPr>
-            <p:ph type="title"/>
-          </p:nvPr>
-        </p:nvSpPr>
-        <p:spPr>
-          <a:xfrm>
-            <a:off x="468172" y="650138"/>
-            <a:ext cx="8206740" cy="616305"/>
-          </a:xfrm>
-        </p:spPr>
-        <p:txBody>
-          <a:bodyPr wrap="square" lIns="0" rIns="0" tIns="0" bIns="0">
-            <a:noAutofit/>
-          </a:bodyPr>
-          <a:lstStyle/>
-          <a:p>
-            <a:pPr algn="l">
-              <a:lnSpc>
-                <a:spcPct val="110000"/>
-              </a:lnSpc>
-              <a:buNone/>
-              <a:defRPr sz="2800" b="0">
-                <a:solidFill>
-                  <a:srgbClr val="303437"/>
-                </a:solidFill>
-                <a:latin typeface="Noto Sans"/>
-              </a:defRPr>
-            </a:pPr>
-            <a:r>
-              <a:rPr sz="2800" b="1" lang="ja-JP" altLang="en-US">
-                <a:solidFill>
-                  <a:srgbClr val="303437"/>
-                </a:solidFill>
-                <a:latin typeface="Noto Sans"/>
-                <a:ea typeface="Noto Sans CJK JP"/>
-                <a:cs typeface="Noto Sans"/>
-              </a:rPr>
-              <a:t>同じ問題の、実際に生成された二つの出力</a:t>
-            </a:r>
-          </a:p>
-        </p:txBody>
-      </p:sp>
-      <p:sp>
-        <p:nvSpPr>
-          <p:cNvPr id="3" name="Title 2"/>
-          <p:cNvSpPr>
-            <a:spLocks noGrp="1"/>
-          </p:cNvSpPr>
-          <p:nvPr>
-            <p:ph type="title" idx="2"/>
-          </p:nvPr>
-        </p:nvSpPr>
-        <p:spPr>
-          <a:xfrm>
-            <a:off x="75895" y="0"/>
-            <a:ext cx="8115300" cy="480060"/>
-          </a:xfrm>
-        </p:spPr>
-        <p:txBody>
-          <a:bodyPr wrap="square" lIns="0" rIns="0" tIns="0" bIns="0" anchor="ctr">
-            <a:noAutofit/>
-          </a:bodyPr>
-          <a:lstStyle/>
-          <a:p>
-            <a:pPr algn="l">
-              <a:lnSpc>
-                <a:spcPct val="110000"/>
-              </a:lnSpc>
-              <a:buNone/>
-              <a:defRPr sz="1400" b="0">
-                <a:solidFill>
-                  <a:srgbClr val="303437"/>
-                </a:solidFill>
-                <a:latin typeface="Noto Sans"/>
-              </a:defRPr>
-            </a:pPr>
-            <a:r>
-              <a:rPr sz="1400" b="1" lang="ja-JP" altLang="en-US">
-                <a:solidFill>
-                  <a:srgbClr val="FFFEF8"/>
-                </a:solidFill>
-                <a:latin typeface="Noto Sans"/>
-                <a:ea typeface="Noto Sans CJK JP"/>
-                <a:cs typeface="Noto Sans"/>
-              </a:rPr>
-              <a:t>2. 採点とHELMの比較条件</a:t>
-            </a:r>
-          </a:p>
-        </p:txBody>
-      </p:sp>
-      <p:sp>
-        <p:nvSpPr>
-          <p:cNvPr id="4" name="TextBox 3"/>
-          <p:cNvSpPr txBox="1"/>
-          <p:nvPr/>
-        </p:nvSpPr>
-        <p:spPr>
-          <a:xfrm>
-            <a:off x="548640" y="1335024"/>
-            <a:ext cx="8046720" cy="210312"/>
-          </a:xfrm>
-          <a:prstGeom prst="rect">
-            <a:avLst/>
-          </a:prstGeom>
-          <a:noFill/>
-        </p:spPr>
-        <p:txBody>
-          <a:bodyPr wrap="square" lIns="0" rIns="0" tIns="0" bIns="0">
-            <a:noAutofit/>
-          </a:bodyPr>
-          <a:lstStyle/>
-          <a:p>
-            <a:pPr algn="l">
-              <a:lnSpc>
-                <a:spcPts val="1404"/>
-              </a:lnSpc>
-              <a:spcBef>
-                <a:spcPts val="0"/>
-              </a:spcBef>
-              <a:spcAft>
-                <a:spcPts val="0"/>
-              </a:spcAft>
-              <a:buNone/>
-              <a:defRPr sz="1200" b="0">
-                <a:solidFill>
-                  <a:srgbClr val="303437"/>
-                </a:solidFill>
-                <a:latin typeface="Noto Sans"/>
-              </a:defRPr>
-            </a:pPr>
-            <a:r>
-              <a:rPr sz="1200" b="0" lang="ja-JP" altLang="en-US">
-                <a:solidFill>
-                  <a:srgbClr val="626669"/>
-                </a:solidFill>
-                <a:latin typeface="Noto Sans"/>
-                <a:ea typeface="Noto Sans CJK JP"/>
-                <a:cs typeface="Noto Sans"/>
-              </a:rPr>
-              <a:t>text-davinci-003 / trial 0 / x = 15, y = 5の問題</a:t>
-            </a:r>
-          </a:p>
-        </p:txBody>
-      </p:sp>
-      <p:sp>
-        <p:nvSpPr>
-          <p:cNvPr id="5" name="quote-frame"/>
-          <p:cNvSpPr/>
-          <p:nvPr/>
-        </p:nvSpPr>
-        <p:spPr>
-          <a:xfrm>
-            <a:off x="548640" y="1645920"/>
-            <a:ext cx="8046720" cy="465666"/>
-          </a:xfrm>
-          <a:prstGeom prst="rect">
-            <a:avLst/>
-          </a:prstGeom>
-          <a:solidFill>
-            <a:srgbClr val="EBEDEB"/>
-          </a:solidFill>
-          <a:ln>
-            <a:noFill/>
-          </a:ln>
-          <a:effectLst/>
-        </p:spPr>
-        <p:style>
-          <a:lnRef idx="1">
-            <a:schemeClr val="accent1"/>
-          </a:lnRef>
-          <a:fillRef idx="3">
-            <a:schemeClr val="accent1"/>
-          </a:fillRef>
-          <a:effectRef idx="0">
-            <a:schemeClr val="accent1"/>
-          </a:effectRef>
-          <a:fontRef idx="minor">
-            <a:schemeClr val="lt1"/>
-          </a:fontRef>
-        </p:style>
-        <p:txBody>
-          <a:bodyPr rtlCol="0" anchor="t" wrap="square" lIns="177800" rIns="177800" tIns="41486" bIns="127000">
-            <a:noAutofit/>
-          </a:bodyPr>
-          <a:lstStyle/>
-          <a:p>
-            <a:pPr algn="l">
-              <a:lnSpc>
-                <a:spcPts val="2499"/>
-              </a:lnSpc>
-              <a:spcBef>
-                <a:spcPts val="0"/>
-              </a:spcBef>
-              <a:spcAft>
-                <a:spcPts val="0"/>
-              </a:spcAft>
-              <a:buNone/>
-              <a:defRPr sz="2100" b="0">
-                <a:solidFill>
-                  <a:srgbClr val="303437"/>
-                </a:solidFill>
-                <a:latin typeface="Noto Sans"/>
-              </a:defRPr>
-            </a:pPr>
-            <a:r>
-              <a:rPr sz="2100" b="0" lang="ja-JP" altLang="en-US">
-                <a:solidFill>
-                  <a:srgbClr val="303437"/>
-                </a:solidFill>
-                <a:latin typeface="Noto Sans"/>
-                <a:ea typeface="Noto Sans CJK JP"/>
-                <a:cs typeface="Noto Sans"/>
-              </a:rPr>
-              <a:t>regular: 100</a:t>
-            </a:r>
-          </a:p>
-        </p:txBody>
-      </p:sp>
-      <p:sp>
-        <p:nvSpPr>
-          <p:cNvPr id="6" name="TextBox 5"/>
-          <p:cNvSpPr txBox="1"/>
-          <p:nvPr/>
-        </p:nvSpPr>
-        <p:spPr>
-          <a:xfrm>
-            <a:off x="594360" y="2235159"/>
-            <a:ext cx="7955279" cy="365760"/>
-          </a:xfrm>
-          <a:prstGeom prst="rect">
-            <a:avLst/>
-          </a:prstGeom>
-          <a:noFill/>
-        </p:spPr>
-        <p:txBody>
-          <a:bodyPr wrap="square" lIns="0" rIns="0" tIns="0" bIns="0">
-            <a:noAutofit/>
-          </a:bodyPr>
-          <a:lstStyle/>
-          <a:p>
-            <a:pPr algn="l">
-              <a:lnSpc>
-                <a:spcPts val="2574"/>
-              </a:lnSpc>
-              <a:spcBef>
-                <a:spcPts val="0"/>
-              </a:spcBef>
-              <a:spcAft>
-                <a:spcPts val="0"/>
-              </a:spcAft>
-              <a:buNone/>
-              <a:defRPr sz="2200" b="0">
-                <a:solidFill>
-                  <a:srgbClr val="303437"/>
-                </a:solidFill>
-                <a:latin typeface="Noto Sans"/>
-              </a:defRPr>
-            </a:pPr>
-            <a:r>
-              <a:rPr sz="2200" b="1" lang="ja-JP" altLang="en-US">
-                <a:solidFill>
-                  <a:srgbClr val="B13731"/>
-                </a:solidFill>
-                <a:latin typeface="Noto Sans"/>
-                <a:ea typeface="Noto Sans CJK JP"/>
-                <a:cs typeface="Noto Sans"/>
-              </a:rPr>
-              <a:t>採点：0（参照解答は200）</a:t>
-            </a:r>
-          </a:p>
-        </p:txBody>
-      </p:sp>
-      <p:sp>
-        <p:nvSpPr>
-          <p:cNvPr id="7" name="quote-frame"/>
-          <p:cNvSpPr/>
-          <p:nvPr/>
-        </p:nvSpPr>
-        <p:spPr>
-          <a:xfrm>
-            <a:off x="548640" y="2747223"/>
-            <a:ext cx="8046720" cy="685800"/>
-          </a:xfrm>
-          <a:prstGeom prst="rect">
-            <a:avLst/>
-          </a:prstGeom>
-          <a:solidFill>
-            <a:srgbClr val="EBEDEB"/>
-          </a:solidFill>
-          <a:ln>
-            <a:noFill/>
-          </a:ln>
-          <a:effectLst/>
-        </p:spPr>
-        <p:style>
-          <a:lnRef idx="1">
-            <a:schemeClr val="accent1"/>
-          </a:lnRef>
-          <a:fillRef idx="3">
-            <a:schemeClr val="accent1"/>
-          </a:fillRef>
-          <a:effectRef idx="0">
-            <a:schemeClr val="accent1"/>
-          </a:effectRef>
-          <a:fontRef idx="minor">
-            <a:schemeClr val="lt1"/>
-          </a:fontRef>
-        </p:style>
-        <p:txBody>
-          <a:bodyPr rtlCol="0" anchor="t" wrap="square" lIns="177800" rIns="177800" tIns="50012" bIns="127000">
-            <a:noAutofit/>
-          </a:bodyPr>
-          <a:lstStyle/>
-          <a:p>
-            <a:pPr algn="l">
-              <a:lnSpc>
-                <a:spcPts val="2142"/>
-              </a:lnSpc>
-              <a:spcBef>
-                <a:spcPts val="0"/>
-              </a:spcBef>
-              <a:spcAft>
-                <a:spcPts val="0"/>
-              </a:spcAft>
-              <a:buNone/>
-              <a:defRPr sz="1800" b="0">
-                <a:solidFill>
-                  <a:srgbClr val="303437"/>
-                </a:solidFill>
-                <a:latin typeface="Noto Sans"/>
-              </a:defRPr>
-            </a:pPr>
-            <a:r>
-              <a:rPr sz="1800" b="0" lang="ja-JP" altLang="en-US">
-                <a:solidFill>
-                  <a:srgbClr val="303437"/>
-                </a:solidFill>
-                <a:latin typeface="Noto Sans"/>
-                <a:ea typeface="Noto Sans CJK JP"/>
-                <a:cs typeface="Noto Sans"/>
-              </a:rPr>
-              <a:t>chain-of-thought: Plugging in the given values for x and y, we get (15 + 5)(15 − 5) = \boxed{200}.</a:t>
-            </a:r>
-          </a:p>
-        </p:txBody>
-      </p:sp>
-      <p:sp>
-        <p:nvSpPr>
-          <p:cNvPr id="8" name="TextBox 7"/>
-          <p:cNvSpPr txBox="1"/>
-          <p:nvPr/>
-        </p:nvSpPr>
-        <p:spPr>
-          <a:xfrm>
-            <a:off x="594360" y="3567642"/>
-            <a:ext cx="7955279" cy="438912"/>
-          </a:xfrm>
-          <a:prstGeom prst="rect">
-            <a:avLst/>
-          </a:prstGeom>
-          <a:noFill/>
-        </p:spPr>
-        <p:txBody>
-          <a:bodyPr wrap="square" lIns="0" rIns="0" tIns="0" bIns="0">
-            <a:noAutofit/>
-          </a:bodyPr>
-          <a:lstStyle/>
-          <a:p>
-            <a:pPr algn="l">
-              <a:lnSpc>
-                <a:spcPts val="1989"/>
-              </a:lnSpc>
-              <a:spcBef>
-                <a:spcPts val="0"/>
-              </a:spcBef>
-              <a:spcAft>
-                <a:spcPts val="0"/>
-              </a:spcAft>
-              <a:buNone/>
-              <a:defRPr sz="1700" b="0">
-                <a:solidFill>
-                  <a:srgbClr val="303437"/>
-                </a:solidFill>
-                <a:latin typeface="Noto Sans"/>
-              </a:defRPr>
-            </a:pPr>
-            <a:r>
-              <a:rPr sz="1700" b="0" lang="ja-JP" altLang="en-US">
-                <a:solidFill>
-                  <a:srgbClr val="303437"/>
-                </a:solidFill>
-                <a:latin typeface="Noto Sans"/>
-                <a:ea typeface="Noto Sans CJK JP"/>
-                <a:cs typeface="Noto Sans"/>
-              </a:rPr>
-              <a:t>訳：xとyに与えられた値を代入すると、(15 + 5)(15 − 5) = 200。</a:t>
-            </a:r>
-          </a:p>
-        </p:txBody>
-      </p:sp>
-      <p:sp>
-        <p:nvSpPr>
-          <p:cNvPr id="9" name="TextBox 8"/>
-          <p:cNvSpPr txBox="1"/>
-          <p:nvPr/>
-        </p:nvSpPr>
-        <p:spPr>
-          <a:xfrm>
-            <a:off x="594360" y="4070563"/>
-            <a:ext cx="7955279" cy="365760"/>
-          </a:xfrm>
-          <a:prstGeom prst="rect">
-            <a:avLst/>
-          </a:prstGeom>
-          <a:noFill/>
-        </p:spPr>
-        <p:txBody>
-          <a:bodyPr wrap="square" lIns="0" rIns="0" tIns="0" bIns="0">
-            <a:noAutofit/>
-          </a:bodyPr>
-          <a:lstStyle/>
-          <a:p>
-            <a:pPr algn="l">
-              <a:lnSpc>
-                <a:spcPts val="2574"/>
-              </a:lnSpc>
-              <a:spcBef>
-                <a:spcPts val="0"/>
-              </a:spcBef>
-              <a:spcAft>
-                <a:spcPts val="0"/>
-              </a:spcAft>
-              <a:buNone/>
-              <a:defRPr sz="2200" b="0">
-                <a:solidFill>
-                  <a:srgbClr val="303437"/>
-                </a:solidFill>
-                <a:latin typeface="Noto Sans"/>
-              </a:defRPr>
-            </a:pPr>
-            <a:r>
-              <a:rPr sz="2200" b="1" lang="ja-JP" altLang="en-US">
-                <a:solidFill>
-                  <a:srgbClr val="B13731"/>
-                </a:solidFill>
-                <a:latin typeface="Noto Sans"/>
-                <a:ea typeface="Noto Sans CJK JP"/>
-                <a:cs typeface="Noto Sans"/>
-              </a:rPr>
-              <a:t>採点：1（最後のboxedから200を抽出）</a:t>
-            </a:r>
-          </a:p>
-        </p:txBody>
-      </p:sp>
-      <p:sp>
-        <p:nvSpPr>
-          <p:cNvPr id="10" name="sources"/>
-          <p:cNvSpPr txBox="1"/>
-          <p:nvPr/>
-        </p:nvSpPr>
-        <p:spPr>
-          <a:xfrm>
-            <a:off x="502920" y="4700016"/>
-            <a:ext cx="8183879" cy="530352"/>
-          </a:xfrm>
-          <a:prstGeom prst="rect">
-            <a:avLst/>
-          </a:prstGeom>
-          <a:noFill/>
-        </p:spPr>
-        <p:txBody>
-          <a:bodyPr wrap="square" lIns="0" rIns="0" tIns="0" bIns="0">
-            <a:noAutofit/>
-          </a:bodyPr>
-          <a:lstStyle/>
-          <a:p>
-            <a:pPr algn="l">
-              <a:lnSpc>
-                <a:spcPts val="940"/>
-              </a:lnSpc>
-              <a:spcBef>
-                <a:spcPts val="0"/>
-              </a:spcBef>
-              <a:spcAft>
-                <a:spcPts val="140"/>
-              </a:spcAft>
-              <a:buNone/>
-              <a:defRPr sz="810" b="0">
-                <a:solidFill>
-                  <a:srgbClr val="303437"/>
-                </a:solidFill>
-                <a:latin typeface="Noto Sans"/>
-              </a:defRPr>
-            </a:pPr>
-            <a:r>
-              <a:rPr sz="810" b="0" lang="ja-JP" altLang="en-US">
-                <a:solidFill>
-                  <a:srgbClr val="626669"/>
-                </a:solidFill>
-                <a:latin typeface="Noto Sans"/>
-                <a:ea typeface="Noto Sans CJK JP"/>
-                <a:cs typeface="Noto Sans"/>
-              </a:rPr>
-              <a:t>[1] HELM Classic v0.4.0. MATH、Level 1の固定評価。2023-11-17公開版。 regular id8 / CoT id178。本文は全文、数式は組版。</a:t>
-            </a:r>
-          </a:p>
-          <a:p>
-            <a:pPr>
-              <a:lnSpc>
-                <a:spcPts val="940"/>
-              </a:lnSpc>
-              <a:buNone/>
-              <a:defRPr sz="810" b="0">
-                <a:solidFill>
-                  <a:srgbClr val="303437"/>
-                </a:solidFill>
-                <a:latin typeface="Noto Sans"/>
-              </a:defRPr>
-            </a:pPr>
-            <a:r>
-              <a:rPr sz="810" b="0" lang="ja-JP" altLang="en-US">
-                <a:solidFill>
-                  <a:srgbClr val="626669"/>
-                </a:solidFill>
-                <a:latin typeface="Noto Sans"/>
-                <a:ea typeface="Noto Sans CJK JP"/>
-                <a:cs typeface="Noto Sans"/>
-                <a:hlinkClick r:id="rId2"/>
-              </a:rPr>
-              <a:t>https://crfm.stanford.edu/helm/classic/v0.4.0/#/groups/math_regular</a:t>
-            </a:r>
-          </a:p>
-        </p:txBody>
-      </p:sp>
-    </p:spTree>
-  </p:cSld>
-  <p:clrMapOvr>
-    <a:masterClrMapping/>
-  </p:clrMapOvr>
-</p:sld>
-</file>
-
-<file path=ppt/slides/slide16.xml><?xml version="1.0" encoding="utf-8"?>
-<p:sld xmlns:a="http://schemas.openxmlformats.org/drawingml/2006/main" xmlns:p="http://schemas.openxmlformats.org/presentationml/2006/main" xmlns:r="http://schemas.openxmlformats.org/officeDocument/2006/relationships">
-  <p:cSld>
-    <p:spTree>
-      <p:nvGrpSpPr>
-        <p:cNvPr id="1" name=""/>
-        <p:cNvGrpSpPr/>
-        <p:nvPr/>
-      </p:nvGrpSpPr>
-      <p:grpSpPr/>
-      <p:sp>
-        <p:nvSpPr>
-          <p:cNvPr id="2" name="Title 1"/>
-          <p:cNvSpPr>
-            <a:spLocks noGrp="1"/>
-          </p:cNvSpPr>
-          <p:nvPr>
-            <p:ph type="title"/>
-          </p:nvPr>
-        </p:nvSpPr>
-        <p:spPr>
-          <a:xfrm>
-            <a:off x="468172" y="650138"/>
-            <a:ext cx="8206740" cy="616305"/>
-          </a:xfrm>
-        </p:spPr>
-        <p:txBody>
-          <a:bodyPr wrap="square" lIns="0" rIns="0" tIns="0" bIns="0">
-            <a:noAutofit/>
-          </a:bodyPr>
-          <a:lstStyle/>
-          <a:p>
-            <a:pPr algn="l">
-              <a:lnSpc>
-                <a:spcPct val="110000"/>
-              </a:lnSpc>
-              <a:buNone/>
-              <a:defRPr sz="2800" b="0">
-                <a:solidFill>
-                  <a:srgbClr val="303437"/>
-                </a:solidFill>
-                <a:latin typeface="Noto Sans"/>
-              </a:defRPr>
-            </a:pPr>
-            <a:r>
-              <a:rPr sz="2800" b="1" lang="ja-JP" altLang="en-US">
-                <a:solidFill>
-                  <a:srgbClr val="303437"/>
-                </a:solidFill>
-                <a:latin typeface="Noto Sans"/>
-                <a:ea typeface="Noto Sans CJK JP"/>
-                <a:cs typeface="Noto Sans"/>
-              </a:rPr>
-              <a:t>正しい最終解答と、正しい推論を分ける</a:t>
-            </a:r>
-          </a:p>
-        </p:txBody>
-      </p:sp>
-      <p:sp>
-        <p:nvSpPr>
-          <p:cNvPr id="3" name="Text Placeholder 2"/>
-          <p:cNvSpPr>
-            <a:spLocks noGrp="1"/>
-          </p:cNvSpPr>
-          <p:nvPr>
-            <p:ph type="body" idx="1"/>
-          </p:nvPr>
-        </p:nvSpPr>
-        <p:spPr>
-          <a:xfrm>
-            <a:off x="594360" y="1463040"/>
-            <a:ext cx="7955279" cy="3044952"/>
-          </a:xfrm>
-        </p:spPr>
-        <p:txBody>
-          <a:bodyPr wrap="square" tIns="91440" bIns="91440">
-            <a:noAutofit/>
-          </a:bodyPr>
-          <a:lstStyle/>
-          <a:p>
-            <a:pPr marL="457200" indent="-355600">
-              <a:lnSpc>
-                <a:spcPts val="2618"/>
-              </a:lnSpc>
-              <a:spcAft>
-                <a:spcPts val="700"/>
-              </a:spcAft>
-              <a:buSzPct val="60455"/>
-              <a:buFont typeface="Noto Sans CJK JP"/>
-              <a:buChar char="●"/>
-              <a:defRPr sz="2200" b="0">
-                <a:solidFill>
-                  <a:srgbClr val="303437"/>
-                </a:solidFill>
-                <a:latin typeface="Noto Sans"/>
-              </a:defRPr>
-            </a:pPr>
-            <a:r>
-              <a:rPr sz="2200" b="0" lang="ja-JP" altLang="en-US">
-                <a:solidFill>
-                  <a:srgbClr val="303437"/>
-                </a:solidFill>
-                <a:latin typeface="Noto Sans"/>
-                <a:ea typeface="Noto Sans CJK JP"/>
-                <a:cs typeface="Noto Sans"/>
-              </a:rPr>
-              <a:t>公開実行のregularは100を出したため不正解。chain-of-thoughtは最後のboxedから200を抽出できるため正解。</a:t>
-            </a:r>
-          </a:p>
-          <a:p>
-            <a:pPr marL="457200" indent="-355600">
-              <a:lnSpc>
-                <a:spcPts val="2618"/>
-              </a:lnSpc>
-              <a:spcAft>
-                <a:spcPts val="700"/>
-              </a:spcAft>
-              <a:buSzPct val="60455"/>
-              <a:buFont typeface="Noto Sans CJK JP"/>
-              <a:buChar char="●"/>
-              <a:defRPr sz="2200" b="0">
-                <a:solidFill>
-                  <a:srgbClr val="303437"/>
-                </a:solidFill>
-                <a:latin typeface="Noto Sans"/>
-              </a:defRPr>
-            </a:pPr>
-            <a:r>
-              <a:rPr sz="2200" b="0" lang="ja-JP" altLang="en-US">
-                <a:solidFill>
-                  <a:srgbClr val="303437"/>
-                </a:solidFill>
-                <a:latin typeface="Noto Sans"/>
-                <a:ea typeface="Noto Sans CJK JP"/>
-                <a:cs typeface="Noto Sans"/>
-              </a:rPr>
-              <a:t>この採点は、途中の各等式や説明が正しいかを証明するものではない。</a:t>
-            </a:r>
-          </a:p>
-          <a:p>
-            <a:pPr marL="457200" indent="-355600">
-              <a:lnSpc>
-                <a:spcPts val="2618"/>
-              </a:lnSpc>
-              <a:spcAft>
-                <a:spcPts val="0"/>
-              </a:spcAft>
-              <a:buSzPct val="60455"/>
-              <a:buFont typeface="Noto Sans CJK JP"/>
-              <a:buChar char="●"/>
-              <a:defRPr sz="2200" b="0">
-                <a:solidFill>
-                  <a:srgbClr val="303437"/>
-                </a:solidFill>
-                <a:latin typeface="Noto Sans"/>
-              </a:defRPr>
-            </a:pPr>
-            <a:r>
-              <a:rPr sz="2200" b="0" lang="ja-JP" altLang="en-US">
-                <a:solidFill>
-                  <a:srgbClr val="303437"/>
-                </a:solidFill>
-                <a:latin typeface="Noto Sans"/>
-                <a:ea typeface="Noto Sans CJK JP"/>
-                <a:cs typeface="Noto Sans"/>
-              </a:rPr>
-              <a:t>解説付きの学習データは、最終解答だけでは見えない解法や誤りを調べる材料にもなる。</a:t>
-            </a:r>
-          </a:p>
-        </p:txBody>
-      </p:sp>
-      <p:sp>
-        <p:nvSpPr>
-          <p:cNvPr id="4" name="Title 3"/>
-          <p:cNvSpPr>
-            <a:spLocks noGrp="1"/>
-          </p:cNvSpPr>
-          <p:nvPr>
-            <p:ph type="title" idx="2"/>
-          </p:nvPr>
-        </p:nvSpPr>
-        <p:spPr>
-          <a:xfrm>
-            <a:off x="75895" y="0"/>
-            <a:ext cx="8115300" cy="480060"/>
-          </a:xfrm>
-        </p:spPr>
-        <p:txBody>
-          <a:bodyPr wrap="square" lIns="0" rIns="0" tIns="0" bIns="0" anchor="ctr">
-            <a:noAutofit/>
-          </a:bodyPr>
-          <a:lstStyle/>
-          <a:p>
-            <a:pPr algn="l">
-              <a:lnSpc>
-                <a:spcPct val="110000"/>
-              </a:lnSpc>
-              <a:buNone/>
-              <a:defRPr sz="1400" b="0">
-                <a:solidFill>
-                  <a:srgbClr val="303437"/>
-                </a:solidFill>
-                <a:latin typeface="Noto Sans"/>
-              </a:defRPr>
-            </a:pPr>
-            <a:r>
-              <a:rPr sz="1400" b="1" lang="ja-JP" altLang="en-US">
-                <a:solidFill>
-                  <a:srgbClr val="FFFEF8"/>
-                </a:solidFill>
-                <a:latin typeface="Noto Sans"/>
-                <a:ea typeface="Noto Sans CJK JP"/>
-                <a:cs typeface="Noto Sans"/>
-              </a:rPr>
-              <a:t>2. 採点とHELMの比較条件</a:t>
-            </a:r>
-          </a:p>
-        </p:txBody>
-      </p:sp>
-      <p:sp>
-        <p:nvSpPr>
-          <p:cNvPr id="5" name="sources"/>
-          <p:cNvSpPr txBox="1"/>
-          <p:nvPr/>
-        </p:nvSpPr>
-        <p:spPr>
-          <a:xfrm>
-            <a:off x="502920" y="4700016"/>
-            <a:ext cx="8183879" cy="530352"/>
-          </a:xfrm>
-          <a:prstGeom prst="rect">
-            <a:avLst/>
-          </a:prstGeom>
-          <a:noFill/>
-        </p:spPr>
-        <p:txBody>
-          <a:bodyPr wrap="square" lIns="0" rIns="0" tIns="0" bIns="0">
-            <a:noAutofit/>
-          </a:bodyPr>
-          <a:lstStyle/>
-          <a:p>
-            <a:pPr algn="l">
-              <a:lnSpc>
-                <a:spcPts val="940"/>
-              </a:lnSpc>
-              <a:spcBef>
-                <a:spcPts val="0"/>
-              </a:spcBef>
-              <a:spcAft>
-                <a:spcPts val="140"/>
-              </a:spcAft>
-              <a:buNone/>
-              <a:defRPr sz="810" b="0">
-                <a:solidFill>
-                  <a:srgbClr val="303437"/>
-                </a:solidFill>
-                <a:latin typeface="Noto Sans"/>
-              </a:defRPr>
-            </a:pPr>
-            <a:r>
-              <a:rPr sz="810" b="0" lang="ja-JP" altLang="en-US">
-                <a:solidFill>
-                  <a:srgbClr val="626669"/>
-                </a:solidFill>
-                <a:latin typeface="Noto Sans"/>
-                <a:ea typeface="Noto Sans CJK JP"/>
-                <a:cs typeface="Noto Sans"/>
-              </a:rPr>
-              <a:t>[1] Stanford CRFM. MATHScenario v0.3.0. 参照解答の抽出と表記正規化。</a:t>
-            </a:r>
-          </a:p>
-          <a:p>
-            <a:pPr>
-              <a:lnSpc>
-                <a:spcPts val="940"/>
-              </a:lnSpc>
-              <a:buNone/>
-              <a:defRPr sz="810" b="0">
-                <a:solidFill>
-                  <a:srgbClr val="303437"/>
-                </a:solidFill>
-                <a:latin typeface="Noto Sans"/>
-              </a:defRPr>
-            </a:pPr>
-            <a:r>
-              <a:rPr sz="810" b="0" lang="ja-JP" altLang="en-US">
-                <a:solidFill>
-                  <a:srgbClr val="626669"/>
-                </a:solidFill>
-                <a:latin typeface="Noto Sans"/>
-                <a:ea typeface="Noto Sans CJK JP"/>
-                <a:cs typeface="Noto Sans"/>
-                <a:hlinkClick r:id="rId2"/>
-              </a:rPr>
-              <a:t>https://github.com/stanford-crfm/helm/blob/v0.3.0/src/helm/benchmark/scenarios/math_scenario.py</a:t>
+                <a:hlinkClick r:id="rId3"/>
+              </a:rPr>
+              <a:t>https://arxiv.org/abs/2103.03874</a:t>
             </a:r>
           </a:p>
         </p:txBody>
@@ -11391,7 +9724,7 @@
                 <a:ea typeface="Noto Sans CJK JP"/>
                 <a:cs typeface="Noto Sans"/>
               </a:rPr>
-              <a:t>2. 採点とHELMの比較条件</a:t>
+              <a:t>2. 最終解答の採点と2021年の成績</a:t>
             </a:r>
           </a:p>
         </p:txBody>
@@ -11799,7 +10132,7 @@
                 <a:ea typeface="Noto Sans CJK JP"/>
                 <a:cs typeface="Noto Sans"/>
               </a:rPr>
-              <a:t>MATH test全5,000問、全7分野・全難度。AMPSは別の数学事前学習データで、MATHとは区別される。</a:t>
+              <a:t>MATH test全5,000問、全7分野・難度1〜5を評価。AMPSは、数学の基礎を学ぶために同時公開された別の事前学習データ。</a:t>
             </a:r>
           </a:p>
         </p:txBody>
@@ -11880,1224 +10213,6 @@
                 <a:hlinkClick r:id="rId2"/>
               </a:rPr>
               <a:t>https://arxiv.org/abs/2103.03874</a:t>
-            </a:r>
-          </a:p>
-        </p:txBody>
-      </p:sp>
-    </p:spTree>
-  </p:cSld>
-  <p:clrMapOvr>
-    <a:masterClrMapping/>
-  </p:clrMapOvr>
-</p:sld>
-</file>
-
-<file path=ppt/slides/slide18.xml><?xml version="1.0" encoding="utf-8"?>
-<p:sld xmlns:a="http://schemas.openxmlformats.org/drawingml/2006/main" xmlns:p="http://schemas.openxmlformats.org/presentationml/2006/main" xmlns:r="http://schemas.openxmlformats.org/officeDocument/2006/relationships">
-  <p:cSld>
-    <p:spTree>
-      <p:nvGrpSpPr>
-        <p:cNvPr id="1" name=""/>
-        <p:cNvGrpSpPr/>
-        <p:nvPr/>
-      </p:nvGrpSpPr>
-      <p:grpSpPr/>
-      <p:sp>
-        <p:nvSpPr>
-          <p:cNvPr id="2" name="Title 1"/>
-          <p:cNvSpPr>
-            <a:spLocks noGrp="1"/>
-          </p:cNvSpPr>
-          <p:nvPr>
-            <p:ph type="title"/>
-          </p:nvPr>
-        </p:nvSpPr>
-        <p:spPr>
-          <a:xfrm>
-            <a:off x="468172" y="650138"/>
-            <a:ext cx="8206740" cy="616305"/>
-          </a:xfrm>
-        </p:spPr>
-        <p:txBody>
-          <a:bodyPr wrap="square" lIns="0" rIns="0" tIns="0" bIns="0">
-            <a:noAutofit/>
-          </a:bodyPr>
-          <a:lstStyle/>
-          <a:p>
-            <a:pPr algn="l">
-              <a:lnSpc>
-                <a:spcPct val="110000"/>
-              </a:lnSpc>
-              <a:buNone/>
-              <a:defRPr sz="2800" b="0">
-                <a:solidFill>
-                  <a:srgbClr val="303437"/>
-                </a:solidFill>
-                <a:latin typeface="Noto Sans"/>
-              </a:defRPr>
-            </a:pPr>
-            <a:r>
-              <a:rPr sz="2800" b="1" lang="ja-JP" altLang="en-US">
-                <a:solidFill>
-                  <a:srgbClr val="303437"/>
-                </a:solidFill>
-                <a:latin typeface="Noto Sans"/>
-                <a:ea typeface="Noto Sans CJK JP"/>
-                <a:cs typeface="Noto Sans"/>
-              </a:rPr>
-              <a:t>HELMはLevel 1の437問を評価する</a:t>
-            </a:r>
-          </a:p>
-        </p:txBody>
-      </p:sp>
-      <p:sp>
-        <p:nvSpPr>
-          <p:cNvPr id="3" name="Text Placeholder 2"/>
-          <p:cNvSpPr>
-            <a:spLocks noGrp="1"/>
-          </p:cNvSpPr>
-          <p:nvPr>
-            <p:ph type="body" idx="1"/>
-          </p:nvPr>
-        </p:nvSpPr>
-        <p:spPr>
-          <a:xfrm>
-            <a:off x="594360" y="1463040"/>
-            <a:ext cx="7955279" cy="3044952"/>
-          </a:xfrm>
-        </p:spPr>
-        <p:txBody>
-          <a:bodyPr wrap="square" tIns="91440" bIns="91440">
-            <a:noAutofit/>
-          </a:bodyPr>
-          <a:lstStyle/>
-          <a:p>
-            <a:pPr marL="457200" indent="-355600">
-              <a:lnSpc>
-                <a:spcPts val="2618"/>
-              </a:lnSpc>
-              <a:spcAft>
-                <a:spcPts val="700"/>
-              </a:spcAft>
-              <a:buSzPct val="60455"/>
-              <a:buFont typeface="Noto Sans CJK JP"/>
-              <a:buChar char="●"/>
-              <a:defRPr sz="2200" b="0">
-                <a:solidFill>
-                  <a:srgbClr val="303437"/>
-                </a:solidFill>
-                <a:latin typeface="Noto Sans"/>
-              </a:defRPr>
-            </a:pPr>
-            <a:r>
-              <a:rPr sz="2200" b="0" lang="ja-JP" altLang="en-US">
-                <a:solidFill>
-                  <a:srgbClr val="303437"/>
-                </a:solidFill>
-                <a:latin typeface="Noto Sans"/>
-                <a:ea typeface="Noto Sans CJK JP"/>
-                <a:cs typeface="Noto Sans"/>
-              </a:rPr>
-              <a:t>HELM Classicの二つの条件は、7分野のLevel 1に絞った437問を評価する。</a:t>
-            </a:r>
-          </a:p>
-          <a:p>
-            <a:pPr marL="457200" indent="-355600">
-              <a:lnSpc>
-                <a:spcPts val="2618"/>
-              </a:lnSpc>
-              <a:spcAft>
-                <a:spcPts val="700"/>
-              </a:spcAft>
-              <a:buSzPct val="60455"/>
-              <a:buFont typeface="Noto Sans CJK JP"/>
-              <a:buChar char="●"/>
-              <a:defRPr sz="2200" b="0">
-                <a:solidFill>
-                  <a:srgbClr val="303437"/>
-                </a:solidFill>
-                <a:latin typeface="Noto Sans"/>
-              </a:defRPr>
-            </a:pPr>
-            <a:r>
-              <a:rPr sz="2200" b="0" lang="ja-JP" altLang="en-US">
-                <a:solidFill>
-                  <a:srgbClr val="303437"/>
-                </a:solidFill>
-                <a:latin typeface="Noto Sans"/>
-                <a:ea typeface="Noto Sans CJK JP"/>
-                <a:cs typeface="Noto Sans"/>
-              </a:rPr>
-              <a:t>全testの5,000問のうち8.74%。Level 2〜5の4,563問は、この二つの公開グループの評価には入らない。</a:t>
-            </a:r>
-          </a:p>
-          <a:p>
-            <a:pPr marL="457200" indent="-355600">
-              <a:lnSpc>
-                <a:spcPts val="2618"/>
-              </a:lnSpc>
-              <a:spcAft>
-                <a:spcPts val="0"/>
-              </a:spcAft>
-              <a:buSzPct val="60455"/>
-              <a:buFont typeface="Noto Sans CJK JP"/>
-              <a:buChar char="●"/>
-              <a:defRPr sz="2200" b="0">
-                <a:solidFill>
-                  <a:srgbClr val="303437"/>
-                </a:solidFill>
-                <a:latin typeface="Noto Sans"/>
-              </a:defRPr>
-            </a:pPr>
-            <a:r>
-              <a:rPr sz="2200" b="0" lang="ja-JP" altLang="en-US">
-                <a:solidFill>
-                  <a:srgbClr val="303437"/>
-                </a:solidFill>
-                <a:latin typeface="Noto Sans"/>
-                <a:ea typeface="Noto Sans CJK JP"/>
-                <a:cs typeface="Noto Sans"/>
-              </a:rPr>
-              <a:t>以下は各分野の実行値から、評価問題数で重み付けして再集計した正解率。各分野の値は3試行平均。</a:t>
-            </a:r>
-          </a:p>
-        </p:txBody>
-      </p:sp>
-      <p:sp>
-        <p:nvSpPr>
-          <p:cNvPr id="4" name="Title 3"/>
-          <p:cNvSpPr>
-            <a:spLocks noGrp="1"/>
-          </p:cNvSpPr>
-          <p:nvPr>
-            <p:ph type="title" idx="2"/>
-          </p:nvPr>
-        </p:nvSpPr>
-        <p:spPr>
-          <a:xfrm>
-            <a:off x="75895" y="0"/>
-            <a:ext cx="8115300" cy="480060"/>
-          </a:xfrm>
-        </p:spPr>
-        <p:txBody>
-          <a:bodyPr wrap="square" lIns="0" rIns="0" tIns="0" bIns="0" anchor="ctr">
-            <a:noAutofit/>
-          </a:bodyPr>
-          <a:lstStyle/>
-          <a:p>
-            <a:pPr algn="l">
-              <a:lnSpc>
-                <a:spcPct val="110000"/>
-              </a:lnSpc>
-              <a:buNone/>
-              <a:defRPr sz="1400" b="0">
-                <a:solidFill>
-                  <a:srgbClr val="303437"/>
-                </a:solidFill>
-                <a:latin typeface="Noto Sans"/>
-              </a:defRPr>
-            </a:pPr>
-            <a:r>
-              <a:rPr sz="1400" b="1" lang="ja-JP" altLang="en-US">
-                <a:solidFill>
-                  <a:srgbClr val="FFFEF8"/>
-                </a:solidFill>
-                <a:latin typeface="Noto Sans"/>
-                <a:ea typeface="Noto Sans CJK JP"/>
-                <a:cs typeface="Noto Sans"/>
-              </a:rPr>
-              <a:t>2. 採点とHELMの比較条件</a:t>
-            </a:r>
-          </a:p>
-        </p:txBody>
-      </p:sp>
-      <p:sp>
-        <p:nvSpPr>
-          <p:cNvPr id="5" name="sources"/>
-          <p:cNvSpPr txBox="1"/>
-          <p:nvPr/>
-        </p:nvSpPr>
-        <p:spPr>
-          <a:xfrm>
-            <a:off x="502920" y="4700016"/>
-            <a:ext cx="8183879" cy="530352"/>
-          </a:xfrm>
-          <a:prstGeom prst="rect">
-            <a:avLst/>
-          </a:prstGeom>
-          <a:noFill/>
-        </p:spPr>
-        <p:txBody>
-          <a:bodyPr wrap="square" lIns="0" rIns="0" tIns="0" bIns="0">
-            <a:noAutofit/>
-          </a:bodyPr>
-          <a:lstStyle/>
-          <a:p>
-            <a:pPr algn="l">
-              <a:lnSpc>
-                <a:spcPts val="940"/>
-              </a:lnSpc>
-              <a:spcBef>
-                <a:spcPts val="0"/>
-              </a:spcBef>
-              <a:spcAft>
-                <a:spcPts val="140"/>
-              </a:spcAft>
-              <a:buNone/>
-              <a:defRPr sz="810" b="0">
-                <a:solidFill>
-                  <a:srgbClr val="303437"/>
-                </a:solidFill>
-                <a:latin typeface="Noto Sans"/>
-              </a:defRPr>
-            </a:pPr>
-            <a:r>
-              <a:rPr sz="810" b="0" lang="ja-JP" altLang="en-US">
-                <a:solidFill>
-                  <a:srgbClr val="626669"/>
-                </a:solidFill>
-                <a:latin typeface="Noto Sans"/>
-                <a:ea typeface="Noto Sans CJK JP"/>
-                <a:cs typeface="Noto Sans"/>
-              </a:rPr>
-              <a:t>[1] HELM Classic v0.4.0. MATH、Level 1の固定評価。2023-11-17公開版。</a:t>
-            </a:r>
-            <a:r>
-              <a:rPr sz="810" b="0" lang="ja-JP" altLang="en-US">
-                <a:solidFill>
-                  <a:srgbClr val="626669"/>
-                </a:solidFill>
-                <a:latin typeface="Noto Sans"/>
-                <a:ea typeface="Noto Sans CJK JP"/>
-                <a:cs typeface="Noto Sans"/>
-              </a:rPr>
-              <a:t>  </a:t>
-            </a:r>
-            <a:r>
-              <a:rPr sz="810" b="0" lang="ja-JP" altLang="en-US">
-                <a:solidFill>
-                  <a:srgbClr val="626669"/>
-                </a:solidFill>
-                <a:latin typeface="Noto Sans"/>
-                <a:ea typeface="Noto Sans CJK JP"/>
-                <a:cs typeface="Noto Sans"/>
-                <a:hlinkClick r:id="rId2"/>
-              </a:rPr>
-              <a:t>https://crfm.stanford.edu/helm/classic/v0.4.0/#/groups/math_regular</a:t>
-            </a:r>
-          </a:p>
-        </p:txBody>
-      </p:sp>
-    </p:spTree>
-  </p:cSld>
-  <p:clrMapOvr>
-    <a:masterClrMapping/>
-  </p:clrMapOvr>
-</p:sld>
-</file>
-
-<file path=ppt/slides/slide19.xml><?xml version="1.0" encoding="utf-8"?>
-<p:sld xmlns:a="http://schemas.openxmlformats.org/drawingml/2006/main" xmlns:p="http://schemas.openxmlformats.org/presentationml/2006/main" xmlns:r="http://schemas.openxmlformats.org/officeDocument/2006/relationships">
-  <p:cSld>
-    <p:spTree>
-      <p:nvGrpSpPr>
-        <p:cNvPr id="1" name=""/>
-        <p:cNvGrpSpPr/>
-        <p:nvPr/>
-      </p:nvGrpSpPr>
-      <p:grpSpPr/>
-      <p:sp>
-        <p:nvSpPr>
-          <p:cNvPr id="2" name="Title 1"/>
-          <p:cNvSpPr>
-            <a:spLocks noGrp="1"/>
-          </p:cNvSpPr>
-          <p:nvPr>
-            <p:ph type="title"/>
-          </p:nvPr>
-        </p:nvSpPr>
-        <p:spPr>
-          <a:xfrm>
-            <a:off x="468172" y="650138"/>
-            <a:ext cx="8206740" cy="616305"/>
-          </a:xfrm>
-        </p:spPr>
-        <p:txBody>
-          <a:bodyPr wrap="square" lIns="0" rIns="0" tIns="0" bIns="0">
-            <a:noAutofit/>
-          </a:bodyPr>
-          <a:lstStyle/>
-          <a:p>
-            <a:pPr algn="l">
-              <a:lnSpc>
-                <a:spcPct val="110000"/>
-              </a:lnSpc>
-              <a:buNone/>
-              <a:defRPr sz="2800" b="0">
-                <a:solidFill>
-                  <a:srgbClr val="303437"/>
-                </a:solidFill>
-                <a:latin typeface="Noto Sans"/>
-              </a:defRPr>
-            </a:pPr>
-            <a:r>
-              <a:rPr sz="2800" b="1" lang="ja-JP" altLang="en-US">
-                <a:solidFill>
-                  <a:srgbClr val="303437"/>
-                </a:solidFill>
-                <a:latin typeface="Noto Sans"/>
-                <a:ea typeface="Noto Sans CJK JP"/>
-                <a:cs typeface="Noto Sans"/>
-              </a:rPr>
-              <a:t>解説付き条件の正解率はモデルで異なる</a:t>
-            </a:r>
-          </a:p>
-        </p:txBody>
-      </p:sp>
-      <p:sp>
-        <p:nvSpPr>
-          <p:cNvPr id="3" name="Title 2"/>
-          <p:cNvSpPr>
-            <a:spLocks noGrp="1"/>
-          </p:cNvSpPr>
-          <p:nvPr>
-            <p:ph type="title" idx="2"/>
-          </p:nvPr>
-        </p:nvSpPr>
-        <p:spPr>
-          <a:xfrm>
-            <a:off x="75895" y="0"/>
-            <a:ext cx="8115300" cy="480060"/>
-          </a:xfrm>
-        </p:spPr>
-        <p:txBody>
-          <a:bodyPr wrap="square" lIns="0" rIns="0" tIns="0" bIns="0" anchor="ctr">
-            <a:noAutofit/>
-          </a:bodyPr>
-          <a:lstStyle/>
-          <a:p>
-            <a:pPr algn="l">
-              <a:lnSpc>
-                <a:spcPct val="110000"/>
-              </a:lnSpc>
-              <a:buNone/>
-              <a:defRPr sz="1400" b="0">
-                <a:solidFill>
-                  <a:srgbClr val="303437"/>
-                </a:solidFill>
-                <a:latin typeface="Noto Sans"/>
-              </a:defRPr>
-            </a:pPr>
-            <a:r>
-              <a:rPr sz="1400" b="1" lang="ja-JP" altLang="en-US">
-                <a:solidFill>
-                  <a:srgbClr val="FFFEF8"/>
-                </a:solidFill>
-                <a:latin typeface="Noto Sans"/>
-                <a:ea typeface="Noto Sans CJK JP"/>
-                <a:cs typeface="Noto Sans"/>
-              </a:rPr>
-              <a:t>2. 採点とHELMの比較条件</a:t>
-            </a:r>
-          </a:p>
-        </p:txBody>
-      </p:sp>
-      <p:graphicFrame>
-        <p:nvGraphicFramePr>
-          <p:cNvPr id="4" name="Table 3"/>
-          <p:cNvGraphicFramePr>
-            <a:graphicFrameLocks noGrp="1"/>
-          </p:cNvGraphicFramePr>
-          <p:nvPr/>
-        </p:nvGraphicFramePr>
-        <p:xfrm>
-          <a:off x="548640" y="1508760"/>
-          <a:ext cx="8046720" cy="1828800"/>
-        </p:xfrm>
-        <a:graphic>
-          <a:graphicData uri="http://schemas.openxmlformats.org/drawingml/2006/table">
-            <a:tbl>
-              <a:tblPr firstRow="0" bandRow="0"/>
-              <a:tblGrid>
-                <a:gridCol w="4389120"/>
-                <a:gridCol w="1828800"/>
-                <a:gridCol w="1828800"/>
-              </a:tblGrid>
-              <a:tr h="457200">
-                <a:tc>
-                  <a:txBody>
-                    <a:bodyPr wrap="square">
-                      <a:noAutofit/>
-                    </a:bodyPr>
-                    <a:lstStyle/>
-                    <a:p>
-                      <a:pPr algn="l">
-                        <a:lnSpc>
-                          <a:spcPts val="2300"/>
-                        </a:lnSpc>
-                        <a:buNone/>
-                        <a:defRPr sz="2000" b="0">
-                          <a:solidFill>
-                            <a:srgbClr val="303437"/>
-                          </a:solidFill>
-                          <a:latin typeface="Noto Sans"/>
-                        </a:defRPr>
-                      </a:pPr>
-                      <a:r>
-                        <a:rPr sz="2000" b="0" lang="ja-JP" altLang="en-US">
-                          <a:solidFill>
-                            <a:srgbClr val="303437"/>
-                          </a:solidFill>
-                          <a:latin typeface="Noto Sans"/>
-                          <a:ea typeface="Noto Sans CJK JP"/>
-                          <a:cs typeface="Noto Sans"/>
-                        </a:rPr>
-                        <a:t>モデル（公開年）</a:t>
-                      </a:r>
-                    </a:p>
-                  </a:txBody>
-                  <a:tcPr marL="63500" marR="63500" marT="38100" marB="38100" anchor="ctr">
-                    <a:lnL w="7620">
-                      <a:noFill/>
-                    </a:lnL>
-                    <a:lnR w="7620">
-                      <a:noFill/>
-                    </a:lnR>
-                    <a:lnT w="15240">
-                      <a:solidFill>
-                        <a:srgbClr val="626669"/>
-                      </a:solidFill>
-                      <a:prstDash val="solid"/>
-                    </a:lnT>
-                    <a:lnB w="7620">
-                      <a:solidFill>
-                        <a:srgbClr val="626669"/>
-                      </a:solidFill>
-                      <a:prstDash val="solid"/>
-                    </a:lnB>
-                    <a:solidFill>
-                      <a:srgbClr val="FFFEF8"/>
-                    </a:solidFill>
-                  </a:tcPr>
-                </a:tc>
-                <a:tc>
-                  <a:txBody>
-                    <a:bodyPr wrap="square">
-                      <a:noAutofit/>
-                    </a:bodyPr>
-                    <a:lstStyle/>
-                    <a:p>
-                      <a:pPr algn="r">
-                        <a:lnSpc>
-                          <a:spcPts val="2300"/>
-                        </a:lnSpc>
-                        <a:buNone/>
-                        <a:defRPr sz="2000" b="0">
-                          <a:solidFill>
-                            <a:srgbClr val="303437"/>
-                          </a:solidFill>
-                          <a:latin typeface="Noto Sans"/>
-                        </a:defRPr>
-                      </a:pPr>
-                      <a:r>
-                        <a:rPr sz="2000" b="0" lang="ja-JP" altLang="en-US">
-                          <a:solidFill>
-                            <a:srgbClr val="303437"/>
-                          </a:solidFill>
-                          <a:latin typeface="Noto Sans"/>
-                          <a:ea typeface="Noto Sans CJK JP"/>
-                          <a:cs typeface="Noto Sans"/>
-                        </a:rPr>
-                        <a:t>regular</a:t>
-                      </a:r>
-                    </a:p>
-                  </a:txBody>
-                  <a:tcPr marL="63500" marR="63500" marT="38100" marB="38100" anchor="ctr">
-                    <a:lnL w="7620">
-                      <a:noFill/>
-                    </a:lnL>
-                    <a:lnR w="7620">
-                      <a:noFill/>
-                    </a:lnR>
-                    <a:lnT w="15240">
-                      <a:solidFill>
-                        <a:srgbClr val="626669"/>
-                      </a:solidFill>
-                      <a:prstDash val="solid"/>
-                    </a:lnT>
-                    <a:lnB w="7620">
-                      <a:solidFill>
-                        <a:srgbClr val="626669"/>
-                      </a:solidFill>
-                      <a:prstDash val="solid"/>
-                    </a:lnB>
-                    <a:solidFill>
-                      <a:srgbClr val="FFFEF8"/>
-                    </a:solidFill>
-                  </a:tcPr>
-                </a:tc>
-                <a:tc>
-                  <a:txBody>
-                    <a:bodyPr wrap="square">
-                      <a:noAutofit/>
-                    </a:bodyPr>
-                    <a:lstStyle/>
-                    <a:p>
-                      <a:pPr algn="r">
-                        <a:lnSpc>
-                          <a:spcPts val="2300"/>
-                        </a:lnSpc>
-                        <a:buNone/>
-                        <a:defRPr sz="2000" b="0">
-                          <a:solidFill>
-                            <a:srgbClr val="303437"/>
-                          </a:solidFill>
-                          <a:latin typeface="Noto Sans"/>
-                        </a:defRPr>
-                      </a:pPr>
-                      <a:r>
-                        <a:rPr sz="2000" b="0" lang="ja-JP" altLang="en-US">
-                          <a:solidFill>
-                            <a:srgbClr val="303437"/>
-                          </a:solidFill>
-                          <a:latin typeface="Noto Sans"/>
-                          <a:ea typeface="Noto Sans CJK JP"/>
-                          <a:cs typeface="Noto Sans"/>
-                        </a:rPr>
-                        <a:t>解説付き</a:t>
-                      </a:r>
-                    </a:p>
-                  </a:txBody>
-                  <a:tcPr marL="63500" marR="63500" marT="38100" marB="38100" anchor="ctr">
-                    <a:lnL w="7620">
-                      <a:noFill/>
-                    </a:lnL>
-                    <a:lnR w="7620">
-                      <a:noFill/>
-                    </a:lnR>
-                    <a:lnT w="15240">
-                      <a:solidFill>
-                        <a:srgbClr val="626669"/>
-                      </a:solidFill>
-                      <a:prstDash val="solid"/>
-                    </a:lnT>
-                    <a:lnB w="7620">
-                      <a:solidFill>
-                        <a:srgbClr val="626669"/>
-                      </a:solidFill>
-                      <a:prstDash val="solid"/>
-                    </a:lnB>
-                    <a:solidFill>
-                      <a:srgbClr val="FFFEF8"/>
-                    </a:solidFill>
-                  </a:tcPr>
-                </a:tc>
-              </a:tr>
-              <a:tr h="457200">
-                <a:tc>
-                  <a:txBody>
-                    <a:bodyPr wrap="square">
-                      <a:noAutofit/>
-                    </a:bodyPr>
-                    <a:lstStyle/>
-                    <a:p>
-                      <a:pPr algn="l">
-                        <a:lnSpc>
-                          <a:spcPts val="2300"/>
-                        </a:lnSpc>
-                        <a:buNone/>
-                        <a:defRPr sz="2000" b="0">
-                          <a:solidFill>
-                            <a:srgbClr val="303437"/>
-                          </a:solidFill>
-                          <a:latin typeface="Noto Sans"/>
-                        </a:defRPr>
-                      </a:pPr>
-                      <a:r>
-                        <a:rPr sz="2000" b="0" lang="ja-JP" altLang="en-US">
-                          <a:solidFill>
-                            <a:srgbClr val="303437"/>
-                          </a:solidFill>
-                          <a:latin typeface="Noto Sans"/>
-                          <a:ea typeface="Noto Sans CJK JP"/>
-                          <a:cs typeface="Noto Sans"/>
-                        </a:rPr>
-                        <a:t>OPT-175B（2022）</a:t>
-                      </a:r>
-                    </a:p>
-                  </a:txBody>
-                  <a:tcPr marL="63500" marR="63500" marT="38100" marB="38100" anchor="ctr">
-                    <a:lnL w="7620">
-                      <a:noFill/>
-                    </a:lnL>
-                    <a:lnR w="7620">
-                      <a:noFill/>
-                    </a:lnR>
-                    <a:lnT w="7620">
-                      <a:solidFill>
-                        <a:srgbClr val="626669"/>
-                      </a:solidFill>
-                      <a:prstDash val="solid"/>
-                    </a:lnT>
-                    <a:lnB w="7620">
-                      <a:noFill/>
-                    </a:lnB>
-                    <a:solidFill>
-                      <a:srgbClr val="FFFEF8"/>
-                    </a:solidFill>
-                  </a:tcPr>
-                </a:tc>
-                <a:tc>
-                  <a:txBody>
-                    <a:bodyPr wrap="square">
-                      <a:noAutofit/>
-                    </a:bodyPr>
-                    <a:lstStyle/>
-                    <a:p>
-                      <a:pPr algn="r">
-                        <a:lnSpc>
-                          <a:spcPts val="2300"/>
-                        </a:lnSpc>
-                        <a:buNone/>
-                        <a:defRPr sz="2000" b="0">
-                          <a:solidFill>
-                            <a:srgbClr val="303437"/>
-                          </a:solidFill>
-                          <a:latin typeface="Noto Sans"/>
-                        </a:defRPr>
-                      </a:pPr>
-                      <a:r>
-                        <a:rPr sz="2000" b="0" lang="ja-JP" altLang="en-US">
-                          <a:solidFill>
-                            <a:srgbClr val="303437"/>
-                          </a:solidFill>
-                          <a:latin typeface="Noto Sans"/>
-                          <a:ea typeface="Noto Sans CJK JP"/>
-                          <a:cs typeface="Noto Sans"/>
-                        </a:rPr>
-                        <a:t>6.25%</a:t>
-                      </a:r>
-                    </a:p>
-                  </a:txBody>
-                  <a:tcPr marL="63500" marR="63500" marT="38100" marB="38100" anchor="ctr">
-                    <a:lnL w="7620">
-                      <a:noFill/>
-                    </a:lnL>
-                    <a:lnR w="7620">
-                      <a:noFill/>
-                    </a:lnR>
-                    <a:lnT w="7620">
-                      <a:solidFill>
-                        <a:srgbClr val="626669"/>
-                      </a:solidFill>
-                      <a:prstDash val="solid"/>
-                    </a:lnT>
-                    <a:lnB w="7620">
-                      <a:noFill/>
-                    </a:lnB>
-                    <a:solidFill>
-                      <a:srgbClr val="FFFEF8"/>
-                    </a:solidFill>
-                  </a:tcPr>
-                </a:tc>
-                <a:tc>
-                  <a:txBody>
-                    <a:bodyPr wrap="square">
-                      <a:noAutofit/>
-                    </a:bodyPr>
-                    <a:lstStyle/>
-                    <a:p>
-                      <a:pPr algn="r">
-                        <a:lnSpc>
-                          <a:spcPts val="2300"/>
-                        </a:lnSpc>
-                        <a:buNone/>
-                        <a:defRPr sz="2000" b="0">
-                          <a:solidFill>
-                            <a:srgbClr val="303437"/>
-                          </a:solidFill>
-                          <a:latin typeface="Noto Sans"/>
-                        </a:defRPr>
-                      </a:pPr>
-                      <a:r>
-                        <a:rPr sz="2000" b="0" lang="ja-JP" altLang="en-US">
-                          <a:solidFill>
-                            <a:srgbClr val="303437"/>
-                          </a:solidFill>
-                          <a:latin typeface="Noto Sans"/>
-                          <a:ea typeface="Noto Sans CJK JP"/>
-                          <a:cs typeface="Noto Sans"/>
-                        </a:rPr>
-                        <a:t>1.91%</a:t>
-                      </a:r>
-                    </a:p>
-                  </a:txBody>
-                  <a:tcPr marL="63500" marR="63500" marT="38100" marB="38100" anchor="ctr">
-                    <a:lnL w="7620">
-                      <a:noFill/>
-                    </a:lnL>
-                    <a:lnR w="7620">
-                      <a:noFill/>
-                    </a:lnR>
-                    <a:lnT w="7620">
-                      <a:solidFill>
-                        <a:srgbClr val="626669"/>
-                      </a:solidFill>
-                      <a:prstDash val="solid"/>
-                    </a:lnT>
-                    <a:lnB w="7620">
-                      <a:noFill/>
-                    </a:lnB>
-                    <a:solidFill>
-                      <a:srgbClr val="FFFEF8"/>
-                    </a:solidFill>
-                  </a:tcPr>
-                </a:tc>
-              </a:tr>
-              <a:tr h="457200">
-                <a:tc>
-                  <a:txBody>
-                    <a:bodyPr wrap="square">
-                      <a:noAutofit/>
-                    </a:bodyPr>
-                    <a:lstStyle/>
-                    <a:p>
-                      <a:pPr algn="l">
-                        <a:lnSpc>
-                          <a:spcPts val="2300"/>
-                        </a:lnSpc>
-                        <a:buNone/>
-                        <a:defRPr sz="2000" b="0">
-                          <a:solidFill>
-                            <a:srgbClr val="303437"/>
-                          </a:solidFill>
-                          <a:latin typeface="Noto Sans"/>
-                        </a:defRPr>
-                      </a:pPr>
-                      <a:r>
-                        <a:rPr sz="2000" b="0" lang="ja-JP" altLang="en-US">
-                          <a:solidFill>
-                            <a:srgbClr val="303437"/>
-                          </a:solidFill>
-                          <a:latin typeface="Noto Sans"/>
-                          <a:ea typeface="Noto Sans CJK JP"/>
-                          <a:cs typeface="Noto Sans"/>
-                        </a:rPr>
-                        <a:t>text-davinci-003（2022）</a:t>
-                      </a:r>
-                    </a:p>
-                  </a:txBody>
-                  <a:tcPr marL="63500" marR="63500" marT="38100" marB="38100" anchor="ctr">
-                    <a:lnL w="7620">
-                      <a:noFill/>
-                    </a:lnL>
-                    <a:lnR w="7620">
-                      <a:noFill/>
-                    </a:lnR>
-                    <a:lnT w="7620">
-                      <a:noFill/>
-                    </a:lnT>
-                    <a:lnB w="7620">
-                      <a:noFill/>
-                    </a:lnB>
-                    <a:solidFill>
-                      <a:srgbClr val="FFFEF8"/>
-                    </a:solidFill>
-                  </a:tcPr>
-                </a:tc>
-                <a:tc>
-                  <a:txBody>
-                    <a:bodyPr wrap="square">
-                      <a:noAutofit/>
-                    </a:bodyPr>
-                    <a:lstStyle/>
-                    <a:p>
-                      <a:pPr algn="r">
-                        <a:lnSpc>
-                          <a:spcPts val="2300"/>
-                        </a:lnSpc>
-                        <a:buNone/>
-                        <a:defRPr sz="2000" b="0">
-                          <a:solidFill>
-                            <a:srgbClr val="303437"/>
-                          </a:solidFill>
-                          <a:latin typeface="Noto Sans"/>
-                        </a:defRPr>
-                      </a:pPr>
-                      <a:r>
-                        <a:rPr sz="2000" b="0" lang="ja-JP" altLang="en-US">
-                          <a:solidFill>
-                            <a:srgbClr val="303437"/>
-                          </a:solidFill>
-                          <a:latin typeface="Noto Sans"/>
-                          <a:ea typeface="Noto Sans CJK JP"/>
-                          <a:cs typeface="Noto Sans"/>
-                        </a:rPr>
-                        <a:t>38.29%</a:t>
-                      </a:r>
-                    </a:p>
-                  </a:txBody>
-                  <a:tcPr marL="63500" marR="63500" marT="38100" marB="38100" anchor="ctr">
-                    <a:lnL w="7620">
-                      <a:noFill/>
-                    </a:lnL>
-                    <a:lnR w="7620">
-                      <a:noFill/>
-                    </a:lnR>
-                    <a:lnT w="7620">
-                      <a:noFill/>
-                    </a:lnT>
-                    <a:lnB w="7620">
-                      <a:noFill/>
-                    </a:lnB>
-                    <a:solidFill>
-                      <a:srgbClr val="FFFEF8"/>
-                    </a:solidFill>
-                  </a:tcPr>
-                </a:tc>
-                <a:tc>
-                  <a:txBody>
-                    <a:bodyPr wrap="square">
-                      <a:noAutofit/>
-                    </a:bodyPr>
-                    <a:lstStyle/>
-                    <a:p>
-                      <a:pPr algn="r">
-                        <a:lnSpc>
-                          <a:spcPts val="2300"/>
-                        </a:lnSpc>
-                        <a:buNone/>
-                        <a:defRPr sz="2000" b="0">
-                          <a:solidFill>
-                            <a:srgbClr val="303437"/>
-                          </a:solidFill>
-                          <a:latin typeface="Noto Sans"/>
-                        </a:defRPr>
-                      </a:pPr>
-                      <a:r>
-                        <a:rPr sz="2000" b="0" lang="ja-JP" altLang="en-US">
-                          <a:solidFill>
-                            <a:srgbClr val="303437"/>
-                          </a:solidFill>
-                          <a:latin typeface="Noto Sans"/>
-                          <a:ea typeface="Noto Sans CJK JP"/>
-                          <a:cs typeface="Noto Sans"/>
-                        </a:rPr>
-                        <a:t>47.52%</a:t>
-                      </a:r>
-                    </a:p>
-                  </a:txBody>
-                  <a:tcPr marL="63500" marR="63500" marT="38100" marB="38100" anchor="ctr">
-                    <a:lnL w="7620">
-                      <a:noFill/>
-                    </a:lnL>
-                    <a:lnR w="7620">
-                      <a:noFill/>
-                    </a:lnR>
-                    <a:lnT w="7620">
-                      <a:noFill/>
-                    </a:lnT>
-                    <a:lnB w="7620">
-                      <a:noFill/>
-                    </a:lnB>
-                    <a:solidFill>
-                      <a:srgbClr val="FFFEF8"/>
-                    </a:solidFill>
-                  </a:tcPr>
-                </a:tc>
-              </a:tr>
-              <a:tr h="457200">
-                <a:tc>
-                  <a:txBody>
-                    <a:bodyPr wrap="square">
-                      <a:noAutofit/>
-                    </a:bodyPr>
-                    <a:lstStyle/>
-                    <a:p>
-                      <a:pPr algn="l">
-                        <a:lnSpc>
-                          <a:spcPts val="2300"/>
-                        </a:lnSpc>
-                        <a:buNone/>
-                        <a:defRPr sz="2000" b="0">
-                          <a:solidFill>
-                            <a:srgbClr val="303437"/>
-                          </a:solidFill>
-                          <a:latin typeface="Noto Sans"/>
-                        </a:defRPr>
-                      </a:pPr>
-                      <a:r>
-                        <a:rPr sz="2000" b="0" lang="ja-JP" altLang="en-US">
-                          <a:solidFill>
-                            <a:srgbClr val="303437"/>
-                          </a:solidFill>
-                          <a:latin typeface="Noto Sans"/>
-                          <a:ea typeface="Noto Sans CJK JP"/>
-                          <a:cs typeface="Noto Sans"/>
-                        </a:rPr>
-                        <a:t>Anthropic v4-s3（2022）</a:t>
-                      </a:r>
-                    </a:p>
-                  </a:txBody>
-                  <a:tcPr marL="63500" marR="63500" marT="38100" marB="38100" anchor="ctr">
-                    <a:lnL w="7620">
-                      <a:noFill/>
-                    </a:lnL>
-                    <a:lnR w="7620">
-                      <a:noFill/>
-                    </a:lnR>
-                    <a:lnT w="7620">
-                      <a:noFill/>
-                    </a:lnT>
-                    <a:lnB w="15240">
-                      <a:solidFill>
-                        <a:srgbClr val="626669"/>
-                      </a:solidFill>
-                      <a:prstDash val="solid"/>
-                    </a:lnB>
-                    <a:solidFill>
-                      <a:srgbClr val="FFFEF8"/>
-                    </a:solidFill>
-                  </a:tcPr>
-                </a:tc>
-                <a:tc>
-                  <a:txBody>
-                    <a:bodyPr wrap="square">
-                      <a:noAutofit/>
-                    </a:bodyPr>
-                    <a:lstStyle/>
-                    <a:p>
-                      <a:pPr algn="r">
-                        <a:lnSpc>
-                          <a:spcPts val="2300"/>
-                        </a:lnSpc>
-                        <a:buNone/>
-                        <a:defRPr sz="2000" b="0">
-                          <a:solidFill>
-                            <a:srgbClr val="303437"/>
-                          </a:solidFill>
-                          <a:latin typeface="Noto Sans"/>
-                        </a:defRPr>
-                      </a:pPr>
-                      <a:r>
-                        <a:rPr sz="2000" b="0" lang="ja-JP" altLang="en-US">
-                          <a:solidFill>
-                            <a:srgbClr val="303437"/>
-                          </a:solidFill>
-                          <a:latin typeface="Noto Sans"/>
-                          <a:ea typeface="Noto Sans CJK JP"/>
-                          <a:cs typeface="Noto Sans"/>
-                        </a:rPr>
-                        <a:t>17.62%</a:t>
-                      </a:r>
-                    </a:p>
-                  </a:txBody>
-                  <a:tcPr marL="63500" marR="63500" marT="38100" marB="38100" anchor="ctr">
-                    <a:lnL w="7620">
-                      <a:noFill/>
-                    </a:lnL>
-                    <a:lnR w="7620">
-                      <a:noFill/>
-                    </a:lnR>
-                    <a:lnT w="7620">
-                      <a:noFill/>
-                    </a:lnT>
-                    <a:lnB w="15240">
-                      <a:solidFill>
-                        <a:srgbClr val="626669"/>
-                      </a:solidFill>
-                      <a:prstDash val="solid"/>
-                    </a:lnB>
-                    <a:solidFill>
-                      <a:srgbClr val="FFFEF8"/>
-                    </a:solidFill>
-                  </a:tcPr>
-                </a:tc>
-                <a:tc>
-                  <a:txBody>
-                    <a:bodyPr wrap="square">
-                      <a:noAutofit/>
-                    </a:bodyPr>
-                    <a:lstStyle/>
-                    <a:p>
-                      <a:pPr algn="r">
-                        <a:lnSpc>
-                          <a:spcPts val="2300"/>
-                        </a:lnSpc>
-                        <a:buNone/>
-                        <a:defRPr sz="2000" b="0">
-                          <a:solidFill>
-                            <a:srgbClr val="303437"/>
-                          </a:solidFill>
-                          <a:latin typeface="Noto Sans"/>
-                        </a:defRPr>
-                      </a:pPr>
-                      <a:r>
-                        <a:rPr sz="2000" b="0" lang="ja-JP" altLang="en-US">
-                          <a:solidFill>
-                            <a:srgbClr val="303437"/>
-                          </a:solidFill>
-                          <a:latin typeface="Noto Sans"/>
-                          <a:ea typeface="Noto Sans CJK JP"/>
-                          <a:cs typeface="Noto Sans"/>
-                        </a:rPr>
-                        <a:t>16.09%</a:t>
-                      </a:r>
-                    </a:p>
-                  </a:txBody>
-                  <a:tcPr marL="63500" marR="63500" marT="38100" marB="38100" anchor="ctr">
-                    <a:lnL w="7620">
-                      <a:noFill/>
-                    </a:lnL>
-                    <a:lnR w="7620">
-                      <a:noFill/>
-                    </a:lnR>
-                    <a:lnT w="7620">
-                      <a:noFill/>
-                    </a:lnT>
-                    <a:lnB w="15240">
-                      <a:solidFill>
-                        <a:srgbClr val="626669"/>
-                      </a:solidFill>
-                      <a:prstDash val="solid"/>
-                    </a:lnB>
-                    <a:solidFill>
-                      <a:srgbClr val="FFFEF8"/>
-                    </a:solidFill>
-                  </a:tcPr>
-                </a:tc>
-              </a:tr>
-            </a:tbl>
-          </a:graphicData>
-        </a:graphic>
-      </p:graphicFrame>
-      <p:sp>
-        <p:nvSpPr>
-          <p:cNvPr id="5" name="TextBox 4"/>
-          <p:cNvSpPr txBox="1"/>
-          <p:nvPr/>
-        </p:nvSpPr>
-        <p:spPr>
-          <a:xfrm>
-            <a:off x="594360" y="3538728"/>
-            <a:ext cx="7955279" cy="658368"/>
-          </a:xfrm>
-          <a:prstGeom prst="rect">
-            <a:avLst/>
-          </a:prstGeom>
-          <a:noFill/>
-        </p:spPr>
-        <p:txBody>
-          <a:bodyPr wrap="square" lIns="0" rIns="0" tIns="0" bIns="0">
-            <a:noAutofit/>
-          </a:bodyPr>
-          <a:lstStyle/>
-          <a:p>
-            <a:pPr algn="l">
-              <a:lnSpc>
-                <a:spcPts val="2047"/>
-              </a:lnSpc>
-              <a:spcBef>
-                <a:spcPts val="0"/>
-              </a:spcBef>
-              <a:spcAft>
-                <a:spcPts val="0"/>
-              </a:spcAft>
-              <a:buNone/>
-              <a:defRPr sz="1750" b="0">
-                <a:solidFill>
-                  <a:srgbClr val="303437"/>
-                </a:solidFill>
-                <a:latin typeface="Noto Sans"/>
-              </a:defRPr>
-            </a:pPr>
-            <a:r>
-              <a:rPr sz="1750" b="0" lang="ja-JP" altLang="en-US">
-                <a:solidFill>
-                  <a:srgbClr val="303437"/>
-                </a:solidFill>
-                <a:latin typeface="Noto Sans"/>
-                <a:ea typeface="Noto Sans CJK JP"/>
-                <a:cs typeface="Noto Sans"/>
-              </a:rPr>
-              <a:t>437問の件数重み付き再集計、各3試行。異なる提示例と出力条件を含む比較。2023年の固定版。</a:t>
-            </a:r>
-          </a:p>
-        </p:txBody>
-      </p:sp>
-      <p:sp>
-        <p:nvSpPr>
-          <p:cNvPr id="6" name="sources"/>
-          <p:cNvSpPr txBox="1"/>
-          <p:nvPr/>
-        </p:nvSpPr>
-        <p:spPr>
-          <a:xfrm>
-            <a:off x="502920" y="4700016"/>
-            <a:ext cx="8183879" cy="530352"/>
-          </a:xfrm>
-          <a:prstGeom prst="rect">
-            <a:avLst/>
-          </a:prstGeom>
-          <a:noFill/>
-        </p:spPr>
-        <p:txBody>
-          <a:bodyPr wrap="square" lIns="0" rIns="0" tIns="0" bIns="0">
-            <a:noAutofit/>
-          </a:bodyPr>
-          <a:lstStyle/>
-          <a:p>
-            <a:pPr algn="l">
-              <a:lnSpc>
-                <a:spcPts val="940"/>
-              </a:lnSpc>
-              <a:spcBef>
-                <a:spcPts val="0"/>
-              </a:spcBef>
-              <a:spcAft>
-                <a:spcPts val="140"/>
-              </a:spcAft>
-              <a:buNone/>
-              <a:defRPr sz="810" b="0">
-                <a:solidFill>
-                  <a:srgbClr val="303437"/>
-                </a:solidFill>
-                <a:latin typeface="Noto Sans"/>
-              </a:defRPr>
-            </a:pPr>
-            <a:r>
-              <a:rPr sz="810" b="0" lang="ja-JP" altLang="en-US">
-                <a:solidFill>
-                  <a:srgbClr val="626669"/>
-                </a:solidFill>
-                <a:latin typeface="Noto Sans"/>
-                <a:ea typeface="Noto Sans CJK JP"/>
-                <a:cs typeface="Noto Sans"/>
-              </a:rPr>
-              <a:t>[1] HELM Classic v0.4.0. MATH、Level 1の固定評価。2023-11-17公開版。</a:t>
-            </a:r>
-            <a:r>
-              <a:rPr sz="810" b="0" lang="ja-JP" altLang="en-US">
-                <a:solidFill>
-                  <a:srgbClr val="626669"/>
-                </a:solidFill>
-                <a:latin typeface="Noto Sans"/>
-                <a:ea typeface="Noto Sans CJK JP"/>
-                <a:cs typeface="Noto Sans"/>
-              </a:rPr>
-              <a:t>  </a:t>
-            </a:r>
-            <a:r>
-              <a:rPr sz="810" b="0" lang="ja-JP" altLang="en-US">
-                <a:solidFill>
-                  <a:srgbClr val="626669"/>
-                </a:solidFill>
-                <a:latin typeface="Noto Sans"/>
-                <a:ea typeface="Noto Sans CJK JP"/>
-                <a:cs typeface="Noto Sans"/>
-                <a:hlinkClick r:id="rId2"/>
-              </a:rPr>
-              <a:t>https://crfm.stanford.edu/helm/classic/v0.4.0/#/groups/math_regular</a:t>
             </a:r>
           </a:p>
         </p:txBody>
@@ -13289,7 +10404,7 @@
                 <a:ea typeface="Noto Sans CJK JP"/>
                 <a:cs typeface="Noto Sans"/>
               </a:rPr>
-              <a:t>[1] Dan Hendrycks et al. MATH. 公式リポジトリ。2026-10-18参照。</a:t>
+              <a:t>[1] Dan Hendrycks et al. MATH. 公式リポジトリ。2026-10-18参照。  </a:t>
             </a:r>
             <a:r>
               <a:rPr sz="810" b="0" lang="ja-JP" altLang="en-US">
@@ -13299,1089 +10414,9 @@
                 <a:latin typeface="Noto Sans"/>
                 <a:ea typeface="Noto Sans CJK JP"/>
                 <a:cs typeface="Noto Sans"/>
-              </a:rPr>
-              <a:t>  </a:t>
-            </a:r>
-            <a:r>
-              <a:rPr sz="810" b="0" lang="ja-JP" altLang="en-US">
-                <a:solidFill>
-                  <a:srgbClr val="626669"/>
-                </a:solidFill>
-                <a:latin typeface="Noto Sans"/>
-                <a:ea typeface="Noto Sans CJK JP"/>
-                <a:cs typeface="Noto Sans"/>
                 <a:hlinkClick r:id="rId3"/>
               </a:rPr>
               <a:t>https://github.com/hendrycks/math</a:t>
-            </a:r>
-          </a:p>
-        </p:txBody>
-      </p:sp>
-    </p:spTree>
-  </p:cSld>
-  <p:clrMapOvr>
-    <a:masterClrMapping/>
-  </p:clrMapOvr>
-</p:sld>
-</file>
-
-<file path=ppt/slides/slide20.xml><?xml version="1.0" encoding="utf-8"?>
-<p:sld xmlns:a="http://schemas.openxmlformats.org/drawingml/2006/main" xmlns:p="http://schemas.openxmlformats.org/presentationml/2006/main" xmlns:r="http://schemas.openxmlformats.org/officeDocument/2006/relationships">
-  <p:cSld>
-    <p:spTree>
-      <p:nvGrpSpPr>
-        <p:cNvPr id="1" name=""/>
-        <p:cNvGrpSpPr/>
-        <p:nvPr/>
-      </p:nvGrpSpPr>
-      <p:grpSpPr/>
-      <p:sp>
-        <p:nvSpPr>
-          <p:cNvPr id="2" name="Title 1"/>
-          <p:cNvSpPr>
-            <a:spLocks noGrp="1"/>
-          </p:cNvSpPr>
-          <p:nvPr>
-            <p:ph type="title"/>
-          </p:nvPr>
-        </p:nvSpPr>
-        <p:spPr>
-          <a:xfrm>
-            <a:off x="468172" y="650138"/>
-            <a:ext cx="8206740" cy="616305"/>
-          </a:xfrm>
-        </p:spPr>
-        <p:txBody>
-          <a:bodyPr wrap="square" lIns="0" rIns="0" tIns="0" bIns="0">
-            <a:noAutofit/>
-          </a:bodyPr>
-          <a:lstStyle/>
-          <a:p>
-            <a:pPr algn="l">
-              <a:lnSpc>
-                <a:spcPct val="110000"/>
-              </a:lnSpc>
-              <a:buNone/>
-              <a:defRPr sz="2800" b="0">
-                <a:solidFill>
-                  <a:srgbClr val="303437"/>
-                </a:solidFill>
-                <a:latin typeface="Noto Sans"/>
-              </a:defRPr>
-            </a:pPr>
-            <a:r>
-              <a:rPr sz="2800" b="1" lang="ja-JP" altLang="en-US">
-                <a:solidFill>
-                  <a:srgbClr val="303437"/>
-                </a:solidFill>
-                <a:latin typeface="Noto Sans"/>
-                <a:ea typeface="Noto Sans CJK JP"/>
-                <a:cs typeface="Noto Sans"/>
-              </a:rPr>
-              <a:t>提示例と生成条件も同時に変わる</a:t>
-            </a:r>
-          </a:p>
-        </p:txBody>
-      </p:sp>
-      <p:sp>
-        <p:nvSpPr>
-          <p:cNvPr id="3" name="Title 2"/>
-          <p:cNvSpPr>
-            <a:spLocks noGrp="1"/>
-          </p:cNvSpPr>
-          <p:nvPr>
-            <p:ph type="title" idx="2"/>
-          </p:nvPr>
-        </p:nvSpPr>
-        <p:spPr>
-          <a:xfrm>
-            <a:off x="75895" y="0"/>
-            <a:ext cx="8115300" cy="480060"/>
-          </a:xfrm>
-        </p:spPr>
-        <p:txBody>
-          <a:bodyPr wrap="square" lIns="0" rIns="0" tIns="0" bIns="0" anchor="ctr">
-            <a:noAutofit/>
-          </a:bodyPr>
-          <a:lstStyle/>
-          <a:p>
-            <a:pPr algn="l">
-              <a:lnSpc>
-                <a:spcPct val="110000"/>
-              </a:lnSpc>
-              <a:buNone/>
-              <a:defRPr sz="1400" b="0">
-                <a:solidFill>
-                  <a:srgbClr val="303437"/>
-                </a:solidFill>
-                <a:latin typeface="Noto Sans"/>
-              </a:defRPr>
-            </a:pPr>
-            <a:r>
-              <a:rPr sz="1400" b="1" lang="ja-JP" altLang="en-US">
-                <a:solidFill>
-                  <a:srgbClr val="FFFEF8"/>
-                </a:solidFill>
-                <a:latin typeface="Noto Sans"/>
-                <a:ea typeface="Noto Sans CJK JP"/>
-                <a:cs typeface="Noto Sans"/>
-              </a:rPr>
-              <a:t>2. 採点とHELMの比較条件</a:t>
-            </a:r>
-          </a:p>
-        </p:txBody>
-      </p:sp>
-      <p:graphicFrame>
-        <p:nvGraphicFramePr>
-          <p:cNvPr id="4" name="Table 3"/>
-          <p:cNvGraphicFramePr>
-            <a:graphicFrameLocks noGrp="1"/>
-          </p:cNvGraphicFramePr>
-          <p:nvPr/>
-        </p:nvGraphicFramePr>
-        <p:xfrm>
-          <a:off x="548640" y="1508760"/>
-          <a:ext cx="8046720" cy="2286000"/>
-        </p:xfrm>
-        <a:graphic>
-          <a:graphicData uri="http://schemas.openxmlformats.org/drawingml/2006/table">
-            <a:tbl>
-              <a:tblPr firstRow="0" bandRow="0"/>
-              <a:tblGrid>
-                <a:gridCol w="4389120"/>
-                <a:gridCol w="1828800"/>
-                <a:gridCol w="1828800"/>
-              </a:tblGrid>
-              <a:tr h="457200">
-                <a:tc>
-                  <a:txBody>
-                    <a:bodyPr wrap="square">
-                      <a:noAutofit/>
-                    </a:bodyPr>
-                    <a:lstStyle/>
-                    <a:p>
-                      <a:pPr algn="l">
-                        <a:lnSpc>
-                          <a:spcPts val="2300"/>
-                        </a:lnSpc>
-                        <a:buNone/>
-                        <a:defRPr sz="2000" b="0">
-                          <a:solidFill>
-                            <a:srgbClr val="303437"/>
-                          </a:solidFill>
-                          <a:latin typeface="Noto Sans"/>
-                        </a:defRPr>
-                      </a:pPr>
-                      <a:r>
-                        <a:rPr sz="2000" b="0" lang="ja-JP" altLang="en-US">
-                          <a:solidFill>
-                            <a:srgbClr val="303437"/>
-                          </a:solidFill>
-                          <a:latin typeface="Noto Sans"/>
-                          <a:ea typeface="Noto Sans CJK JP"/>
-                          <a:cs typeface="Noto Sans"/>
-                        </a:rPr>
-                        <a:t>設定</a:t>
-                      </a:r>
-                    </a:p>
-                  </a:txBody>
-                  <a:tcPr marL="63500" marR="63500" marT="38100" marB="38100" anchor="ctr">
-                    <a:lnL w="7620">
-                      <a:noFill/>
-                    </a:lnL>
-                    <a:lnR w="7620">
-                      <a:noFill/>
-                    </a:lnR>
-                    <a:lnT w="15240">
-                      <a:solidFill>
-                        <a:srgbClr val="626669"/>
-                      </a:solidFill>
-                      <a:prstDash val="solid"/>
-                    </a:lnT>
-                    <a:lnB w="7620">
-                      <a:solidFill>
-                        <a:srgbClr val="626669"/>
-                      </a:solidFill>
-                      <a:prstDash val="solid"/>
-                    </a:lnB>
-                    <a:solidFill>
-                      <a:srgbClr val="FFFEF8"/>
-                    </a:solidFill>
-                  </a:tcPr>
-                </a:tc>
-                <a:tc>
-                  <a:txBody>
-                    <a:bodyPr wrap="square">
-                      <a:noAutofit/>
-                    </a:bodyPr>
-                    <a:lstStyle/>
-                    <a:p>
-                      <a:pPr algn="l">
-                        <a:lnSpc>
-                          <a:spcPts val="2300"/>
-                        </a:lnSpc>
-                        <a:buNone/>
-                        <a:defRPr sz="2000" b="0">
-                          <a:solidFill>
-                            <a:srgbClr val="303437"/>
-                          </a:solidFill>
-                          <a:latin typeface="Noto Sans"/>
-                        </a:defRPr>
-                      </a:pPr>
-                      <a:r>
-                        <a:rPr sz="2000" b="0" lang="ja-JP" altLang="en-US">
-                          <a:solidFill>
-                            <a:srgbClr val="303437"/>
-                          </a:solidFill>
-                          <a:latin typeface="Noto Sans"/>
-                          <a:ea typeface="Noto Sans CJK JP"/>
-                          <a:cs typeface="Noto Sans"/>
-                        </a:rPr>
-                        <a:t>regular</a:t>
-                      </a:r>
-                    </a:p>
-                  </a:txBody>
-                  <a:tcPr marL="63500" marR="63500" marT="38100" marB="38100" anchor="ctr">
-                    <a:lnL w="7620">
-                      <a:noFill/>
-                    </a:lnL>
-                    <a:lnR w="7620">
-                      <a:noFill/>
-                    </a:lnR>
-                    <a:lnT w="15240">
-                      <a:solidFill>
-                        <a:srgbClr val="626669"/>
-                      </a:solidFill>
-                      <a:prstDash val="solid"/>
-                    </a:lnT>
-                    <a:lnB w="7620">
-                      <a:solidFill>
-                        <a:srgbClr val="626669"/>
-                      </a:solidFill>
-                      <a:prstDash val="solid"/>
-                    </a:lnB>
-                    <a:solidFill>
-                      <a:srgbClr val="FFFEF8"/>
-                    </a:solidFill>
-                  </a:tcPr>
-                </a:tc>
-                <a:tc>
-                  <a:txBody>
-                    <a:bodyPr wrap="square">
-                      <a:noAutofit/>
-                    </a:bodyPr>
-                    <a:lstStyle/>
-                    <a:p>
-                      <a:pPr algn="l">
-                        <a:lnSpc>
-                          <a:spcPts val="2300"/>
-                        </a:lnSpc>
-                        <a:buNone/>
-                        <a:defRPr sz="2000" b="0">
-                          <a:solidFill>
-                            <a:srgbClr val="303437"/>
-                          </a:solidFill>
-                          <a:latin typeface="Noto Sans"/>
-                        </a:defRPr>
-                      </a:pPr>
-                      <a:r>
-                        <a:rPr sz="2000" b="0" lang="ja-JP" altLang="en-US">
-                          <a:solidFill>
-                            <a:srgbClr val="303437"/>
-                          </a:solidFill>
-                          <a:latin typeface="Noto Sans"/>
-                          <a:ea typeface="Noto Sans CJK JP"/>
-                          <a:cs typeface="Noto Sans"/>
-                        </a:rPr>
-                        <a:t>解説付き</a:t>
-                      </a:r>
-                    </a:p>
-                  </a:txBody>
-                  <a:tcPr marL="63500" marR="63500" marT="38100" marB="38100" anchor="ctr">
-                    <a:lnL w="7620">
-                      <a:noFill/>
-                    </a:lnL>
-                    <a:lnR w="7620">
-                      <a:noFill/>
-                    </a:lnR>
-                    <a:lnT w="15240">
-                      <a:solidFill>
-                        <a:srgbClr val="626669"/>
-                      </a:solidFill>
-                      <a:prstDash val="solid"/>
-                    </a:lnT>
-                    <a:lnB w="7620">
-                      <a:solidFill>
-                        <a:srgbClr val="626669"/>
-                      </a:solidFill>
-                      <a:prstDash val="solid"/>
-                    </a:lnB>
-                    <a:solidFill>
-                      <a:srgbClr val="FFFEF8"/>
-                    </a:solidFill>
-                  </a:tcPr>
-                </a:tc>
-              </a:tr>
-              <a:tr h="457200">
-                <a:tc>
-                  <a:txBody>
-                    <a:bodyPr wrap="square">
-                      <a:noAutofit/>
-                    </a:bodyPr>
-                    <a:lstStyle/>
-                    <a:p>
-                      <a:pPr algn="l">
-                        <a:lnSpc>
-                          <a:spcPts val="2300"/>
-                        </a:lnSpc>
-                        <a:buNone/>
-                        <a:defRPr sz="2000" b="0">
-                          <a:solidFill>
-                            <a:srgbClr val="303437"/>
-                          </a:solidFill>
-                          <a:latin typeface="Noto Sans"/>
-                        </a:defRPr>
-                      </a:pPr>
-                      <a:r>
-                        <a:rPr sz="2000" b="0" lang="ja-JP" altLang="en-US">
-                          <a:solidFill>
-                            <a:srgbClr val="303437"/>
-                          </a:solidFill>
-                          <a:latin typeface="Noto Sans"/>
-                          <a:ea typeface="Noto Sans CJK JP"/>
-                          <a:cs typeface="Noto Sans"/>
-                        </a:rPr>
-                        <a:t>提示例数の上限</a:t>
-                      </a:r>
-                    </a:p>
-                  </a:txBody>
-                  <a:tcPr marL="63500" marR="63500" marT="38100" marB="38100" anchor="ctr">
-                    <a:lnL w="7620">
-                      <a:noFill/>
-                    </a:lnL>
-                    <a:lnR w="7620">
-                      <a:noFill/>
-                    </a:lnR>
-                    <a:lnT w="7620">
-                      <a:solidFill>
-                        <a:srgbClr val="626669"/>
-                      </a:solidFill>
-                      <a:prstDash val="solid"/>
-                    </a:lnT>
-                    <a:lnB w="7620">
-                      <a:noFill/>
-                    </a:lnB>
-                    <a:solidFill>
-                      <a:srgbClr val="FFFEF8"/>
-                    </a:solidFill>
-                  </a:tcPr>
-                </a:tc>
-                <a:tc>
-                  <a:txBody>
-                    <a:bodyPr wrap="square">
-                      <a:noAutofit/>
-                    </a:bodyPr>
-                    <a:lstStyle/>
-                    <a:p>
-                      <a:pPr algn="l">
-                        <a:lnSpc>
-                          <a:spcPts val="2300"/>
-                        </a:lnSpc>
-                        <a:buNone/>
-                        <a:defRPr sz="2000" b="0">
-                          <a:solidFill>
-                            <a:srgbClr val="303437"/>
-                          </a:solidFill>
-                          <a:latin typeface="Noto Sans"/>
-                        </a:defRPr>
-                      </a:pPr>
-                      <a:r>
-                        <a:rPr sz="2000" b="0" lang="ja-JP" altLang="en-US">
-                          <a:solidFill>
-                            <a:srgbClr val="303437"/>
-                          </a:solidFill>
-                          <a:latin typeface="Noto Sans"/>
-                          <a:ea typeface="Noto Sans CJK JP"/>
-                          <a:cs typeface="Noto Sans"/>
-                        </a:rPr>
-                        <a:t>8</a:t>
-                      </a:r>
-                    </a:p>
-                  </a:txBody>
-                  <a:tcPr marL="63500" marR="63500" marT="38100" marB="38100" anchor="ctr">
-                    <a:lnL w="7620">
-                      <a:noFill/>
-                    </a:lnL>
-                    <a:lnR w="7620">
-                      <a:noFill/>
-                    </a:lnR>
-                    <a:lnT w="7620">
-                      <a:solidFill>
-                        <a:srgbClr val="626669"/>
-                      </a:solidFill>
-                      <a:prstDash val="solid"/>
-                    </a:lnT>
-                    <a:lnB w="7620">
-                      <a:noFill/>
-                    </a:lnB>
-                    <a:solidFill>
-                      <a:srgbClr val="FFFEF8"/>
-                    </a:solidFill>
-                  </a:tcPr>
-                </a:tc>
-                <a:tc>
-                  <a:txBody>
-                    <a:bodyPr wrap="square">
-                      <a:noAutofit/>
-                    </a:bodyPr>
-                    <a:lstStyle/>
-                    <a:p>
-                      <a:pPr algn="l">
-                        <a:lnSpc>
-                          <a:spcPts val="2300"/>
-                        </a:lnSpc>
-                        <a:buNone/>
-                        <a:defRPr sz="2000" b="0">
-                          <a:solidFill>
-                            <a:srgbClr val="303437"/>
-                          </a:solidFill>
-                          <a:latin typeface="Noto Sans"/>
-                        </a:defRPr>
-                      </a:pPr>
-                      <a:r>
-                        <a:rPr sz="2000" b="0" lang="ja-JP" altLang="en-US">
-                          <a:solidFill>
-                            <a:srgbClr val="303437"/>
-                          </a:solidFill>
-                          <a:latin typeface="Noto Sans"/>
-                          <a:ea typeface="Noto Sans CJK JP"/>
-                          <a:cs typeface="Noto Sans"/>
-                        </a:rPr>
-                        <a:t>8</a:t>
-                      </a:r>
-                    </a:p>
-                  </a:txBody>
-                  <a:tcPr marL="63500" marR="63500" marT="38100" marB="38100" anchor="ctr">
-                    <a:lnL w="7620">
-                      <a:noFill/>
-                    </a:lnL>
-                    <a:lnR w="7620">
-                      <a:noFill/>
-                    </a:lnR>
-                    <a:lnT w="7620">
-                      <a:solidFill>
-                        <a:srgbClr val="626669"/>
-                      </a:solidFill>
-                      <a:prstDash val="solid"/>
-                    </a:lnT>
-                    <a:lnB w="7620">
-                      <a:noFill/>
-                    </a:lnB>
-                    <a:solidFill>
-                      <a:srgbClr val="FFFEF8"/>
-                    </a:solidFill>
-                  </a:tcPr>
-                </a:tc>
-              </a:tr>
-              <a:tr h="457200">
-                <a:tc>
-                  <a:txBody>
-                    <a:bodyPr wrap="square">
-                      <a:noAutofit/>
-                    </a:bodyPr>
-                    <a:lstStyle/>
-                    <a:p>
-                      <a:pPr algn="l">
-                        <a:lnSpc>
-                          <a:spcPts val="2300"/>
-                        </a:lnSpc>
-                        <a:buNone/>
-                        <a:defRPr sz="2000" b="0">
-                          <a:solidFill>
-                            <a:srgbClr val="303437"/>
-                          </a:solidFill>
-                          <a:latin typeface="Noto Sans"/>
-                        </a:defRPr>
-                      </a:pPr>
-                      <a:r>
-                        <a:rPr sz="2000" b="0" lang="ja-JP" altLang="en-US">
-                          <a:solidFill>
-                            <a:srgbClr val="303437"/>
-                          </a:solidFill>
-                          <a:latin typeface="Noto Sans"/>
-                          <a:ea typeface="Noto Sans CJK JP"/>
-                          <a:cs typeface="Noto Sans"/>
-                        </a:rPr>
-                        <a:t>最大出力トークン</a:t>
-                      </a:r>
-                    </a:p>
-                  </a:txBody>
-                  <a:tcPr marL="63500" marR="63500" marT="38100" marB="38100" anchor="ctr">
-                    <a:lnL w="7620">
-                      <a:noFill/>
-                    </a:lnL>
-                    <a:lnR w="7620">
-                      <a:noFill/>
-                    </a:lnR>
-                    <a:lnT w="7620">
-                      <a:noFill/>
-                    </a:lnT>
-                    <a:lnB w="7620">
-                      <a:noFill/>
-                    </a:lnB>
-                    <a:solidFill>
-                      <a:srgbClr val="FFFEF8"/>
-                    </a:solidFill>
-                  </a:tcPr>
-                </a:tc>
-                <a:tc>
-                  <a:txBody>
-                    <a:bodyPr wrap="square">
-                      <a:noAutofit/>
-                    </a:bodyPr>
-                    <a:lstStyle/>
-                    <a:p>
-                      <a:pPr algn="l">
-                        <a:lnSpc>
-                          <a:spcPts val="2300"/>
-                        </a:lnSpc>
-                        <a:buNone/>
-                        <a:defRPr sz="2000" b="0">
-                          <a:solidFill>
-                            <a:srgbClr val="303437"/>
-                          </a:solidFill>
-                          <a:latin typeface="Noto Sans"/>
-                        </a:defRPr>
-                      </a:pPr>
-                      <a:r>
-                        <a:rPr sz="2000" b="0" lang="ja-JP" altLang="en-US">
-                          <a:solidFill>
-                            <a:srgbClr val="303437"/>
-                          </a:solidFill>
-                          <a:latin typeface="Noto Sans"/>
-                          <a:ea typeface="Noto Sans CJK JP"/>
-                          <a:cs typeface="Noto Sans"/>
-                        </a:rPr>
-                        <a:t>20</a:t>
-                      </a:r>
-                    </a:p>
-                  </a:txBody>
-                  <a:tcPr marL="63500" marR="63500" marT="38100" marB="38100" anchor="ctr">
-                    <a:lnL w="7620">
-                      <a:noFill/>
-                    </a:lnL>
-                    <a:lnR w="7620">
-                      <a:noFill/>
-                    </a:lnR>
-                    <a:lnT w="7620">
-                      <a:noFill/>
-                    </a:lnT>
-                    <a:lnB w="7620">
-                      <a:noFill/>
-                    </a:lnB>
-                    <a:solidFill>
-                      <a:srgbClr val="FFFEF8"/>
-                    </a:solidFill>
-                  </a:tcPr>
-                </a:tc>
-                <a:tc>
-                  <a:txBody>
-                    <a:bodyPr wrap="square">
-                      <a:noAutofit/>
-                    </a:bodyPr>
-                    <a:lstStyle/>
-                    <a:p>
-                      <a:pPr algn="l">
-                        <a:lnSpc>
-                          <a:spcPts val="2300"/>
-                        </a:lnSpc>
-                        <a:buNone/>
-                        <a:defRPr sz="2000" b="0">
-                          <a:solidFill>
-                            <a:srgbClr val="303437"/>
-                          </a:solidFill>
-                          <a:latin typeface="Noto Sans"/>
-                        </a:defRPr>
-                      </a:pPr>
-                      <a:r>
-                        <a:rPr sz="2000" b="0" lang="ja-JP" altLang="en-US">
-                          <a:solidFill>
-                            <a:srgbClr val="303437"/>
-                          </a:solidFill>
-                          <a:latin typeface="Noto Sans"/>
-                          <a:ea typeface="Noto Sans CJK JP"/>
-                          <a:cs typeface="Noto Sans"/>
-                        </a:rPr>
-                        <a:t>400</a:t>
-                      </a:r>
-                    </a:p>
-                  </a:txBody>
-                  <a:tcPr marL="63500" marR="63500" marT="38100" marB="38100" anchor="ctr">
-                    <a:lnL w="7620">
-                      <a:noFill/>
-                    </a:lnL>
-                    <a:lnR w="7620">
-                      <a:noFill/>
-                    </a:lnR>
-                    <a:lnT w="7620">
-                      <a:noFill/>
-                    </a:lnT>
-                    <a:lnB w="7620">
-                      <a:noFill/>
-                    </a:lnB>
-                    <a:solidFill>
-                      <a:srgbClr val="FFFEF8"/>
-                    </a:solidFill>
-                  </a:tcPr>
-                </a:tc>
-              </a:tr>
-              <a:tr h="457200">
-                <a:tc>
-                  <a:txBody>
-                    <a:bodyPr wrap="square">
-                      <a:noAutofit/>
-                    </a:bodyPr>
-                    <a:lstStyle/>
-                    <a:p>
-                      <a:pPr algn="l">
-                        <a:lnSpc>
-                          <a:spcPts val="2300"/>
-                        </a:lnSpc>
-                        <a:buNone/>
-                        <a:defRPr sz="2000" b="0">
-                          <a:solidFill>
-                            <a:srgbClr val="303437"/>
-                          </a:solidFill>
-                          <a:latin typeface="Noto Sans"/>
-                        </a:defRPr>
-                      </a:pPr>
-                      <a:r>
-                        <a:rPr sz="2000" b="0" lang="ja-JP" altLang="en-US">
-                          <a:solidFill>
-                            <a:srgbClr val="303437"/>
-                          </a:solidFill>
-                          <a:latin typeface="Noto Sans"/>
-                          <a:ea typeface="Noto Sans CJK JP"/>
-                          <a:cs typeface="Noto Sans"/>
-                        </a:rPr>
-                        <a:t>停止文字列</a:t>
-                      </a:r>
-                    </a:p>
-                  </a:txBody>
-                  <a:tcPr marL="63500" marR="63500" marT="38100" marB="38100" anchor="ctr">
-                    <a:lnL w="7620">
-                      <a:noFill/>
-                    </a:lnL>
-                    <a:lnR w="7620">
-                      <a:noFill/>
-                    </a:lnR>
-                    <a:lnT w="7620">
-                      <a:noFill/>
-                    </a:lnT>
-                    <a:lnB w="7620">
-                      <a:noFill/>
-                    </a:lnB>
-                    <a:solidFill>
-                      <a:srgbClr val="FFFEF8"/>
-                    </a:solidFill>
-                  </a:tcPr>
-                </a:tc>
-                <a:tc>
-                  <a:txBody>
-                    <a:bodyPr wrap="square">
-                      <a:noAutofit/>
-                    </a:bodyPr>
-                    <a:lstStyle/>
-                    <a:p>
-                      <a:pPr algn="l">
-                        <a:lnSpc>
-                          <a:spcPts val="2300"/>
-                        </a:lnSpc>
-                        <a:buNone/>
-                        <a:defRPr sz="2000" b="0">
-                          <a:solidFill>
-                            <a:srgbClr val="303437"/>
-                          </a:solidFill>
-                          <a:latin typeface="Noto Sans"/>
-                        </a:defRPr>
-                      </a:pPr>
-                      <a:r>
-                        <a:rPr sz="2000" b="0" lang="ja-JP" altLang="en-US">
-                          <a:solidFill>
-                            <a:srgbClr val="303437"/>
-                          </a:solidFill>
-                          <a:latin typeface="Noto Sans"/>
-                          <a:ea typeface="Noto Sans CJK JP"/>
-                          <a:cs typeface="Noto Sans"/>
-                        </a:rPr>
-                        <a:t>$</a:t>
-                      </a:r>
-                    </a:p>
-                  </a:txBody>
-                  <a:tcPr marL="63500" marR="63500" marT="38100" marB="38100" anchor="ctr">
-                    <a:lnL w="7620">
-                      <a:noFill/>
-                    </a:lnL>
-                    <a:lnR w="7620">
-                      <a:noFill/>
-                    </a:lnR>
-                    <a:lnT w="7620">
-                      <a:noFill/>
-                    </a:lnT>
-                    <a:lnB w="7620">
-                      <a:noFill/>
-                    </a:lnB>
-                    <a:solidFill>
-                      <a:srgbClr val="FFFEF8"/>
-                    </a:solidFill>
-                  </a:tcPr>
-                </a:tc>
-                <a:tc>
-                  <a:txBody>
-                    <a:bodyPr wrap="square">
-                      <a:noAutofit/>
-                    </a:bodyPr>
-                    <a:lstStyle/>
-                    <a:p>
-                      <a:pPr algn="l">
-                        <a:lnSpc>
-                          <a:spcPts val="2300"/>
-                        </a:lnSpc>
-                        <a:buNone/>
-                        <a:defRPr sz="2000" b="0">
-                          <a:solidFill>
-                            <a:srgbClr val="303437"/>
-                          </a:solidFill>
-                          <a:latin typeface="Noto Sans"/>
-                        </a:defRPr>
-                      </a:pPr>
-                      <a:r>
-                        <a:rPr sz="2000" b="0" lang="ja-JP" altLang="en-US">
-                          <a:solidFill>
-                            <a:srgbClr val="303437"/>
-                          </a:solidFill>
-                          <a:latin typeface="Noto Sans"/>
-                          <a:ea typeface="Noto Sans CJK JP"/>
-                          <a:cs typeface="Noto Sans"/>
-                        </a:rPr>
-                        <a:t>###</a:t>
-                      </a:r>
-                    </a:p>
-                  </a:txBody>
-                  <a:tcPr marL="63500" marR="63500" marT="38100" marB="38100" anchor="ctr">
-                    <a:lnL w="7620">
-                      <a:noFill/>
-                    </a:lnL>
-                    <a:lnR w="7620">
-                      <a:noFill/>
-                    </a:lnR>
-                    <a:lnT w="7620">
-                      <a:noFill/>
-                    </a:lnT>
-                    <a:lnB w="7620">
-                      <a:noFill/>
-                    </a:lnB>
-                    <a:solidFill>
-                      <a:srgbClr val="FFFEF8"/>
-                    </a:solidFill>
-                  </a:tcPr>
-                </a:tc>
-              </a:tr>
-              <a:tr h="457200">
-                <a:tc>
-                  <a:txBody>
-                    <a:bodyPr wrap="square">
-                      <a:noAutofit/>
-                    </a:bodyPr>
-                    <a:lstStyle/>
-                    <a:p>
-                      <a:pPr algn="l">
-                        <a:lnSpc>
-                          <a:spcPts val="2300"/>
-                        </a:lnSpc>
-                        <a:buNone/>
-                        <a:defRPr sz="2000" b="0">
-                          <a:solidFill>
-                            <a:srgbClr val="303437"/>
-                          </a:solidFill>
-                          <a:latin typeface="Noto Sans"/>
-                        </a:defRPr>
-                      </a:pPr>
-                      <a:r>
-                        <a:rPr sz="2000" b="0" lang="ja-JP" altLang="en-US">
-                          <a:solidFill>
-                            <a:srgbClr val="303437"/>
-                          </a:solidFill>
-                          <a:latin typeface="Noto Sans"/>
-                          <a:ea typeface="Noto Sans CJK JP"/>
-                          <a:cs typeface="Noto Sans"/>
-                        </a:rPr>
-                        <a:t>候補数 / temperature</a:t>
-                      </a:r>
-                    </a:p>
-                  </a:txBody>
-                  <a:tcPr marL="63500" marR="63500" marT="38100" marB="38100" anchor="ctr">
-                    <a:lnL w="7620">
-                      <a:noFill/>
-                    </a:lnL>
-                    <a:lnR w="7620">
-                      <a:noFill/>
-                    </a:lnR>
-                    <a:lnT w="7620">
-                      <a:noFill/>
-                    </a:lnT>
-                    <a:lnB w="15240">
-                      <a:solidFill>
-                        <a:srgbClr val="626669"/>
-                      </a:solidFill>
-                      <a:prstDash val="solid"/>
-                    </a:lnB>
-                    <a:solidFill>
-                      <a:srgbClr val="FFFEF8"/>
-                    </a:solidFill>
-                  </a:tcPr>
-                </a:tc>
-                <a:tc>
-                  <a:txBody>
-                    <a:bodyPr wrap="square">
-                      <a:noAutofit/>
-                    </a:bodyPr>
-                    <a:lstStyle/>
-                    <a:p>
-                      <a:pPr algn="l">
-                        <a:lnSpc>
-                          <a:spcPts val="2300"/>
-                        </a:lnSpc>
-                        <a:buNone/>
-                        <a:defRPr sz="2000" b="0">
-                          <a:solidFill>
-                            <a:srgbClr val="303437"/>
-                          </a:solidFill>
-                          <a:latin typeface="Noto Sans"/>
-                        </a:defRPr>
-                      </a:pPr>
-                      <a:r>
-                        <a:rPr sz="2000" b="0" lang="ja-JP" altLang="en-US">
-                          <a:solidFill>
-                            <a:srgbClr val="303437"/>
-                          </a:solidFill>
-                          <a:latin typeface="Noto Sans"/>
-                          <a:ea typeface="Noto Sans CJK JP"/>
-                          <a:cs typeface="Noto Sans"/>
-                        </a:rPr>
-                        <a:t>1 / 0</a:t>
-                      </a:r>
-                    </a:p>
-                  </a:txBody>
-                  <a:tcPr marL="63500" marR="63500" marT="38100" marB="38100" anchor="ctr">
-                    <a:lnL w="7620">
-                      <a:noFill/>
-                    </a:lnL>
-                    <a:lnR w="7620">
-                      <a:noFill/>
-                    </a:lnR>
-                    <a:lnT w="7620">
-                      <a:noFill/>
-                    </a:lnT>
-                    <a:lnB w="15240">
-                      <a:solidFill>
-                        <a:srgbClr val="626669"/>
-                      </a:solidFill>
-                      <a:prstDash val="solid"/>
-                    </a:lnB>
-                    <a:solidFill>
-                      <a:srgbClr val="FFFEF8"/>
-                    </a:solidFill>
-                  </a:tcPr>
-                </a:tc>
-                <a:tc>
-                  <a:txBody>
-                    <a:bodyPr wrap="square">
-                      <a:noAutofit/>
-                    </a:bodyPr>
-                    <a:lstStyle/>
-                    <a:p>
-                      <a:pPr algn="l">
-                        <a:lnSpc>
-                          <a:spcPts val="2300"/>
-                        </a:lnSpc>
-                        <a:buNone/>
-                        <a:defRPr sz="2000" b="0">
-                          <a:solidFill>
-                            <a:srgbClr val="303437"/>
-                          </a:solidFill>
-                          <a:latin typeface="Noto Sans"/>
-                        </a:defRPr>
-                      </a:pPr>
-                      <a:r>
-                        <a:rPr sz="2000" b="0" lang="ja-JP" altLang="en-US">
-                          <a:solidFill>
-                            <a:srgbClr val="303437"/>
-                          </a:solidFill>
-                          <a:latin typeface="Noto Sans"/>
-                          <a:ea typeface="Noto Sans CJK JP"/>
-                          <a:cs typeface="Noto Sans"/>
-                        </a:rPr>
-                        <a:t>1 / 0</a:t>
-                      </a:r>
-                    </a:p>
-                  </a:txBody>
-                  <a:tcPr marL="63500" marR="63500" marT="38100" marB="38100" anchor="ctr">
-                    <a:lnL w="7620">
-                      <a:noFill/>
-                    </a:lnL>
-                    <a:lnR w="7620">
-                      <a:noFill/>
-                    </a:lnR>
-                    <a:lnT w="7620">
-                      <a:noFill/>
-                    </a:lnT>
-                    <a:lnB w="15240">
-                      <a:solidFill>
-                        <a:srgbClr val="626669"/>
-                      </a:solidFill>
-                      <a:prstDash val="solid"/>
-                    </a:lnB>
-                    <a:solidFill>
-                      <a:srgbClr val="FFFEF8"/>
-                    </a:solidFill>
-                  </a:tcPr>
-                </a:tc>
-              </a:tr>
-            </a:tbl>
-          </a:graphicData>
-        </a:graphic>
-      </p:graphicFrame>
-      <p:sp>
-        <p:nvSpPr>
-          <p:cNvPr id="5" name="TextBox 4"/>
-          <p:cNvSpPr txBox="1"/>
-          <p:nvPr/>
-        </p:nvSpPr>
-        <p:spPr>
-          <a:xfrm>
-            <a:off x="594360" y="3995928"/>
-            <a:ext cx="7955279" cy="658368"/>
-          </a:xfrm>
-          <a:prstGeom prst="rect">
-            <a:avLst/>
-          </a:prstGeom>
-          <a:noFill/>
-        </p:spPr>
-        <p:txBody>
-          <a:bodyPr wrap="square" lIns="0" rIns="0" tIns="0" bIns="0">
-            <a:noAutofit/>
-          </a:bodyPr>
-          <a:lstStyle/>
-          <a:p>
-            <a:pPr algn="l">
-              <a:lnSpc>
-                <a:spcPts val="2047"/>
-              </a:lnSpc>
-              <a:spcBef>
-                <a:spcPts val="0"/>
-              </a:spcBef>
-              <a:spcAft>
-                <a:spcPts val="0"/>
-              </a:spcAft>
-              <a:buNone/>
-              <a:defRPr sz="1750" b="0">
-                <a:solidFill>
-                  <a:srgbClr val="303437"/>
-                </a:solidFill>
-                <a:latin typeface="Noto Sans"/>
-              </a:defRPr>
-            </a:pPr>
-            <a:r>
-              <a:rPr sz="1750" b="0" lang="ja-JP" altLang="en-US">
-                <a:solidFill>
-                  <a:srgbClr val="303437"/>
-                </a:solidFill>
-                <a:latin typeface="Noto Sans"/>
-                <a:ea typeface="Noto Sans CJK JP"/>
-                <a:cs typeface="Noto Sans"/>
-              </a:rPr>
-              <a:t>二つの条件では、提示例の内容、出力上限、停止文字列も異なる。</a:t>
-            </a:r>
-          </a:p>
-        </p:txBody>
-      </p:sp>
-      <p:sp>
-        <p:nvSpPr>
-          <p:cNvPr id="6" name="sources"/>
-          <p:cNvSpPr txBox="1"/>
-          <p:nvPr/>
-        </p:nvSpPr>
-        <p:spPr>
-          <a:xfrm>
-            <a:off x="502920" y="4700016"/>
-            <a:ext cx="8183879" cy="530352"/>
-          </a:xfrm>
-          <a:prstGeom prst="rect">
-            <a:avLst/>
-          </a:prstGeom>
-          <a:noFill/>
-        </p:spPr>
-        <p:txBody>
-          <a:bodyPr wrap="square" lIns="0" rIns="0" tIns="0" bIns="0">
-            <a:noAutofit/>
-          </a:bodyPr>
-          <a:lstStyle/>
-          <a:p>
-            <a:pPr algn="l">
-              <a:lnSpc>
-                <a:spcPts val="940"/>
-              </a:lnSpc>
-              <a:spcBef>
-                <a:spcPts val="0"/>
-              </a:spcBef>
-              <a:spcAft>
-                <a:spcPts val="140"/>
-              </a:spcAft>
-              <a:buNone/>
-              <a:defRPr sz="810" b="0">
-                <a:solidFill>
-                  <a:srgbClr val="303437"/>
-                </a:solidFill>
-                <a:latin typeface="Noto Sans"/>
-              </a:defRPr>
-            </a:pPr>
-            <a:r>
-              <a:rPr sz="810" b="0" lang="ja-JP" altLang="en-US">
-                <a:solidFill>
-                  <a:srgbClr val="626669"/>
-                </a:solidFill>
-                <a:latin typeface="Noto Sans"/>
-                <a:ea typeface="Noto Sans CJK JP"/>
-                <a:cs typeface="Noto Sans"/>
-              </a:rPr>
-              <a:t>[1] Stanford CRFM. HELM v0.3.0 run_specs.py, get_math_spec. 生成・適応条件。</a:t>
-            </a:r>
-          </a:p>
-          <a:p>
-            <a:pPr>
-              <a:lnSpc>
-                <a:spcPts val="940"/>
-              </a:lnSpc>
-              <a:buNone/>
-              <a:defRPr sz="810" b="0">
-                <a:solidFill>
-                  <a:srgbClr val="303437"/>
-                </a:solidFill>
-                <a:latin typeface="Noto Sans"/>
-              </a:defRPr>
-            </a:pPr>
-            <a:r>
-              <a:rPr sz="810" b="0" lang="ja-JP" altLang="en-US">
-                <a:solidFill>
-                  <a:srgbClr val="626669"/>
-                </a:solidFill>
-                <a:latin typeface="Noto Sans"/>
-                <a:ea typeface="Noto Sans CJK JP"/>
-                <a:cs typeface="Noto Sans"/>
-                <a:hlinkClick r:id="rId3"/>
-              </a:rPr>
-              <a:t>https://github.com/stanford-crfm/helm/blob/v0.3.0/src/helm/benchmark/run_specs.py</a:t>
             </a:r>
           </a:p>
         </p:txBody>
@@ -16247,18 +12282,7 @@
                 <a:ea typeface="Noto Sans CJK JP"/>
                 <a:cs typeface="Noto Sans"/>
               </a:rPr>
-              <a:t>[1] MATH, EleutherAI/hendrycks_math. 固定revisionのtest分割。元の競技問題・解説の著者に帰属。</a:t>
-            </a:r>
-            <a:r>
-              <a:rPr sz="810" b="0" lang="ja-JP" altLang="en-US">
-                <a:solidFill>
-                  <a:srgbClr val="626669"/>
-                </a:solidFill>
-                <a:latin typeface="Noto Sans"/>
-                <a:ea typeface="Noto Sans CJK JP"/>
-                <a:cs typeface="Noto Sans"/>
-              </a:rPr>
-              <a:t>  </a:t>
+              <a:t>[1] Hendrycks et al. MATH. 公開データ。 </a:t>
             </a:r>
             <a:r>
               <a:rPr sz="810" b="0" lang="ja-JP" altLang="en-US">
@@ -16456,7 +12480,7 @@
                 <a:ea typeface="Noto Sans CJK JP"/>
                 <a:cs typeface="Noto Sans"/>
               </a:rPr>
-              <a:t>test全5,000問の件数。HELMの公開評価はLevel 1の437問。</a:t>
+              <a:t>test全5,000問の、難度ごとの件数。</a:t>
             </a:r>
           </a:p>
         </p:txBody>
@@ -16510,18 +12534,7 @@
                 <a:ea typeface="Noto Sans CJK JP"/>
                 <a:cs typeface="Noto Sans"/>
               </a:rPr>
-              <a:t>[1] MATH, EleutherAI/hendrycks_math. 固定revisionのtest分割。元の競技問題・解説の著者に帰属。</a:t>
-            </a:r>
-            <a:r>
-              <a:rPr sz="810" b="0" lang="ja-JP" altLang="en-US">
-                <a:solidFill>
-                  <a:srgbClr val="626669"/>
-                </a:solidFill>
-                <a:latin typeface="Noto Sans"/>
-                <a:ea typeface="Noto Sans CJK JP"/>
-                <a:cs typeface="Noto Sans"/>
-              </a:rPr>
-              <a:t>  </a:t>
+              <a:t>[1] Hendrycks et al. MATH. 公開データ。 </a:t>
             </a:r>
             <a:r>
               <a:rPr sz="810" b="0" lang="ja-JP" altLang="en-US">
@@ -16652,7 +12665,7 @@
                 <a:ea typeface="Noto Sans CJK JP"/>
                 <a:cs typeface="Noto Sans"/>
               </a:rPr>
-              <a:t>難度は各分野の中で1〜5を付ける。1が易しく、5が難しい。</a:t>
+              <a:t>各分野の中で、難度を1〜5で表す。1が易しく、5が難しい。</a:t>
             </a:r>
           </a:p>
           <a:p>
@@ -16682,7 +12695,7 @@
                 <a:ea typeface="Noto Sans CJK JP"/>
                 <a:cs typeface="Noto Sans"/>
               </a:rPr>
-              <a:t>AoPSの難度を使い、AMC 8の序盤の問題はLevel 1、AIMEの問題はLevel 5に当たることが多い。</a:t>
+              <a:t>Art of Problem Solving（AoPS）の難度を使い、AMC 8の序盤の問題はLevel 1、AIMEの問題はLevel 5に当たることが多い。</a:t>
             </a:r>
           </a:p>
           <a:p>
@@ -16712,7 +12725,7 @@
                 <a:ea typeface="Noto Sans CJK JP"/>
                 <a:cs typeface="Noto Sans"/>
               </a:rPr>
-              <a:t>分野と難度は別の注釈。例えば複素数の絶対値や三角関数も、Level 1に含まれる。</a:t>
+              <a:t>複素数の絶対値や三角関数も、分野内で易しい問題ならLevel 1に含まれる。</a:t>
             </a:r>
           </a:p>
         </p:txBody>
@@ -16906,7 +12919,7 @@
                 <a:ea typeface="Noto Sans CJK JP"/>
                 <a:cs typeface="Noto Sans"/>
               </a:rPr>
-              <a:t>利用の変化と入手方法</a:t>
+              <a:t>公開配布と利用方法</a:t>
             </a:r>
           </a:p>
         </p:txBody>
@@ -16954,7 +12967,7 @@
                 <a:ea typeface="Noto Sans CJK JP"/>
                 <a:cs typeface="Noto Sans"/>
               </a:rPr>
-              <a:t>4. 利用の変化と入手方法</a:t>
+              <a:t>4. 公開配布と利用方法</a:t>
             </a:r>
           </a:p>
         </p:txBody>
@@ -17020,7 +13033,7 @@
                 <a:ea typeface="Noto Sans CJK JP"/>
                 <a:cs typeface="Noto Sans"/>
               </a:rPr>
-              <a:t>数学の学習と、汎用モデルの評価に使われる</a:t>
+              <a:t>数学の基礎学習と、競技問題の追加学習をつなぐ</a:t>
             </a:r>
           </a:p>
         </p:txBody>
@@ -17073,7 +13086,7 @@
                 <a:ea typeface="Noto Sans CJK JP"/>
                 <a:cs typeface="Noto Sans"/>
               </a:rPr>
-              <a:t>2021年は、解説付きデータでの学習と、別途AMPSでの数学事前学習を組み合わせて評価した。</a:t>
+              <a:t>2021年の研究では、数学の事前学習データAMPSも公開した。Khan Academyの練習問題と、Mathematicaで生成した問題・解説からなる約23 GBのデータである。</a:t>
             </a:r>
           </a:p>
           <a:p>
@@ -17103,7 +13116,7 @@
                 <a:ea typeface="Noto Sans CJK JP"/>
                 <a:cs typeface="Noto Sans"/>
               </a:rPr>
-              <a:t>HELMでは、学習例をプロンプトに入れる方法で複数の汎用言語モデルを比較した。</a:t>
+              <a:t>GPT-2はAMPSで事前学習してから、MATHの問題と解説・最終解答で追加学習した。解法を学ぶことが、答えだけを学ぶ場合より役立つかも調べた。</a:t>
             </a:r>
           </a:p>
           <a:p>
@@ -17133,7 +13146,7 @@
                 <a:ea typeface="Noto Sans CJK JP"/>
                 <a:cs typeface="Noto Sans"/>
               </a:rPr>
-              <a:t>2026-10-18時点で公式リポジトリ、固定した公開配布、HELMの実装を取得できる。</a:t>
+              <a:t>公式リポジトリは、MATHとAMPSの取得先、データを読むコード、解答の評価コードを案内している。</a:t>
             </a:r>
           </a:p>
         </p:txBody>
@@ -17181,7 +13194,7 @@
                 <a:ea typeface="Noto Sans CJK JP"/>
                 <a:cs typeface="Noto Sans"/>
               </a:rPr>
-              <a:t>4. 利用の変化と入手方法</a:t>
+              <a:t>4. 公開配布と利用方法</a:t>
             </a:r>
           </a:p>
         </p:txBody>
@@ -17235,8 +13248,28 @@
                 <a:ea typeface="Noto Sans CJK JP"/>
                 <a:cs typeface="Noto Sans"/>
               </a:rPr>
-              <a:t>[1] Dan Hendrycks et al. MATH. 公式リポジトリ。2026-10-18参照。</a:t>
-            </a:r>
+              <a:t>[1] Hendrycks et al. (2021). Measuring Mathematical Problem Solving With the MATH Dataset.</a:t>
+            </a:r>
+          </a:p>
+          <a:p>
+            <a:pPr algn="l">
+              <a:lnSpc>
+                <a:spcPts val="940"/>
+              </a:lnSpc>
+              <a:spcBef>
+                <a:spcPts val="0"/>
+              </a:spcBef>
+              <a:spcAft>
+                <a:spcPts val="140"/>
+              </a:spcAft>
+              <a:buNone/>
+              <a:defRPr sz="810" b="0">
+                <a:solidFill>
+                  <a:srgbClr val="303437"/>
+                </a:solidFill>
+                <a:latin typeface="Noto Sans"/>
+              </a:defRPr>
+            </a:pPr>
             <a:r>
               <a:rPr sz="810" b="0" lang="ja-JP" altLang="en-US">
                 <a:solidFill>
@@ -17245,8 +13278,40 @@
                 <a:latin typeface="Noto Sans"/>
                 <a:ea typeface="Noto Sans CJK JP"/>
                 <a:cs typeface="Noto Sans"/>
-              </a:rPr>
-              <a:t>  </a:t>
+                <a:hlinkClick r:id="rId3"/>
+              </a:rPr>
+              <a:t>https://arxiv.org/abs/2103.03874</a:t>
+            </a:r>
+          </a:p>
+          <a:p>
+            <a:pPr algn="l">
+              <a:lnSpc>
+                <a:spcPts val="940"/>
+              </a:lnSpc>
+              <a:spcBef>
+                <a:spcPts val="0"/>
+              </a:spcBef>
+              <a:spcAft>
+                <a:spcPts val="140"/>
+              </a:spcAft>
+              <a:buNone/>
+              <a:defRPr sz="810" b="0">
+                <a:solidFill>
+                  <a:srgbClr val="303437"/>
+                </a:solidFill>
+                <a:latin typeface="Noto Sans"/>
+              </a:defRPr>
+            </a:pPr>
+            <a:r>
+              <a:rPr sz="810" b="0" lang="ja-JP" altLang="en-US">
+                <a:solidFill>
+                  <a:srgbClr val="626669"/>
+                </a:solidFill>
+                <a:latin typeface="Noto Sans"/>
+                <a:ea typeface="Noto Sans CJK JP"/>
+                <a:cs typeface="Noto Sans"/>
+              </a:rPr>
+              <a:t>[2] Hendrycks et al. MATH. </a:t>
             </a:r>
             <a:r>
               <a:rPr sz="810" b="0" lang="ja-JP" altLang="en-US">
@@ -17324,7 +13389,7 @@
                 <a:ea typeface="Noto Sans CJK JP"/>
                 <a:cs typeface="Noto Sans"/>
               </a:rPr>
-              <a:t>分野、分割、バージョンを固定して読む</a:t>
+              <a:t>分野と分割を選び、問題と解説を読み出す</a:t>
             </a:r>
           </a:p>
         </p:txBody>
@@ -17372,21 +13437,21 @@
                 <a:ea typeface="Noto Sans CJK JP"/>
                 <a:cs typeface="Noto Sans"/>
               </a:rPr>
-              <a:t>4. 利用の変化と入手方法</a:t>
-            </a:r>
-          </a:p>
-        </p:txBody>
-      </p:sp>
-      <p:sp>
-        <p:nvSpPr>
-          <p:cNvPr id="4" name="Rectangle 3"/>
+              <a:t>4. 公開配布と利用方法</a:t>
+            </a:r>
+          </a:p>
+        </p:txBody>
+      </p:sp>
+      <p:sp>
+        <p:nvSpPr>
+          <p:cNvPr id="4" name="code-frame"/>
           <p:cNvSpPr/>
           <p:nvPr/>
         </p:nvSpPr>
         <p:spPr>
           <a:xfrm>
-            <a:off x="548640" y="1508760"/>
-            <a:ext cx="8046720" cy="2159000"/>
+            <a:off x="548640" y="1542627"/>
+            <a:ext cx="8046720" cy="1380065"/>
           </a:xfrm>
           <a:prstGeom prst="rect">
             <a:avLst/>
@@ -17414,7 +13479,7 @@
           </a:fontRef>
         </p:style>
         <p:txBody>
-          <a:bodyPr rtlCol="0" anchor="t" wrap="none" lIns="152400" rIns="152400" tIns="92710" bIns="127000"/>
+          <a:bodyPr rtlCol="0" anchor="t" wrap="none" lIns="152400" rIns="152400" tIns="58842" bIns="127000"/>
           <a:lstStyle/>
           <a:p>
             <a:pPr algn="l">
@@ -17444,7 +13509,7 @@
                 <a:ea typeface="Noto Sans CJK JP"/>
                 <a:cs typeface="Liberation Mono"/>
               </a:rPr>
-              <a:t>from datasets import load_dataset</a:t>
+              <a:t>import pyarrow.parquet as pq</a:t>
             </a:r>
           </a:p>
           <a:p>
@@ -17475,7 +13540,7 @@
                 <a:ea typeface="Noto Sans CJK JP"/>
                 <a:cs typeface="Liberation Mono"/>
               </a:rPr>
-              <a:t>data = load_dataset(</a:t>
+              <a:t>data = pq.read_table("algebra-test.parquet").to_pylist()</a:t>
             </a:r>
           </a:p>
           <a:p>
@@ -17506,7 +13571,7 @@
                 <a:ea typeface="Noto Sans CJK JP"/>
                 <a:cs typeface="Liberation Mono"/>
               </a:rPr>
-              <a:t>    'EleutherAI/hendrycks_math', 'algebra',</a:t>
+              <a:t>print(data[0]["problem"])</a:t>
             </a:r>
           </a:p>
           <a:p>
@@ -17537,7 +13602,7 @@
                 <a:ea typeface="Noto Sans CJK JP"/>
                 <a:cs typeface="Liberation Mono"/>
               </a:rPr>
-              <a:t>    revision='21a5633873b6a120296cce3e2df9d5550074f4a3',</a:t>
+              <a:t>print(data[0]["solution"])</a:t>
             </a:r>
           </a:p>
           <a:p>
@@ -17568,100 +13633,7 @@
                 <a:ea typeface="Noto Sans CJK JP"/>
                 <a:cs typeface="Liberation Mono"/>
               </a:rPr>
-              <a:t>    split='test',</a:t>
-            </a:r>
-          </a:p>
-          <a:p>
-            <a:pPr algn="l">
-              <a:lnSpc>
-                <a:spcPts val="1875"/>
-              </a:lnSpc>
-              <a:spcBef>
-                <a:spcPts val="0"/>
-              </a:spcBef>
-              <a:spcAft>
-                <a:spcPts val="0"/>
-              </a:spcAft>
-              <a:buNone/>
-              <a:defRPr sz="1500" b="0">
-                <a:solidFill>
-                  <a:srgbClr val="303437"/>
-                </a:solidFill>
-                <a:latin typeface="Noto Sans"/>
-              </a:defRPr>
-            </a:pPr>
-            <a:r>
-              <a:rPr sz="1500" b="0" lang="ja-JP" altLang="en-US">
-                <a:solidFill>
-                  <a:srgbClr val="303437"/>
-                </a:solidFill>
-                <a:latin typeface="Liberation Mono"/>
-                <a:ea typeface="Noto Sans CJK JP"/>
-                <a:cs typeface="Liberation Mono"/>
-              </a:rPr>
-              <a:t>)</a:t>
-            </a:r>
-          </a:p>
-          <a:p>
-            <a:pPr algn="l">
-              <a:lnSpc>
-                <a:spcPts val="1875"/>
-              </a:lnSpc>
-              <a:spcBef>
-                <a:spcPts val="0"/>
-              </a:spcBef>
-              <a:spcAft>
-                <a:spcPts val="0"/>
-              </a:spcAft>
-              <a:buNone/>
-              <a:defRPr sz="1500" b="0">
-                <a:solidFill>
-                  <a:srgbClr val="303437"/>
-                </a:solidFill>
-                <a:latin typeface="Noto Sans"/>
-              </a:defRPr>
-            </a:pPr>
-            <a:r>
-              <a:rPr sz="1500" b="0" lang="ja-JP" altLang="en-US">
-                <a:solidFill>
-                  <a:srgbClr val="303437"/>
-                </a:solidFill>
-                <a:latin typeface="Liberation Mono"/>
-                <a:ea typeface="Noto Sans CJK JP"/>
-                <a:cs typeface="Liberation Mono"/>
-              </a:rPr>
-              <a:t>print(data[372]['problem'])</a:t>
-            </a:r>
-          </a:p>
-          <a:p>
-            <a:pPr algn="l">
-              <a:lnSpc>
-                <a:spcPts val="1875"/>
-              </a:lnSpc>
-              <a:spcBef>
-                <a:spcPts val="0"/>
-              </a:spcBef>
-              <a:spcAft>
-                <a:spcPts val="0"/>
-              </a:spcAft>
-              <a:buNone/>
-              <a:defRPr sz="1500" b="0">
-                <a:solidFill>
-                  <a:srgbClr val="303437"/>
-                </a:solidFill>
-                <a:latin typeface="Noto Sans"/>
-              </a:defRPr>
-            </a:pPr>
-            <a:r>
-              <a:rPr sz="1500" b="0" lang="ja-JP" altLang="en-US">
-                <a:solidFill>
-                  <a:srgbClr val="303437"/>
-                </a:solidFill>
-                <a:latin typeface="Liberation Mono"/>
-                <a:ea typeface="Noto Sans CJK JP"/>
-                <a:cs typeface="Liberation Mono"/>
-              </a:rPr>
-              <a:t>print(data[372]['solution'])</a:t>
+              <a:t>print(data[0]["level"], data[0]["type"])</a:t>
             </a:r>
           </a:p>
         </p:txBody>
@@ -17674,8 +13646,8 @@
         </p:nvSpPr>
         <p:spPr>
           <a:xfrm>
-            <a:off x="594360" y="3868927"/>
-            <a:ext cx="7955279" cy="777240"/>
+            <a:off x="594360" y="3050540"/>
+            <a:ext cx="7955279" cy="929640"/>
           </a:xfrm>
           <a:prstGeom prst="rect">
             <a:avLst/>
@@ -17683,7 +13655,7 @@
           <a:noFill/>
         </p:spPr>
         <p:txBody>
-          <a:bodyPr wrap="square" lIns="0" rIns="0" tIns="0" bIns="0">
+          <a:bodyPr wrap="square" lIns="0" rIns="0" tIns="50800" bIns="101600">
             <a:noAutofit/>
           </a:bodyPr>
           <a:lstStyle/>
@@ -17715,7 +13687,7 @@
                 <a:ea typeface="Noto Sans CJK JP"/>
                 <a:cs typeface="Noto Sans"/>
               </a:rPr>
-              <a:t>problem、solution、level、typeを持つ。元のLaTeXも含めて保存される。</a:t>
+              <a:t>algebraのtest Parquetをalgebra-test.parquetとして保存する。problemが問題文、solutionが解説。levelとtypeが難度と分野を表す。</a:t>
             </a:r>
           </a:p>
         </p:txBody>
@@ -17769,18 +13741,7 @@
                 <a:ea typeface="Noto Sans CJK JP"/>
                 <a:cs typeface="Noto Sans"/>
               </a:rPr>
-              <a:t>[1] MATH, EleutherAI/hendrycks_math. 固定revisionのtest分割。元の競技問題・解説の著者に帰属。</a:t>
-            </a:r>
-            <a:r>
-              <a:rPr sz="810" b="0" lang="ja-JP" altLang="en-US">
-                <a:solidFill>
-                  <a:srgbClr val="626669"/>
-                </a:solidFill>
-                <a:latin typeface="Noto Sans"/>
-                <a:ea typeface="Noto Sans CJK JP"/>
-                <a:cs typeface="Noto Sans"/>
-              </a:rPr>
-              <a:t>  </a:t>
+              <a:t>[1] Hendrycks et al. MATH. 公開データ。 </a:t>
             </a:r>
             <a:r>
               <a:rPr sz="810" b="0" lang="ja-JP" altLang="en-US">
@@ -17858,7 +13819,7 @@
                 <a:ea typeface="Noto Sans CJK JP"/>
                 <a:cs typeface="Noto Sans"/>
               </a:rPr>
-              <a:t>公式リンクと、分割を保つ配布を照合した</a:t>
+              <a:t>公式リンク先と、分野・分割を選べる配布がある</a:t>
             </a:r>
           </a:p>
         </p:txBody>
@@ -17911,7 +13872,7 @@
                 <a:ea typeface="Noto Sans CJK JP"/>
                 <a:cs typeface="Noto Sans"/>
               </a:rPr>
-              <a:t>公式READMEが案内する配布では、12,500問を1つの集合として取得できた。</a:t>
+              <a:t>公式READMEは、Hugging Faceのqwedsacf/competition_mathを案内する。この配布は12,500問を一つのtrain集合に収めている。</a:t>
             </a:r>
           </a:p>
           <a:p>
@@ -17941,37 +13902,7 @@
                 <a:ea typeface="Noto Sans CJK JP"/>
                 <a:cs typeface="Noto Sans"/>
               </a:rPr>
-              <a:t>今回の実例には、学習・testと7分野の分割を保つEleutherAIの公開配布を使った。</a:t>
-            </a:r>
-          </a:p>
-          <a:p>
-            <a:pPr marL="457200" indent="-355600">
-              <a:lnSpc>
-                <a:spcPts val="2618"/>
-              </a:lnSpc>
-              <a:spcAft>
-                <a:spcPts val="0"/>
-              </a:spcAft>
-              <a:buSzPct val="60455"/>
-              <a:buFont typeface="Noto Sans CJK JP"/>
-              <a:buChar char="●"/>
-              <a:defRPr sz="2200" b="0">
-                <a:solidFill>
-                  <a:srgbClr val="303437"/>
-                </a:solidFill>
-                <a:latin typeface="Noto Sans"/>
-              </a:defRPr>
-            </a:pPr>
-            <a:r>
-              <a:rPr sz="2200" b="0" lang="ja-JP" altLang="en-US">
-                <a:solidFill>
-                  <a:srgbClr val="303437"/>
-                </a:solidFill>
-                <a:latin typeface="Noto Sans"/>
-                <a:ea typeface="Noto Sans CJK JP"/>
-                <a:cs typeface="Noto Sans"/>
-              </a:rPr>
-              <a:t>両方の配布を全件取得し、問題・解説・分野・難度の12,500レコードが、重複数も含めて一致することを確認した。</a:t>
+              <a:t>EleutherAI/hendrycks_mathでは、7分野と学習・testの分割を選べる。モデルの学習や評価には、使う集合の構成を確認して選ぶ。</a:t>
             </a:r>
           </a:p>
         </p:txBody>
@@ -18019,7 +13950,7 @@
                 <a:ea typeface="Noto Sans CJK JP"/>
                 <a:cs typeface="Noto Sans"/>
               </a:rPr>
-              <a:t>4. 利用の変化と入手方法</a:t>
+              <a:t>4. 公開配布と利用方法</a:t>
             </a:r>
           </a:p>
         </p:txBody>
@@ -18073,7 +14004,7 @@
                 <a:ea typeface="Noto Sans CJK JP"/>
                 <a:cs typeface="Noto Sans"/>
               </a:rPr>
-              <a:t>[1] MATH. 公式READMEのリンク先配布。12,500件を1集合で公開。</a:t>
+              <a:t>[1] MATH. 公式READMEのリンク先配布。</a:t>
             </a:r>
             <a:r>
               <a:rPr sz="810" b="0" lang="ja-JP" altLang="en-US">
@@ -18083,9 +14014,30 @@
                 <a:latin typeface="Noto Sans"/>
                 <a:ea typeface="Noto Sans CJK JP"/>
                 <a:cs typeface="Noto Sans"/>
-              </a:rPr>
-              <a:t>  </a:t>
-            </a:r>
+                <a:hlinkClick r:id="rId2"/>
+              </a:rPr>
+              <a:t>https://huggingface.co/datasets/qwedsacf/competition_math</a:t>
+            </a:r>
+          </a:p>
+          <a:p>
+            <a:pPr algn="l">
+              <a:lnSpc>
+                <a:spcPts val="940"/>
+              </a:lnSpc>
+              <a:spcBef>
+                <a:spcPts val="0"/>
+              </a:spcBef>
+              <a:spcAft>
+                <a:spcPts val="140"/>
+              </a:spcAft>
+              <a:buNone/>
+              <a:defRPr sz="810" b="0">
+                <a:solidFill>
+                  <a:srgbClr val="303437"/>
+                </a:solidFill>
+                <a:latin typeface="Noto Sans"/>
+              </a:defRPr>
+            </a:pPr>
             <a:r>
               <a:rPr sz="810" b="0" lang="ja-JP" altLang="en-US">
                 <a:solidFill>
@@ -18094,9 +14046,20 @@
                 <a:latin typeface="Noto Sans"/>
                 <a:ea typeface="Noto Sans CJK JP"/>
                 <a:cs typeface="Noto Sans"/>
-                <a:hlinkClick r:id="rId2"/>
-              </a:rPr>
-              <a:t>https://huggingface.co/datasets/qwedsacf/competition_math</a:t>
+              </a:rPr>
+              <a:t>[2] EleutherAI. hendrycks_math. </a:t>
+            </a:r>
+            <a:r>
+              <a:rPr sz="810" b="0" lang="ja-JP" altLang="en-US">
+                <a:solidFill>
+                  <a:srgbClr val="626669"/>
+                </a:solidFill>
+                <a:latin typeface="Noto Sans"/>
+                <a:ea typeface="Noto Sans CJK JP"/>
+                <a:cs typeface="Noto Sans"/>
+                <a:hlinkClick r:id="rId3"/>
+              </a:rPr>
+              <a:t>https://huggingface.co/datasets/EleutherAI/hendrycks_math</a:t>
             </a:r>
           </a:p>
         </p:txBody>
@@ -18245,7 +14208,7 @@
                 <a:ea typeface="Noto Sans CJK JP"/>
                 <a:cs typeface="Noto Sans"/>
               </a:rPr>
-              <a:t>採点とHELMの比較条件</a:t>
+              <a:t>最終解答の採点と2021年の成績</a:t>
             </a:r>
           </a:p>
           <a:p>
@@ -18305,7 +14268,7 @@
                 <a:ea typeface="Noto Sans CJK JP"/>
                 <a:cs typeface="Noto Sans"/>
               </a:rPr>
-              <a:t>利用の変化と入手方法</a:t>
+              <a:t>公開配布と利用方法</a:t>
             </a:r>
           </a:p>
         </p:txBody>
@@ -18472,67 +14435,7 @@
                 <a:ea typeface="Noto Sans CJK JP"/>
                 <a:cs typeface="Noto Sans"/>
               </a:rPr>
-              <a:t>公式コードと公開データカードのライセンス表示はMIT。元の競技問題やAoPS上の解説の著者・出所も保持する。</a:t>
-            </a:r>
-          </a:p>
-          <a:p>
-            <a:pPr marL="457200" indent="-355600">
-              <a:lnSpc>
-                <a:spcPts val="2499"/>
-              </a:lnSpc>
-              <a:spcAft>
-                <a:spcPts val="700"/>
-              </a:spcAft>
-              <a:buSzPct val="63333"/>
-              <a:buFont typeface="Noto Sans CJK JP"/>
-              <a:buChar char="●"/>
-              <a:defRPr sz="2100" b="0">
-                <a:solidFill>
-                  <a:srgbClr val="303437"/>
-                </a:solidFill>
-                <a:latin typeface="Noto Sans"/>
-              </a:defRPr>
-            </a:pPr>
-            <a:r>
-              <a:rPr sz="2100" b="0" lang="ja-JP" altLang="en-US">
-                <a:solidFill>
-                  <a:srgbClr val="303437"/>
-                </a:solidFill>
-                <a:latin typeface="Noto Sans"/>
-                <a:ea typeface="Noto Sans CJK JP"/>
-                <a:cs typeface="Noto Sans"/>
-              </a:rPr>
-              <a:t>今回取得した分割付きParquetは合計約4.9 MB。公式リンク先の統合Parquetは約4.8 MBで、どちらも取得実測。</a:t>
-            </a:r>
-          </a:p>
-          <a:p>
-            <a:pPr marL="457200" indent="-355600">
-              <a:lnSpc>
-                <a:spcPts val="2499"/>
-              </a:lnSpc>
-              <a:spcAft>
-                <a:spcPts val="0"/>
-              </a:spcAft>
-              <a:buSzPct val="63333"/>
-              <a:buFont typeface="Noto Sans CJK JP"/>
-              <a:buChar char="●"/>
-              <a:defRPr sz="2100" b="0">
-                <a:solidFill>
-                  <a:srgbClr val="303437"/>
-                </a:solidFill>
-                <a:latin typeface="Noto Sans"/>
-              </a:defRPr>
-            </a:pPr>
-            <a:r>
-              <a:rPr sz="2100" b="0" lang="ja-JP" altLang="en-US">
-                <a:solidFill>
-                  <a:srgbClr val="303437"/>
-                </a:solidFill>
-                <a:latin typeface="Noto Sans"/>
-                <a:ea typeface="Noto Sans CJK JP"/>
-                <a:cs typeface="Noto Sans"/>
-              </a:rPr>
-              <a:t>実例の問題全文・解説全文・最終解答・固定revision・レコードhashを検証記録に保存した。</a:t>
+              <a:t>公式コードと公開データカードのライセンス表示はMIT。元の競技問題やArt of Problem Solving上の解説の著者・出所も保持して利用する。</a:t>
             </a:r>
           </a:p>
         </p:txBody>
@@ -18580,7 +14483,7 @@
                 <a:ea typeface="Noto Sans CJK JP"/>
                 <a:cs typeface="Noto Sans"/>
               </a:rPr>
-              <a:t>4. 利用の変化と入手方法</a:t>
+              <a:t>4. 公開配布と利用方法</a:t>
             </a:r>
           </a:p>
         </p:txBody>
@@ -18594,7 +14497,7 @@
         <p:spPr>
           <a:xfrm>
             <a:off x="502920" y="4700016"/>
-            <a:ext cx="8183879" cy="530352"/>
+            <a:ext cx="8183879" cy="419100"/>
           </a:xfrm>
           <a:prstGeom prst="rect">
             <a:avLst/>
@@ -18634,7 +14537,7 @@
                 <a:ea typeface="Noto Sans CJK JP"/>
                 <a:cs typeface="Noto Sans"/>
               </a:rPr>
-              <a:t>[1] Dan Hendrycks et al. MATH. 公式リポジトリ。2026-10-18参照。</a:t>
+              <a:t>[1] Hendrycks et al. MATH. </a:t>
             </a:r>
             <a:r>
               <a:rPr sz="810" b="0" lang="ja-JP" altLang="en-US">
@@ -18644,9 +14547,30 @@
                 <a:latin typeface="Noto Sans"/>
                 <a:ea typeface="Noto Sans CJK JP"/>
                 <a:cs typeface="Noto Sans"/>
-              </a:rPr>
-              <a:t>  </a:t>
-            </a:r>
+                <a:hlinkClick r:id="rId2"/>
+              </a:rPr>
+              <a:t>https://github.com/hendrycks/math</a:t>
+            </a:r>
+          </a:p>
+          <a:p>
+            <a:pPr algn="l">
+              <a:lnSpc>
+                <a:spcPts val="940"/>
+              </a:lnSpc>
+              <a:spcBef>
+                <a:spcPts val="0"/>
+              </a:spcBef>
+              <a:spcAft>
+                <a:spcPts val="140"/>
+              </a:spcAft>
+              <a:buNone/>
+              <a:defRPr sz="810" b="0">
+                <a:solidFill>
+                  <a:srgbClr val="303437"/>
+                </a:solidFill>
+                <a:latin typeface="Noto Sans"/>
+              </a:defRPr>
+            </a:pPr>
             <a:r>
               <a:rPr sz="810" b="0" lang="ja-JP" altLang="en-US">
                 <a:solidFill>
@@ -18655,9 +14579,63 @@
                 <a:latin typeface="Noto Sans"/>
                 <a:ea typeface="Noto Sans CJK JP"/>
                 <a:cs typeface="Noto Sans"/>
-                <a:hlinkClick r:id="rId2"/>
-              </a:rPr>
-              <a:t>https://github.com/hendrycks/math</a:t>
+              </a:rPr>
+              <a:t>[2] EleutherAI. hendrycks_math. </a:t>
+            </a:r>
+            <a:r>
+              <a:rPr sz="810" b="0" lang="ja-JP" altLang="en-US">
+                <a:solidFill>
+                  <a:srgbClr val="626669"/>
+                </a:solidFill>
+                <a:latin typeface="Noto Sans"/>
+                <a:ea typeface="Noto Sans CJK JP"/>
+                <a:cs typeface="Noto Sans"/>
+                <a:hlinkClick r:id="rId3"/>
+              </a:rPr>
+              <a:t>https://huggingface.co/datasets/EleutherAI/hendrycks_math</a:t>
+            </a:r>
+          </a:p>
+          <a:p>
+            <a:pPr algn="l">
+              <a:lnSpc>
+                <a:spcPts val="940"/>
+              </a:lnSpc>
+              <a:spcBef>
+                <a:spcPts val="0"/>
+              </a:spcBef>
+              <a:spcAft>
+                <a:spcPts val="140"/>
+              </a:spcAft>
+              <a:buNone/>
+              <a:defRPr sz="810" b="0">
+                <a:solidFill>
+                  <a:srgbClr val="303437"/>
+                </a:solidFill>
+                <a:latin typeface="Noto Sans"/>
+              </a:defRPr>
+            </a:pPr>
+            <a:r>
+              <a:rPr sz="810" b="0" lang="ja-JP" altLang="en-US">
+                <a:solidFill>
+                  <a:srgbClr val="626669"/>
+                </a:solidFill>
+                <a:latin typeface="Noto Sans"/>
+                <a:ea typeface="Noto Sans CJK JP"/>
+                <a:cs typeface="Noto Sans"/>
+              </a:rPr>
+              <a:t>[3] MATH. 統合配布。</a:t>
+            </a:r>
+            <a:r>
+              <a:rPr sz="810" b="0" lang="ja-JP" altLang="en-US">
+                <a:solidFill>
+                  <a:srgbClr val="626669"/>
+                </a:solidFill>
+                <a:latin typeface="Noto Sans"/>
+                <a:ea typeface="Noto Sans CJK JP"/>
+                <a:cs typeface="Noto Sans"/>
+                <a:hlinkClick r:id="rId4"/>
+              </a:rPr>
+              <a:t>https://huggingface.co/datasets/qwedsacf/competition_math</a:t>
             </a:r>
           </a:p>
         </p:txBody>
@@ -18776,7 +14754,7 @@
                 <a:ea typeface="Noto Sans CJK JP"/>
                 <a:cs typeface="Noto Sans"/>
               </a:rPr>
-              <a:t>MATHは12,500問の競技数学データで、7分野・5段階の難度と解説付きの解答を持つ。</a:t>
+              <a:t>MATHは、12,500問の競技数学データ。7分野・5段階の難度と、解説付きの解答を持つ。</a:t>
             </a:r>
           </a:p>
           <a:p>
@@ -18806,7 +14784,7 @@
                 <a:ea typeface="Noto Sans CJK JP"/>
                 <a:cs typeface="Noto Sans"/>
               </a:rPr>
-              <a:t>最終解答の採点と、途中の推論の正しさは別に検討する。</a:t>
+              <a:t>問題を読み、解法を組み立てて最終解答を出す能力を評価する。解説付きの学習データは、途中の解き方を学ぶ材料にもなる。</a:t>
             </a:r>
           </a:p>
           <a:p>
@@ -18836,7 +14814,7 @@
                 <a:ea typeface="Noto Sans CJK JP"/>
                 <a:cs typeface="Noto Sans"/>
               </a:rPr>
-              <a:t>HELMのregularと解説付き条件は、Level 1の437問を、異なる提示例と出力条件で比べる。</a:t>
+              <a:t>2021年のモデルは全難度のテストで低い正解率を示した。数学の基礎学習と、競技問題の解法学習をつなぐ研究資源である。</a:t>
             </a:r>
           </a:p>
         </p:txBody>
@@ -18884,7 +14862,7 @@
                 <a:ea typeface="Noto Sans CJK JP"/>
                 <a:cs typeface="Noto Sans"/>
               </a:rPr>
-              <a:t>4. 利用の変化と入手方法</a:t>
+              <a:t>4. 公開配布と利用方法</a:t>
             </a:r>
           </a:p>
         </p:txBody>
@@ -19000,11 +14978,11 @@
         <p:spPr>
           <a:xfrm>
             <a:off x="548640" y="2484835"/>
-            <a:ext cx="8046720" cy="585216"/>
-          </a:xfrm>
-        </p:spPr>
-        <p:txBody>
-          <a:bodyPr wrap="square" lIns="0" rIns="0" tIns="0" bIns="0" anchor="ctr">
+            <a:ext cx="8046720" cy="686816"/>
+          </a:xfrm>
+        </p:spPr>
+        <p:txBody>
+          <a:bodyPr wrap="square" lIns="0" rIns="0" tIns="0" bIns="101600" anchor="ctr">
             <a:noAutofit/>
           </a:bodyPr>
           <a:lstStyle/>
@@ -19227,7 +15205,7 @@
                 <a:ea typeface="Noto Sans CJK JP"/>
                 <a:cs typeface="Noto Sans"/>
               </a:rPr>
-              <a:t>実行条件と配布の補足</a:t>
+              <a:t>解答と人手評価の補足</a:t>
             </a:r>
           </a:p>
           <a:p>
@@ -19931,22 +15909,8 @@
                 <a:ea typeface="Noto Sans CJK JP"/>
                 <a:cs typeface="Noto Sans"/>
               </a:rPr>
-              <a:t>[1] MATH, EleutherAI/hendrycks_math. 固定revisionのtest分割。元の競技問題・解説の著者に帰属。 prealgebra / test row 134</a:t>
-            </a:r>
-          </a:p>
-          <a:p>
-            <a:pPr>
-              <a:lnSpc>
-                <a:spcPts val="940"/>
-              </a:lnSpc>
-              <a:buNone/>
-              <a:defRPr sz="810" b="0">
-                <a:solidFill>
-                  <a:srgbClr val="303437"/>
-                </a:solidFill>
-                <a:latin typeface="Noto Sans"/>
-              </a:defRPr>
-            </a:pPr>
+              <a:t>[1] Hendrycks et al. MATH. 公開データ。 </a:t>
+            </a:r>
             <a:r>
               <a:rPr sz="810" b="0" lang="ja-JP" altLang="en-US">
                 <a:solidFill>
@@ -20469,22 +16433,8 @@
                 <a:ea typeface="Noto Sans CJK JP"/>
                 <a:cs typeface="Noto Sans"/>
               </a:rPr>
-              <a:t>[1] MATH, EleutherAI/hendrycks_math. 固定revisionのtest分割。元の競技問題・解説の著者に帰属。 geometry / test row 235</a:t>
-            </a:r>
-          </a:p>
-          <a:p>
-            <a:pPr>
-              <a:lnSpc>
-                <a:spcPts val="940"/>
-              </a:lnSpc>
-              <a:buNone/>
-              <a:defRPr sz="810" b="0">
-                <a:solidFill>
-                  <a:srgbClr val="303437"/>
-                </a:solidFill>
-                <a:latin typeface="Noto Sans"/>
-              </a:defRPr>
-            </a:pPr>
+              <a:t>[1] Hendrycks et al. MATH. 公開データ。 </a:t>
+            </a:r>
             <a:r>
               <a:rPr sz="810" b="0" lang="ja-JP" altLang="en-US">
                 <a:solidFill>
@@ -21007,22 +16957,8 @@
                 <a:ea typeface="Noto Sans CJK JP"/>
                 <a:cs typeface="Noto Sans"/>
               </a:rPr>
-              <a:t>[1] MATH, EleutherAI/hendrycks_math. 固定revisionのtest分割。元の競技問題・解説の著者に帰属。 number_theory / test row 345</a:t>
-            </a:r>
-          </a:p>
-          <a:p>
-            <a:pPr>
-              <a:lnSpc>
-                <a:spcPts val="940"/>
-              </a:lnSpc>
-              <a:buNone/>
-              <a:defRPr sz="810" b="0">
-                <a:solidFill>
-                  <a:srgbClr val="303437"/>
-                </a:solidFill>
-                <a:latin typeface="Noto Sans"/>
-              </a:defRPr>
-            </a:pPr>
+              <a:t>[1] Hendrycks et al. MATH. 公開データ。 </a:t>
+            </a:r>
             <a:r>
               <a:rPr sz="810" b="0" lang="ja-JP" altLang="en-US">
                 <a:solidFill>
@@ -21611,22 +17547,8 @@
                 <a:ea typeface="Noto Sans CJK JP"/>
                 <a:cs typeface="Noto Sans"/>
               </a:rPr>
-              <a:t>[1] MATH, EleutherAI/hendrycks_math. 固定revisionのtest分割。元の競技問題・解説の著者に帰属。 precalculus / test row 235</a:t>
-            </a:r>
-          </a:p>
-          <a:p>
-            <a:pPr>
-              <a:lnSpc>
-                <a:spcPts val="940"/>
-              </a:lnSpc>
-              <a:buNone/>
-              <a:defRPr sz="810" b="0">
-                <a:solidFill>
-                  <a:srgbClr val="303437"/>
-                </a:solidFill>
-                <a:latin typeface="Noto Sans"/>
-              </a:defRPr>
-            </a:pPr>
+              <a:t>[1] Hendrycks et al. MATH. 公開データ。 </a:t>
+            </a:r>
             <a:r>
               <a:rPr sz="810" b="0" lang="ja-JP" altLang="en-US">
                 <a:solidFill>
@@ -22149,22 +18071,8 @@
                 <a:ea typeface="Noto Sans CJK JP"/>
                 <a:cs typeface="Noto Sans"/>
               </a:rPr>
-              <a:t>[1] MATH, EleutherAI/hendrycks_math. 固定revisionのtest分割。元の競技問題・解説の著者に帰属。 algebra / test row 195</a:t>
-            </a:r>
-          </a:p>
-          <a:p>
-            <a:pPr>
-              <a:lnSpc>
-                <a:spcPts val="940"/>
-              </a:lnSpc>
-              <a:buNone/>
-              <a:defRPr sz="810" b="0">
-                <a:solidFill>
-                  <a:srgbClr val="303437"/>
-                </a:solidFill>
-                <a:latin typeface="Noto Sans"/>
-              </a:defRPr>
-            </a:pPr>
+              <a:t>[1] Hendrycks et al. MATH. 公開データ。 </a:t>
+            </a:r>
             <a:r>
               <a:rPr sz="810" b="0" lang="ja-JP" altLang="en-US">
                 <a:solidFill>
@@ -22801,22 +18709,8 @@
                 <a:ea typeface="Noto Sans CJK JP"/>
                 <a:cs typeface="Noto Sans"/>
               </a:rPr>
-              <a:t>[1] MATH, EleutherAI/hendrycks_math. 固定revisionのtest分割。元の競技問題・解説の著者に帰属。 counting_and_probability / test row 156</a:t>
-            </a:r>
-          </a:p>
-          <a:p>
-            <a:pPr>
-              <a:lnSpc>
-                <a:spcPts val="940"/>
-              </a:lnSpc>
-              <a:buNone/>
-              <a:defRPr sz="810" b="0">
-                <a:solidFill>
-                  <a:srgbClr val="303437"/>
-                </a:solidFill>
-                <a:latin typeface="Noto Sans"/>
-              </a:defRPr>
-            </a:pPr>
+              <a:t>[1] Hendrycks et al. MATH. 公開データ。 </a:t>
+            </a:r>
             <a:r>
               <a:rPr sz="810" b="0" lang="ja-JP" altLang="en-US">
                 <a:solidFill>
@@ -23339,22 +19233,8 @@
                 <a:ea typeface="Noto Sans CJK JP"/>
                 <a:cs typeface="Noto Sans"/>
               </a:rPr>
-              <a:t>[1] MATH, EleutherAI/hendrycks_math. 固定revisionのtest分割。元の競技問題・解説の著者に帰属。 prealgebra / test row 190</a:t>
-            </a:r>
-          </a:p>
-          <a:p>
-            <a:pPr>
-              <a:lnSpc>
-                <a:spcPts val="940"/>
-              </a:lnSpc>
-              <a:buNone/>
-              <a:defRPr sz="810" b="0">
-                <a:solidFill>
-                  <a:srgbClr val="303437"/>
-                </a:solidFill>
-                <a:latin typeface="Noto Sans"/>
-              </a:defRPr>
-            </a:pPr>
+              <a:t>[1] Hendrycks et al. MATH. 公開データ。 </a:t>
+            </a:r>
             <a:r>
               <a:rPr sz="810" b="0" lang="ja-JP" altLang="en-US">
                 <a:solidFill>
@@ -23877,22 +19757,8 @@
                 <a:ea typeface="Noto Sans CJK JP"/>
                 <a:cs typeface="Noto Sans"/>
               </a:rPr>
-              <a:t>[1] MATH, EleutherAI/hendrycks_math. 固定revisionのtest分割。元の競技問題・解説の著者に帰属。 geometry / test row 167</a:t>
-            </a:r>
-          </a:p>
-          <a:p>
-            <a:pPr>
-              <a:lnSpc>
-                <a:spcPts val="940"/>
-              </a:lnSpc>
-              <a:buNone/>
-              <a:defRPr sz="810" b="0">
-                <a:solidFill>
-                  <a:srgbClr val="303437"/>
-                </a:solidFill>
-                <a:latin typeface="Noto Sans"/>
-              </a:defRPr>
-            </a:pPr>
+              <a:t>[1] Hendrycks et al. MATH. 公開データ。 </a:t>
+            </a:r>
             <a:r>
               <a:rPr sz="810" b="0" lang="ja-JP" altLang="en-US">
                 <a:solidFill>
@@ -24415,22 +20281,8 @@
                 <a:ea typeface="Noto Sans CJK JP"/>
                 <a:cs typeface="Noto Sans"/>
               </a:rPr>
-              <a:t>[1] MATH, EleutherAI/hendrycks_math. 固定revisionのtest分割。元の競技問題・解説の著者に帰属。 number_theory / test row 89</a:t>
-            </a:r>
-          </a:p>
-          <a:p>
-            <a:pPr>
-              <a:lnSpc>
-                <a:spcPts val="940"/>
-              </a:lnSpc>
-              <a:buNone/>
-              <a:defRPr sz="810" b="0">
-                <a:solidFill>
-                  <a:srgbClr val="303437"/>
-                </a:solidFill>
-                <a:latin typeface="Noto Sans"/>
-              </a:defRPr>
-            </a:pPr>
+              <a:t>[1] Hendrycks et al. MATH. 公開データ。 </a:t>
+            </a:r>
             <a:r>
               <a:rPr sz="810" b="0" lang="ja-JP" altLang="en-US">
                 <a:solidFill>
@@ -24953,22 +20805,8 @@
                 <a:ea typeface="Noto Sans CJK JP"/>
                 <a:cs typeface="Noto Sans"/>
               </a:rPr>
-              <a:t>[1] MATH, EleutherAI/hendrycks_math. 固定revisionのtest分割。元の競技問題・解説の著者に帰属。 precalculus / test row 541</a:t>
-            </a:r>
-          </a:p>
-          <a:p>
-            <a:pPr>
-              <a:lnSpc>
-                <a:spcPts val="940"/>
-              </a:lnSpc>
-              <a:buNone/>
-              <a:defRPr sz="810" b="0">
-                <a:solidFill>
-                  <a:srgbClr val="303437"/>
-                </a:solidFill>
-                <a:latin typeface="Noto Sans"/>
-              </a:defRPr>
-            </a:pPr>
+              <a:t>[1] Hendrycks et al. MATH. 公開データ。 </a:t>
+            </a:r>
             <a:r>
               <a:rPr sz="810" b="0" lang="ja-JP" altLang="en-US">
                 <a:solidFill>
@@ -25045,7 +20883,7 @@
                 <a:ea typeface="Noto Sans CJK JP"/>
                 <a:cs typeface="Noto Sans"/>
               </a:rPr>
-              <a:t>実行条件と配布の補足</a:t>
+              <a:t>解答と人手評価の補足</a:t>
             </a:r>
           </a:p>
         </p:txBody>
@@ -25093,3141 +20931,7 @@
                 <a:ea typeface="Noto Sans CJK JP"/>
                 <a:cs typeface="Noto Sans"/>
               </a:rPr>
-              <a:t>Appendix: 2. 実行条件と配布の補足</a:t>
-            </a:r>
-          </a:p>
-        </p:txBody>
-      </p:sp>
-    </p:spTree>
-  </p:cSld>
-  <p:clrMapOvr>
-    <a:masterClrMapping/>
-  </p:clrMapOvr>
-</p:sld>
-</file>
-
-<file path=ppt/slides/slide46.xml><?xml version="1.0" encoding="utf-8"?>
-<p:sld xmlns:a="http://schemas.openxmlformats.org/drawingml/2006/main" xmlns:p="http://schemas.openxmlformats.org/presentationml/2006/main" xmlns:r="http://schemas.openxmlformats.org/officeDocument/2006/relationships">
-  <p:cSld>
-    <p:spTree>
-      <p:nvGrpSpPr>
-        <p:cNvPr id="1" name=""/>
-        <p:cNvGrpSpPr/>
-        <p:nvPr/>
-      </p:nvGrpSpPr>
-      <p:grpSpPr/>
-      <p:sp>
-        <p:nvSpPr>
-          <p:cNvPr id="2" name="Title 1"/>
-          <p:cNvSpPr>
-            <a:spLocks noGrp="1"/>
-          </p:cNvSpPr>
-          <p:nvPr>
-            <p:ph type="title"/>
-          </p:nvPr>
-        </p:nvSpPr>
-        <p:spPr>
-          <a:xfrm>
-            <a:off x="468172" y="650138"/>
-            <a:ext cx="8206740" cy="616305"/>
-          </a:xfrm>
-        </p:spPr>
-        <p:txBody>
-          <a:bodyPr wrap="square" lIns="0" rIns="0" tIns="0" bIns="0">
-            <a:noAutofit/>
-          </a:bodyPr>
-          <a:lstStyle/>
-          <a:p>
-            <a:pPr algn="l">
-              <a:lnSpc>
-                <a:spcPct val="110000"/>
-              </a:lnSpc>
-              <a:buNone/>
-              <a:defRPr sz="2800" b="0">
-                <a:solidFill>
-                  <a:srgbClr val="303437"/>
-                </a:solidFill>
-                <a:latin typeface="Noto Sans"/>
-              </a:defRPr>
-            </a:pPr>
-            <a:r>
-              <a:rPr sz="2800" b="1" lang="ja-JP" altLang="en-US">
-                <a:solidFill>
-                  <a:srgbClr val="303437"/>
-                </a:solidFill>
-                <a:latin typeface="Noto Sans"/>
-                <a:ea typeface="Noto Sans CJK JP"/>
-                <a:cs typeface="Noto Sans"/>
-              </a:rPr>
-              <a:t>Level 1の分野別評価対象数</a:t>
-            </a:r>
-          </a:p>
-        </p:txBody>
-      </p:sp>
-      <p:sp>
-        <p:nvSpPr>
-          <p:cNvPr id="3" name="Title 2"/>
-          <p:cNvSpPr>
-            <a:spLocks noGrp="1"/>
-          </p:cNvSpPr>
-          <p:nvPr>
-            <p:ph type="title" idx="2"/>
-          </p:nvPr>
-        </p:nvSpPr>
-        <p:spPr>
-          <a:xfrm>
-            <a:off x="75895" y="0"/>
-            <a:ext cx="8115300" cy="480060"/>
-          </a:xfrm>
-        </p:spPr>
-        <p:txBody>
-          <a:bodyPr wrap="square" lIns="0" rIns="0" tIns="0" bIns="0" anchor="ctr">
-            <a:noAutofit/>
-          </a:bodyPr>
-          <a:lstStyle/>
-          <a:p>
-            <a:pPr algn="l">
-              <a:lnSpc>
-                <a:spcPct val="110000"/>
-              </a:lnSpc>
-              <a:buNone/>
-              <a:defRPr sz="1400" b="0">
-                <a:solidFill>
-                  <a:srgbClr val="303437"/>
-                </a:solidFill>
-                <a:latin typeface="Noto Sans"/>
-              </a:defRPr>
-            </a:pPr>
-            <a:r>
-              <a:rPr sz="1400" b="1" lang="ja-JP" altLang="en-US">
-                <a:solidFill>
-                  <a:srgbClr val="FFFEF8"/>
-                </a:solidFill>
-                <a:latin typeface="Noto Sans"/>
-                <a:ea typeface="Noto Sans CJK JP"/>
-                <a:cs typeface="Noto Sans"/>
-              </a:rPr>
-              <a:t>Appendix: 2. 実行条件と配布の補足</a:t>
-            </a:r>
-          </a:p>
-        </p:txBody>
-      </p:sp>
-      <p:graphicFrame>
-        <p:nvGraphicFramePr>
-          <p:cNvPr id="4" name="Table 3"/>
-          <p:cNvGraphicFramePr>
-            <a:graphicFrameLocks noGrp="1"/>
-          </p:cNvGraphicFramePr>
-          <p:nvPr/>
-        </p:nvGraphicFramePr>
-        <p:xfrm>
-          <a:off x="548640" y="1508760"/>
-          <a:ext cx="8046720" cy="2783840"/>
-        </p:xfrm>
-        <a:graphic>
-          <a:graphicData uri="http://schemas.openxmlformats.org/drawingml/2006/table">
-            <a:tbl>
-              <a:tblPr firstRow="0" bandRow="0"/>
-              <a:tblGrid>
-                <a:gridCol w="5760720"/>
-                <a:gridCol w="2286000"/>
-              </a:tblGrid>
-              <a:tr h="347980">
-                <a:tc>
-                  <a:txBody>
-                    <a:bodyPr wrap="square">
-                      <a:noAutofit/>
-                    </a:bodyPr>
-                    <a:lstStyle/>
-                    <a:p>
-                      <a:pPr algn="l">
-                        <a:lnSpc>
-                          <a:spcPts val="1839"/>
-                        </a:lnSpc>
-                        <a:buNone/>
-                        <a:defRPr sz="1600" b="0">
-                          <a:solidFill>
-                            <a:srgbClr val="303437"/>
-                          </a:solidFill>
-                          <a:latin typeface="Noto Sans"/>
-                        </a:defRPr>
-                      </a:pPr>
-                      <a:r>
-                        <a:rPr sz="1600" b="0" lang="ja-JP" altLang="en-US">
-                          <a:solidFill>
-                            <a:srgbClr val="303437"/>
-                          </a:solidFill>
-                          <a:latin typeface="Noto Sans"/>
-                          <a:ea typeface="Noto Sans CJK JP"/>
-                          <a:cs typeface="Noto Sans"/>
-                        </a:rPr>
-                        <a:t>分野</a:t>
-                      </a:r>
-                    </a:p>
-                  </a:txBody>
-                  <a:tcPr marL="63500" marR="63500" marT="38100" marB="38100" anchor="ctr">
-                    <a:lnL w="7620">
-                      <a:noFill/>
-                    </a:lnL>
-                    <a:lnR w="7620">
-                      <a:noFill/>
-                    </a:lnR>
-                    <a:lnT w="15240">
-                      <a:solidFill>
-                        <a:srgbClr val="626669"/>
-                      </a:solidFill>
-                      <a:prstDash val="solid"/>
-                    </a:lnT>
-                    <a:lnB w="7620">
-                      <a:solidFill>
-                        <a:srgbClr val="626669"/>
-                      </a:solidFill>
-                      <a:prstDash val="solid"/>
-                    </a:lnB>
-                    <a:solidFill>
-                      <a:srgbClr val="FFFEF8"/>
-                    </a:solidFill>
-                  </a:tcPr>
-                </a:tc>
-                <a:tc>
-                  <a:txBody>
-                    <a:bodyPr wrap="square">
-                      <a:noAutofit/>
-                    </a:bodyPr>
-                    <a:lstStyle/>
-                    <a:p>
-                      <a:pPr algn="r">
-                        <a:lnSpc>
-                          <a:spcPts val="1839"/>
-                        </a:lnSpc>
-                        <a:buNone/>
-                        <a:defRPr sz="1600" b="0">
-                          <a:solidFill>
-                            <a:srgbClr val="303437"/>
-                          </a:solidFill>
-                          <a:latin typeface="Noto Sans"/>
-                        </a:defRPr>
-                      </a:pPr>
-                      <a:r>
-                        <a:rPr sz="1600" b="0" lang="ja-JP" altLang="en-US">
-                          <a:solidFill>
-                            <a:srgbClr val="303437"/>
-                          </a:solidFill>
-                          <a:latin typeface="Noto Sans"/>
-                          <a:ea typeface="Noto Sans CJK JP"/>
-                          <a:cs typeface="Noto Sans"/>
-                        </a:rPr>
-                        <a:t>問題数</a:t>
-                      </a:r>
-                    </a:p>
-                  </a:txBody>
-                  <a:tcPr marL="63500" marR="63500" marT="38100" marB="38100" anchor="ctr">
-                    <a:lnL w="7620">
-                      <a:noFill/>
-                    </a:lnL>
-                    <a:lnR w="7620">
-                      <a:noFill/>
-                    </a:lnR>
-                    <a:lnT w="15240">
-                      <a:solidFill>
-                        <a:srgbClr val="626669"/>
-                      </a:solidFill>
-                      <a:prstDash val="solid"/>
-                    </a:lnT>
-                    <a:lnB w="7620">
-                      <a:solidFill>
-                        <a:srgbClr val="626669"/>
-                      </a:solidFill>
-                      <a:prstDash val="solid"/>
-                    </a:lnB>
-                    <a:solidFill>
-                      <a:srgbClr val="FFFEF8"/>
-                    </a:solidFill>
-                  </a:tcPr>
-                </a:tc>
-              </a:tr>
-              <a:tr h="347980">
-                <a:tc>
-                  <a:txBody>
-                    <a:bodyPr wrap="square">
-                      <a:noAutofit/>
-                    </a:bodyPr>
-                    <a:lstStyle/>
-                    <a:p>
-                      <a:pPr algn="l">
-                        <a:lnSpc>
-                          <a:spcPts val="1839"/>
-                        </a:lnSpc>
-                        <a:buNone/>
-                        <a:defRPr sz="1600" b="0">
-                          <a:solidFill>
-                            <a:srgbClr val="303437"/>
-                          </a:solidFill>
-                          <a:latin typeface="Noto Sans"/>
-                        </a:defRPr>
-                      </a:pPr>
-                      <a:r>
-                        <a:rPr sz="1600" b="0" lang="ja-JP" altLang="en-US">
-                          <a:solidFill>
-                            <a:srgbClr val="303437"/>
-                          </a:solidFill>
-                          <a:latin typeface="Noto Sans"/>
-                          <a:ea typeface="Noto Sans CJK JP"/>
-                          <a:cs typeface="Noto Sans"/>
-                        </a:rPr>
-                        <a:t>代数</a:t>
-                      </a:r>
-                    </a:p>
-                  </a:txBody>
-                  <a:tcPr marL="63500" marR="63500" marT="38100" marB="38100" anchor="ctr">
-                    <a:lnL w="7620">
-                      <a:noFill/>
-                    </a:lnL>
-                    <a:lnR w="7620">
-                      <a:noFill/>
-                    </a:lnR>
-                    <a:lnT w="7620">
-                      <a:solidFill>
-                        <a:srgbClr val="626669"/>
-                      </a:solidFill>
-                      <a:prstDash val="solid"/>
-                    </a:lnT>
-                    <a:lnB w="7620">
-                      <a:noFill/>
-                    </a:lnB>
-                    <a:solidFill>
-                      <a:srgbClr val="FFFEF8"/>
-                    </a:solidFill>
-                  </a:tcPr>
-                </a:tc>
-                <a:tc>
-                  <a:txBody>
-                    <a:bodyPr wrap="square">
-                      <a:noAutofit/>
-                    </a:bodyPr>
-                    <a:lstStyle/>
-                    <a:p>
-                      <a:pPr algn="r">
-                        <a:lnSpc>
-                          <a:spcPts val="1839"/>
-                        </a:lnSpc>
-                        <a:buNone/>
-                        <a:defRPr sz="1600" b="0">
-                          <a:solidFill>
-                            <a:srgbClr val="303437"/>
-                          </a:solidFill>
-                          <a:latin typeface="Noto Sans"/>
-                        </a:defRPr>
-                      </a:pPr>
-                      <a:r>
-                        <a:rPr sz="1600" b="0" lang="ja-JP" altLang="en-US">
-                          <a:solidFill>
-                            <a:srgbClr val="303437"/>
-                          </a:solidFill>
-                          <a:latin typeface="Noto Sans"/>
-                          <a:ea typeface="Noto Sans CJK JP"/>
-                          <a:cs typeface="Noto Sans"/>
-                        </a:rPr>
-                        <a:t>135</a:t>
-                      </a:r>
-                    </a:p>
-                  </a:txBody>
-                  <a:tcPr marL="63500" marR="63500" marT="38100" marB="38100" anchor="ctr">
-                    <a:lnL w="7620">
-                      <a:noFill/>
-                    </a:lnL>
-                    <a:lnR w="7620">
-                      <a:noFill/>
-                    </a:lnR>
-                    <a:lnT w="7620">
-                      <a:solidFill>
-                        <a:srgbClr val="626669"/>
-                      </a:solidFill>
-                      <a:prstDash val="solid"/>
-                    </a:lnT>
-                    <a:lnB w="7620">
-                      <a:noFill/>
-                    </a:lnB>
-                    <a:solidFill>
-                      <a:srgbClr val="FFFEF8"/>
-                    </a:solidFill>
-                  </a:tcPr>
-                </a:tc>
-              </a:tr>
-              <a:tr h="347980">
-                <a:tc>
-                  <a:txBody>
-                    <a:bodyPr wrap="square">
-                      <a:noAutofit/>
-                    </a:bodyPr>
-                    <a:lstStyle/>
-                    <a:p>
-                      <a:pPr algn="l">
-                        <a:lnSpc>
-                          <a:spcPts val="1839"/>
-                        </a:lnSpc>
-                        <a:buNone/>
-                        <a:defRPr sz="1600" b="0">
-                          <a:solidFill>
-                            <a:srgbClr val="303437"/>
-                          </a:solidFill>
-                          <a:latin typeface="Noto Sans"/>
-                        </a:defRPr>
-                      </a:pPr>
-                      <a:r>
-                        <a:rPr sz="1600" b="0" lang="ja-JP" altLang="en-US">
-                          <a:solidFill>
-                            <a:srgbClr val="303437"/>
-                          </a:solidFill>
-                          <a:latin typeface="Noto Sans"/>
-                          <a:ea typeface="Noto Sans CJK JP"/>
-                          <a:cs typeface="Noto Sans"/>
-                        </a:rPr>
-                        <a:t>場合の数・確率</a:t>
-                      </a:r>
-                    </a:p>
-                  </a:txBody>
-                  <a:tcPr marL="63500" marR="63500" marT="38100" marB="38100" anchor="ctr">
-                    <a:lnL w="7620">
-                      <a:noFill/>
-                    </a:lnL>
-                    <a:lnR w="7620">
-                      <a:noFill/>
-                    </a:lnR>
-                    <a:lnT w="7620">
-                      <a:noFill/>
-                    </a:lnT>
-                    <a:lnB w="7620">
-                      <a:noFill/>
-                    </a:lnB>
-                    <a:solidFill>
-                      <a:srgbClr val="FFFEF8"/>
-                    </a:solidFill>
-                  </a:tcPr>
-                </a:tc>
-                <a:tc>
-                  <a:txBody>
-                    <a:bodyPr wrap="square">
-                      <a:noAutofit/>
-                    </a:bodyPr>
-                    <a:lstStyle/>
-                    <a:p>
-                      <a:pPr algn="r">
-                        <a:lnSpc>
-                          <a:spcPts val="1839"/>
-                        </a:lnSpc>
-                        <a:buNone/>
-                        <a:defRPr sz="1600" b="0">
-                          <a:solidFill>
-                            <a:srgbClr val="303437"/>
-                          </a:solidFill>
-                          <a:latin typeface="Noto Sans"/>
-                        </a:defRPr>
-                      </a:pPr>
-                      <a:r>
-                        <a:rPr sz="1600" b="0" lang="ja-JP" altLang="en-US">
-                          <a:solidFill>
-                            <a:srgbClr val="303437"/>
-                          </a:solidFill>
-                          <a:latin typeface="Noto Sans"/>
-                          <a:ea typeface="Noto Sans CJK JP"/>
-                          <a:cs typeface="Noto Sans"/>
-                        </a:rPr>
-                        <a:t>39</a:t>
-                      </a:r>
-                    </a:p>
-                  </a:txBody>
-                  <a:tcPr marL="63500" marR="63500" marT="38100" marB="38100" anchor="ctr">
-                    <a:lnL w="7620">
-                      <a:noFill/>
-                    </a:lnL>
-                    <a:lnR w="7620">
-                      <a:noFill/>
-                    </a:lnR>
-                    <a:lnT w="7620">
-                      <a:noFill/>
-                    </a:lnT>
-                    <a:lnB w="7620">
-                      <a:noFill/>
-                    </a:lnB>
-                    <a:solidFill>
-                      <a:srgbClr val="FFFEF8"/>
-                    </a:solidFill>
-                  </a:tcPr>
-                </a:tc>
-              </a:tr>
-              <a:tr h="347980">
-                <a:tc>
-                  <a:txBody>
-                    <a:bodyPr wrap="square">
-                      <a:noAutofit/>
-                    </a:bodyPr>
-                    <a:lstStyle/>
-                    <a:p>
-                      <a:pPr algn="l">
-                        <a:lnSpc>
-                          <a:spcPts val="1839"/>
-                        </a:lnSpc>
-                        <a:buNone/>
-                        <a:defRPr sz="1600" b="0">
-                          <a:solidFill>
-                            <a:srgbClr val="303437"/>
-                          </a:solidFill>
-                          <a:latin typeface="Noto Sans"/>
-                        </a:defRPr>
-                      </a:pPr>
-                      <a:r>
-                        <a:rPr sz="1600" b="0" lang="ja-JP" altLang="en-US">
-                          <a:solidFill>
-                            <a:srgbClr val="303437"/>
-                          </a:solidFill>
-                          <a:latin typeface="Noto Sans"/>
-                          <a:ea typeface="Noto Sans CJK JP"/>
-                          <a:cs typeface="Noto Sans"/>
-                        </a:rPr>
-                        <a:t>幾何</a:t>
-                      </a:r>
-                    </a:p>
-                  </a:txBody>
-                  <a:tcPr marL="63500" marR="63500" marT="38100" marB="38100" anchor="ctr">
-                    <a:lnL w="7620">
-                      <a:noFill/>
-                    </a:lnL>
-                    <a:lnR w="7620">
-                      <a:noFill/>
-                    </a:lnR>
-                    <a:lnT w="7620">
-                      <a:noFill/>
-                    </a:lnT>
-                    <a:lnB w="7620">
-                      <a:noFill/>
-                    </a:lnB>
-                    <a:solidFill>
-                      <a:srgbClr val="FFFEF8"/>
-                    </a:solidFill>
-                  </a:tcPr>
-                </a:tc>
-                <a:tc>
-                  <a:txBody>
-                    <a:bodyPr wrap="square">
-                      <a:noAutofit/>
-                    </a:bodyPr>
-                    <a:lstStyle/>
-                    <a:p>
-                      <a:pPr algn="r">
-                        <a:lnSpc>
-                          <a:spcPts val="1839"/>
-                        </a:lnSpc>
-                        <a:buNone/>
-                        <a:defRPr sz="1600" b="0">
-                          <a:solidFill>
-                            <a:srgbClr val="303437"/>
-                          </a:solidFill>
-                          <a:latin typeface="Noto Sans"/>
-                        </a:defRPr>
-                      </a:pPr>
-                      <a:r>
-                        <a:rPr sz="1600" b="0" lang="ja-JP" altLang="en-US">
-                          <a:solidFill>
-                            <a:srgbClr val="303437"/>
-                          </a:solidFill>
-                          <a:latin typeface="Noto Sans"/>
-                          <a:ea typeface="Noto Sans CJK JP"/>
-                          <a:cs typeface="Noto Sans"/>
-                        </a:rPr>
-                        <a:t>38</a:t>
-                      </a:r>
-                    </a:p>
-                  </a:txBody>
-                  <a:tcPr marL="63500" marR="63500" marT="38100" marB="38100" anchor="ctr">
-                    <a:lnL w="7620">
-                      <a:noFill/>
-                    </a:lnL>
-                    <a:lnR w="7620">
-                      <a:noFill/>
-                    </a:lnR>
-                    <a:lnT w="7620">
-                      <a:noFill/>
-                    </a:lnT>
-                    <a:lnB w="7620">
-                      <a:noFill/>
-                    </a:lnB>
-                    <a:solidFill>
-                      <a:srgbClr val="FFFEF8"/>
-                    </a:solidFill>
-                  </a:tcPr>
-                </a:tc>
-              </a:tr>
-              <a:tr h="347980">
-                <a:tc>
-                  <a:txBody>
-                    <a:bodyPr wrap="square">
-                      <a:noAutofit/>
-                    </a:bodyPr>
-                    <a:lstStyle/>
-                    <a:p>
-                      <a:pPr algn="l">
-                        <a:lnSpc>
-                          <a:spcPts val="1839"/>
-                        </a:lnSpc>
-                        <a:buNone/>
-                        <a:defRPr sz="1600" b="0">
-                          <a:solidFill>
-                            <a:srgbClr val="303437"/>
-                          </a:solidFill>
-                          <a:latin typeface="Noto Sans"/>
-                        </a:defRPr>
-                      </a:pPr>
-                      <a:r>
-                        <a:rPr sz="1600" b="0" lang="ja-JP" altLang="en-US">
-                          <a:solidFill>
-                            <a:srgbClr val="303437"/>
-                          </a:solidFill>
-                          <a:latin typeface="Noto Sans"/>
-                          <a:ea typeface="Noto Sans CJK JP"/>
-                          <a:cs typeface="Noto Sans"/>
-                        </a:rPr>
-                        <a:t>中級代数</a:t>
-                      </a:r>
-                    </a:p>
-                  </a:txBody>
-                  <a:tcPr marL="63500" marR="63500" marT="38100" marB="38100" anchor="ctr">
-                    <a:lnL w="7620">
-                      <a:noFill/>
-                    </a:lnL>
-                    <a:lnR w="7620">
-                      <a:noFill/>
-                    </a:lnR>
-                    <a:lnT w="7620">
-                      <a:noFill/>
-                    </a:lnT>
-                    <a:lnB w="7620">
-                      <a:noFill/>
-                    </a:lnB>
-                    <a:solidFill>
-                      <a:srgbClr val="FFFEF8"/>
-                    </a:solidFill>
-                  </a:tcPr>
-                </a:tc>
-                <a:tc>
-                  <a:txBody>
-                    <a:bodyPr wrap="square">
-                      <a:noAutofit/>
-                    </a:bodyPr>
-                    <a:lstStyle/>
-                    <a:p>
-                      <a:pPr algn="r">
-                        <a:lnSpc>
-                          <a:spcPts val="1839"/>
-                        </a:lnSpc>
-                        <a:buNone/>
-                        <a:defRPr sz="1600" b="0">
-                          <a:solidFill>
-                            <a:srgbClr val="303437"/>
-                          </a:solidFill>
-                          <a:latin typeface="Noto Sans"/>
-                        </a:defRPr>
-                      </a:pPr>
-                      <a:r>
-                        <a:rPr sz="1600" b="0" lang="ja-JP" altLang="en-US">
-                          <a:solidFill>
-                            <a:srgbClr val="303437"/>
-                          </a:solidFill>
-                          <a:latin typeface="Noto Sans"/>
-                          <a:ea typeface="Noto Sans CJK JP"/>
-                          <a:cs typeface="Noto Sans"/>
-                        </a:rPr>
-                        <a:t>52</a:t>
-                      </a:r>
-                    </a:p>
-                  </a:txBody>
-                  <a:tcPr marL="63500" marR="63500" marT="38100" marB="38100" anchor="ctr">
-                    <a:lnL w="7620">
-                      <a:noFill/>
-                    </a:lnL>
-                    <a:lnR w="7620">
-                      <a:noFill/>
-                    </a:lnR>
-                    <a:lnT w="7620">
-                      <a:noFill/>
-                    </a:lnT>
-                    <a:lnB w="7620">
-                      <a:noFill/>
-                    </a:lnB>
-                    <a:solidFill>
-                      <a:srgbClr val="FFFEF8"/>
-                    </a:solidFill>
-                  </a:tcPr>
-                </a:tc>
-              </a:tr>
-              <a:tr h="347980">
-                <a:tc>
-                  <a:txBody>
-                    <a:bodyPr wrap="square">
-                      <a:noAutofit/>
-                    </a:bodyPr>
-                    <a:lstStyle/>
-                    <a:p>
-                      <a:pPr algn="l">
-                        <a:lnSpc>
-                          <a:spcPts val="1839"/>
-                        </a:lnSpc>
-                        <a:buNone/>
-                        <a:defRPr sz="1600" b="0">
-                          <a:solidFill>
-                            <a:srgbClr val="303437"/>
-                          </a:solidFill>
-                          <a:latin typeface="Noto Sans"/>
-                        </a:defRPr>
-                      </a:pPr>
-                      <a:r>
-                        <a:rPr sz="1600" b="0" lang="ja-JP" altLang="en-US">
-                          <a:solidFill>
-                            <a:srgbClr val="303437"/>
-                          </a:solidFill>
-                          <a:latin typeface="Noto Sans"/>
-                          <a:ea typeface="Noto Sans CJK JP"/>
-                          <a:cs typeface="Noto Sans"/>
-                        </a:rPr>
-                        <a:t>整数論</a:t>
-                      </a:r>
-                    </a:p>
-                  </a:txBody>
-                  <a:tcPr marL="63500" marR="63500" marT="38100" marB="38100" anchor="ctr">
-                    <a:lnL w="7620">
-                      <a:noFill/>
-                    </a:lnL>
-                    <a:lnR w="7620">
-                      <a:noFill/>
-                    </a:lnR>
-                    <a:lnT w="7620">
-                      <a:noFill/>
-                    </a:lnT>
-                    <a:lnB w="7620">
-                      <a:noFill/>
-                    </a:lnB>
-                    <a:solidFill>
-                      <a:srgbClr val="FFFEF8"/>
-                    </a:solidFill>
-                  </a:tcPr>
-                </a:tc>
-                <a:tc>
-                  <a:txBody>
-                    <a:bodyPr wrap="square">
-                      <a:noAutofit/>
-                    </a:bodyPr>
-                    <a:lstStyle/>
-                    <a:p>
-                      <a:pPr algn="r">
-                        <a:lnSpc>
-                          <a:spcPts val="1839"/>
-                        </a:lnSpc>
-                        <a:buNone/>
-                        <a:defRPr sz="1600" b="0">
-                          <a:solidFill>
-                            <a:srgbClr val="303437"/>
-                          </a:solidFill>
-                          <a:latin typeface="Noto Sans"/>
-                        </a:defRPr>
-                      </a:pPr>
-                      <a:r>
-                        <a:rPr sz="1600" b="0" lang="ja-JP" altLang="en-US">
-                          <a:solidFill>
-                            <a:srgbClr val="303437"/>
-                          </a:solidFill>
-                          <a:latin typeface="Noto Sans"/>
-                          <a:ea typeface="Noto Sans CJK JP"/>
-                          <a:cs typeface="Noto Sans"/>
-                        </a:rPr>
-                        <a:t>30</a:t>
-                      </a:r>
-                    </a:p>
-                  </a:txBody>
-                  <a:tcPr marL="63500" marR="63500" marT="38100" marB="38100" anchor="ctr">
-                    <a:lnL w="7620">
-                      <a:noFill/>
-                    </a:lnL>
-                    <a:lnR w="7620">
-                      <a:noFill/>
-                    </a:lnR>
-                    <a:lnT w="7620">
-                      <a:noFill/>
-                    </a:lnT>
-                    <a:lnB w="7620">
-                      <a:noFill/>
-                    </a:lnB>
-                    <a:solidFill>
-                      <a:srgbClr val="FFFEF8"/>
-                    </a:solidFill>
-                  </a:tcPr>
-                </a:tc>
-              </a:tr>
-              <a:tr h="347980">
-                <a:tc>
-                  <a:txBody>
-                    <a:bodyPr wrap="square">
-                      <a:noAutofit/>
-                    </a:bodyPr>
-                    <a:lstStyle/>
-                    <a:p>
-                      <a:pPr algn="l">
-                        <a:lnSpc>
-                          <a:spcPts val="1839"/>
-                        </a:lnSpc>
-                        <a:buNone/>
-                        <a:defRPr sz="1600" b="0">
-                          <a:solidFill>
-                            <a:srgbClr val="303437"/>
-                          </a:solidFill>
-                          <a:latin typeface="Noto Sans"/>
-                        </a:defRPr>
-                      </a:pPr>
-                      <a:r>
-                        <a:rPr sz="1600" b="0" lang="ja-JP" altLang="en-US">
-                          <a:solidFill>
-                            <a:srgbClr val="303437"/>
-                          </a:solidFill>
-                          <a:latin typeface="Noto Sans"/>
-                          <a:ea typeface="Noto Sans CJK JP"/>
-                          <a:cs typeface="Noto Sans"/>
-                        </a:rPr>
-                        <a:t>初等代数</a:t>
-                      </a:r>
-                    </a:p>
-                  </a:txBody>
-                  <a:tcPr marL="63500" marR="63500" marT="38100" marB="38100" anchor="ctr">
-                    <a:lnL w="7620">
-                      <a:noFill/>
-                    </a:lnL>
-                    <a:lnR w="7620">
-                      <a:noFill/>
-                    </a:lnR>
-                    <a:lnT w="7620">
-                      <a:noFill/>
-                    </a:lnT>
-                    <a:lnB w="7620">
-                      <a:noFill/>
-                    </a:lnB>
-                    <a:solidFill>
-                      <a:srgbClr val="FFFEF8"/>
-                    </a:solidFill>
-                  </a:tcPr>
-                </a:tc>
-                <a:tc>
-                  <a:txBody>
-                    <a:bodyPr wrap="square">
-                      <a:noAutofit/>
-                    </a:bodyPr>
-                    <a:lstStyle/>
-                    <a:p>
-                      <a:pPr algn="r">
-                        <a:lnSpc>
-                          <a:spcPts val="1839"/>
-                        </a:lnSpc>
-                        <a:buNone/>
-                        <a:defRPr sz="1600" b="0">
-                          <a:solidFill>
-                            <a:srgbClr val="303437"/>
-                          </a:solidFill>
-                          <a:latin typeface="Noto Sans"/>
-                        </a:defRPr>
-                      </a:pPr>
-                      <a:r>
-                        <a:rPr sz="1600" b="0" lang="ja-JP" altLang="en-US">
-                          <a:solidFill>
-                            <a:srgbClr val="303437"/>
-                          </a:solidFill>
-                          <a:latin typeface="Noto Sans"/>
-                          <a:ea typeface="Noto Sans CJK JP"/>
-                          <a:cs typeface="Noto Sans"/>
-                        </a:rPr>
-                        <a:t>86</a:t>
-                      </a:r>
-                    </a:p>
-                  </a:txBody>
-                  <a:tcPr marL="63500" marR="63500" marT="38100" marB="38100" anchor="ctr">
-                    <a:lnL w="7620">
-                      <a:noFill/>
-                    </a:lnL>
-                    <a:lnR w="7620">
-                      <a:noFill/>
-                    </a:lnR>
-                    <a:lnT w="7620">
-                      <a:noFill/>
-                    </a:lnT>
-                    <a:lnB w="7620">
-                      <a:noFill/>
-                    </a:lnB>
-                    <a:solidFill>
-                      <a:srgbClr val="FFFEF8"/>
-                    </a:solidFill>
-                  </a:tcPr>
-                </a:tc>
-              </a:tr>
-              <a:tr h="347980">
-                <a:tc>
-                  <a:txBody>
-                    <a:bodyPr wrap="square">
-                      <a:noAutofit/>
-                    </a:bodyPr>
-                    <a:lstStyle/>
-                    <a:p>
-                      <a:pPr algn="l">
-                        <a:lnSpc>
-                          <a:spcPts val="1839"/>
-                        </a:lnSpc>
-                        <a:buNone/>
-                        <a:defRPr sz="1600" b="0">
-                          <a:solidFill>
-                            <a:srgbClr val="303437"/>
-                          </a:solidFill>
-                          <a:latin typeface="Noto Sans"/>
-                        </a:defRPr>
-                      </a:pPr>
-                      <a:r>
-                        <a:rPr sz="1600" b="0" lang="ja-JP" altLang="en-US">
-                          <a:solidFill>
-                            <a:srgbClr val="303437"/>
-                          </a:solidFill>
-                          <a:latin typeface="Noto Sans"/>
-                          <a:ea typeface="Noto Sans CJK JP"/>
-                          <a:cs typeface="Noto Sans"/>
-                        </a:rPr>
-                        <a:t>解析の基礎</a:t>
-                      </a:r>
-                    </a:p>
-                  </a:txBody>
-                  <a:tcPr marL="63500" marR="63500" marT="38100" marB="38100" anchor="ctr">
-                    <a:lnL w="7620">
-                      <a:noFill/>
-                    </a:lnL>
-                    <a:lnR w="7620">
-                      <a:noFill/>
-                    </a:lnR>
-                    <a:lnT w="7620">
-                      <a:noFill/>
-                    </a:lnT>
-                    <a:lnB w="15240">
-                      <a:solidFill>
-                        <a:srgbClr val="626669"/>
-                      </a:solidFill>
-                      <a:prstDash val="solid"/>
-                    </a:lnB>
-                    <a:solidFill>
-                      <a:srgbClr val="FFFEF8"/>
-                    </a:solidFill>
-                  </a:tcPr>
-                </a:tc>
-                <a:tc>
-                  <a:txBody>
-                    <a:bodyPr wrap="square">
-                      <a:noAutofit/>
-                    </a:bodyPr>
-                    <a:lstStyle/>
-                    <a:p>
-                      <a:pPr algn="r">
-                        <a:lnSpc>
-                          <a:spcPts val="1839"/>
-                        </a:lnSpc>
-                        <a:buNone/>
-                        <a:defRPr sz="1600" b="0">
-                          <a:solidFill>
-                            <a:srgbClr val="303437"/>
-                          </a:solidFill>
-                          <a:latin typeface="Noto Sans"/>
-                        </a:defRPr>
-                      </a:pPr>
-                      <a:r>
-                        <a:rPr sz="1600" b="0" lang="ja-JP" altLang="en-US">
-                          <a:solidFill>
-                            <a:srgbClr val="303437"/>
-                          </a:solidFill>
-                          <a:latin typeface="Noto Sans"/>
-                          <a:ea typeface="Noto Sans CJK JP"/>
-                          <a:cs typeface="Noto Sans"/>
-                        </a:rPr>
-                        <a:t>57</a:t>
-                      </a:r>
-                    </a:p>
-                  </a:txBody>
-                  <a:tcPr marL="63500" marR="63500" marT="38100" marB="38100" anchor="ctr">
-                    <a:lnL w="7620">
-                      <a:noFill/>
-                    </a:lnL>
-                    <a:lnR w="7620">
-                      <a:noFill/>
-                    </a:lnR>
-                    <a:lnT w="7620">
-                      <a:noFill/>
-                    </a:lnT>
-                    <a:lnB w="15240">
-                      <a:solidFill>
-                        <a:srgbClr val="626669"/>
-                      </a:solidFill>
-                      <a:prstDash val="solid"/>
-                    </a:lnB>
-                    <a:solidFill>
-                      <a:srgbClr val="FFFEF8"/>
-                    </a:solidFill>
-                  </a:tcPr>
-                </a:tc>
-              </a:tr>
-            </a:tbl>
-          </a:graphicData>
-        </a:graphic>
-      </p:graphicFrame>
-      <p:sp>
-        <p:nvSpPr>
-          <p:cNvPr id="5" name="sources"/>
-          <p:cNvSpPr txBox="1"/>
-          <p:nvPr/>
-        </p:nvSpPr>
-        <p:spPr>
-          <a:xfrm>
-            <a:off x="502920" y="4700016"/>
-            <a:ext cx="8183879" cy="530352"/>
-          </a:xfrm>
-          <a:prstGeom prst="rect">
-            <a:avLst/>
-          </a:prstGeom>
-          <a:noFill/>
-        </p:spPr>
-        <p:txBody>
-          <a:bodyPr wrap="square" lIns="0" rIns="0" tIns="0" bIns="0">
-            <a:noAutofit/>
-          </a:bodyPr>
-          <a:lstStyle/>
-          <a:p>
-            <a:pPr algn="l">
-              <a:lnSpc>
-                <a:spcPts val="940"/>
-              </a:lnSpc>
-              <a:spcBef>
-                <a:spcPts val="0"/>
-              </a:spcBef>
-              <a:spcAft>
-                <a:spcPts val="140"/>
-              </a:spcAft>
-              <a:buNone/>
-              <a:defRPr sz="810" b="0">
-                <a:solidFill>
-                  <a:srgbClr val="303437"/>
-                </a:solidFill>
-                <a:latin typeface="Noto Sans"/>
-              </a:defRPr>
-            </a:pPr>
-            <a:r>
-              <a:rPr sz="810" b="0" lang="ja-JP" altLang="en-US">
-                <a:solidFill>
-                  <a:srgbClr val="626669"/>
-                </a:solidFill>
-                <a:latin typeface="Noto Sans"/>
-                <a:ea typeface="Noto Sans CJK JP"/>
-                <a:cs typeface="Noto Sans"/>
-              </a:rPr>
-              <a:t>[1] HELM Classic v0.4.0. MATH、Level 1の固定評価。2023-11-17公開版。</a:t>
-            </a:r>
-            <a:r>
-              <a:rPr sz="810" b="0" lang="ja-JP" altLang="en-US">
-                <a:solidFill>
-                  <a:srgbClr val="626669"/>
-                </a:solidFill>
-                <a:latin typeface="Noto Sans"/>
-                <a:ea typeface="Noto Sans CJK JP"/>
-                <a:cs typeface="Noto Sans"/>
-              </a:rPr>
-              <a:t>  </a:t>
-            </a:r>
-            <a:r>
-              <a:rPr sz="810" b="0" lang="ja-JP" altLang="en-US">
-                <a:solidFill>
-                  <a:srgbClr val="626669"/>
-                </a:solidFill>
-                <a:latin typeface="Noto Sans"/>
-                <a:ea typeface="Noto Sans CJK JP"/>
-                <a:cs typeface="Noto Sans"/>
-                <a:hlinkClick r:id="rId2"/>
-              </a:rPr>
-              <a:t>https://crfm.stanford.edu/helm/classic/v0.4.0/#/groups/math_regular</a:t>
-            </a:r>
-          </a:p>
-        </p:txBody>
-      </p:sp>
-    </p:spTree>
-  </p:cSld>
-  <p:clrMapOvr>
-    <a:masterClrMapping/>
-  </p:clrMapOvr>
-</p:sld>
-</file>
-
-<file path=ppt/slides/slide47.xml><?xml version="1.0" encoding="utf-8"?>
-<p:sld xmlns:a="http://schemas.openxmlformats.org/drawingml/2006/main" xmlns:p="http://schemas.openxmlformats.org/presentationml/2006/main" xmlns:r="http://schemas.openxmlformats.org/officeDocument/2006/relationships">
-  <p:cSld>
-    <p:spTree>
-      <p:nvGrpSpPr>
-        <p:cNvPr id="1" name=""/>
-        <p:cNvGrpSpPr/>
-        <p:nvPr/>
-      </p:nvGrpSpPr>
-      <p:grpSpPr/>
-      <p:sp>
-        <p:nvSpPr>
-          <p:cNvPr id="2" name="Title 1"/>
-          <p:cNvSpPr>
-            <a:spLocks noGrp="1"/>
-          </p:cNvSpPr>
-          <p:nvPr>
-            <p:ph type="title"/>
-          </p:nvPr>
-        </p:nvSpPr>
-        <p:spPr>
-          <a:xfrm>
-            <a:off x="468172" y="650138"/>
-            <a:ext cx="8206740" cy="616305"/>
-          </a:xfrm>
-        </p:spPr>
-        <p:txBody>
-          <a:bodyPr wrap="square" lIns="0" rIns="0" tIns="0" bIns="0">
-            <a:noAutofit/>
-          </a:bodyPr>
-          <a:lstStyle/>
-          <a:p>
-            <a:pPr algn="l">
-              <a:lnSpc>
-                <a:spcPct val="110000"/>
-              </a:lnSpc>
-              <a:buNone/>
-              <a:defRPr sz="2800" b="0">
-                <a:solidFill>
-                  <a:srgbClr val="303437"/>
-                </a:solidFill>
-                <a:latin typeface="Noto Sans"/>
-              </a:defRPr>
-            </a:pPr>
-            <a:r>
-              <a:rPr sz="2800" b="1" lang="ja-JP" altLang="en-US">
-                <a:solidFill>
-                  <a:srgbClr val="303437"/>
-                </a:solidFill>
-                <a:latin typeface="Noto Sans"/>
-                <a:ea typeface="Noto Sans CJK JP"/>
-                <a:cs typeface="Noto Sans"/>
-              </a:rPr>
-              <a:t>text-davinci-003の分野別正解率</a:t>
-            </a:r>
-          </a:p>
-        </p:txBody>
-      </p:sp>
-      <p:sp>
-        <p:nvSpPr>
-          <p:cNvPr id="3" name="Title 2"/>
-          <p:cNvSpPr>
-            <a:spLocks noGrp="1"/>
-          </p:cNvSpPr>
-          <p:nvPr>
-            <p:ph type="title" idx="2"/>
-          </p:nvPr>
-        </p:nvSpPr>
-        <p:spPr>
-          <a:xfrm>
-            <a:off x="75895" y="0"/>
-            <a:ext cx="8115300" cy="480060"/>
-          </a:xfrm>
-        </p:spPr>
-        <p:txBody>
-          <a:bodyPr wrap="square" lIns="0" rIns="0" tIns="0" bIns="0" anchor="ctr">
-            <a:noAutofit/>
-          </a:bodyPr>
-          <a:lstStyle/>
-          <a:p>
-            <a:pPr algn="l">
-              <a:lnSpc>
-                <a:spcPct val="110000"/>
-              </a:lnSpc>
-              <a:buNone/>
-              <a:defRPr sz="1400" b="0">
-                <a:solidFill>
-                  <a:srgbClr val="303437"/>
-                </a:solidFill>
-                <a:latin typeface="Noto Sans"/>
-              </a:defRPr>
-            </a:pPr>
-            <a:r>
-              <a:rPr sz="1400" b="1" lang="ja-JP" altLang="en-US">
-                <a:solidFill>
-                  <a:srgbClr val="FFFEF8"/>
-                </a:solidFill>
-                <a:latin typeface="Noto Sans"/>
-                <a:ea typeface="Noto Sans CJK JP"/>
-                <a:cs typeface="Noto Sans"/>
-              </a:rPr>
-              <a:t>Appendix: 2. 実行条件と配布の補足</a:t>
-            </a:r>
-          </a:p>
-        </p:txBody>
-      </p:sp>
-      <p:graphicFrame>
-        <p:nvGraphicFramePr>
-          <p:cNvPr id="4" name="Table 3"/>
-          <p:cNvGraphicFramePr>
-            <a:graphicFrameLocks noGrp="1"/>
-          </p:cNvGraphicFramePr>
-          <p:nvPr/>
-        </p:nvGraphicFramePr>
-        <p:xfrm>
-          <a:off x="548640" y="1508760"/>
-          <a:ext cx="8046720" cy="2783840"/>
-        </p:xfrm>
-        <a:graphic>
-          <a:graphicData uri="http://schemas.openxmlformats.org/drawingml/2006/table">
-            <a:tbl>
-              <a:tblPr firstRow="0" bandRow="0"/>
-              <a:tblGrid>
-                <a:gridCol w="4206240"/>
-                <a:gridCol w="1920240"/>
-                <a:gridCol w="1920240"/>
-              </a:tblGrid>
-              <a:tr h="347980">
-                <a:tc>
-                  <a:txBody>
-                    <a:bodyPr wrap="square">
-                      <a:noAutofit/>
-                    </a:bodyPr>
-                    <a:lstStyle/>
-                    <a:p>
-                      <a:pPr algn="l">
-                        <a:lnSpc>
-                          <a:spcPts val="1839"/>
-                        </a:lnSpc>
-                        <a:buNone/>
-                        <a:defRPr sz="1600" b="0">
-                          <a:solidFill>
-                            <a:srgbClr val="303437"/>
-                          </a:solidFill>
-                          <a:latin typeface="Noto Sans"/>
-                        </a:defRPr>
-                      </a:pPr>
-                      <a:r>
-                        <a:rPr sz="1600" b="0" lang="ja-JP" altLang="en-US">
-                          <a:solidFill>
-                            <a:srgbClr val="303437"/>
-                          </a:solidFill>
-                          <a:latin typeface="Noto Sans"/>
-                          <a:ea typeface="Noto Sans CJK JP"/>
-                          <a:cs typeface="Noto Sans"/>
-                        </a:rPr>
-                        <a:t>分野</a:t>
-                      </a:r>
-                    </a:p>
-                  </a:txBody>
-                  <a:tcPr marL="63500" marR="63500" marT="38100" marB="38100" anchor="ctr">
-                    <a:lnL w="7620">
-                      <a:noFill/>
-                    </a:lnL>
-                    <a:lnR w="7620">
-                      <a:noFill/>
-                    </a:lnR>
-                    <a:lnT w="15240">
-                      <a:solidFill>
-                        <a:srgbClr val="626669"/>
-                      </a:solidFill>
-                      <a:prstDash val="solid"/>
-                    </a:lnT>
-                    <a:lnB w="7620">
-                      <a:solidFill>
-                        <a:srgbClr val="626669"/>
-                      </a:solidFill>
-                      <a:prstDash val="solid"/>
-                    </a:lnB>
-                    <a:solidFill>
-                      <a:srgbClr val="FFFEF8"/>
-                    </a:solidFill>
-                  </a:tcPr>
-                </a:tc>
-                <a:tc>
-                  <a:txBody>
-                    <a:bodyPr wrap="square">
-                      <a:noAutofit/>
-                    </a:bodyPr>
-                    <a:lstStyle/>
-                    <a:p>
-                      <a:pPr algn="r">
-                        <a:lnSpc>
-                          <a:spcPts val="1839"/>
-                        </a:lnSpc>
-                        <a:buNone/>
-                        <a:defRPr sz="1600" b="0">
-                          <a:solidFill>
-                            <a:srgbClr val="303437"/>
-                          </a:solidFill>
-                          <a:latin typeface="Noto Sans"/>
-                        </a:defRPr>
-                      </a:pPr>
-                      <a:r>
-                        <a:rPr sz="1600" b="0" lang="ja-JP" altLang="en-US">
-                          <a:solidFill>
-                            <a:srgbClr val="303437"/>
-                          </a:solidFill>
-                          <a:latin typeface="Noto Sans"/>
-                          <a:ea typeface="Noto Sans CJK JP"/>
-                          <a:cs typeface="Noto Sans"/>
-                        </a:rPr>
-                        <a:t>regular</a:t>
-                      </a:r>
-                    </a:p>
-                  </a:txBody>
-                  <a:tcPr marL="63500" marR="63500" marT="38100" marB="38100" anchor="ctr">
-                    <a:lnL w="7620">
-                      <a:noFill/>
-                    </a:lnL>
-                    <a:lnR w="7620">
-                      <a:noFill/>
-                    </a:lnR>
-                    <a:lnT w="15240">
-                      <a:solidFill>
-                        <a:srgbClr val="626669"/>
-                      </a:solidFill>
-                      <a:prstDash val="solid"/>
-                    </a:lnT>
-                    <a:lnB w="7620">
-                      <a:solidFill>
-                        <a:srgbClr val="626669"/>
-                      </a:solidFill>
-                      <a:prstDash val="solid"/>
-                    </a:lnB>
-                    <a:solidFill>
-                      <a:srgbClr val="FFFEF8"/>
-                    </a:solidFill>
-                  </a:tcPr>
-                </a:tc>
-                <a:tc>
-                  <a:txBody>
-                    <a:bodyPr wrap="square">
-                      <a:noAutofit/>
-                    </a:bodyPr>
-                    <a:lstStyle/>
-                    <a:p>
-                      <a:pPr algn="r">
-                        <a:lnSpc>
-                          <a:spcPts val="1839"/>
-                        </a:lnSpc>
-                        <a:buNone/>
-                        <a:defRPr sz="1600" b="0">
-                          <a:solidFill>
-                            <a:srgbClr val="303437"/>
-                          </a:solidFill>
-                          <a:latin typeface="Noto Sans"/>
-                        </a:defRPr>
-                      </a:pPr>
-                      <a:r>
-                        <a:rPr sz="1600" b="0" lang="ja-JP" altLang="en-US">
-                          <a:solidFill>
-                            <a:srgbClr val="303437"/>
-                          </a:solidFill>
-                          <a:latin typeface="Noto Sans"/>
-                          <a:ea typeface="Noto Sans CJK JP"/>
-                          <a:cs typeface="Noto Sans"/>
-                        </a:rPr>
-                        <a:t>解説付き</a:t>
-                      </a:r>
-                    </a:p>
-                  </a:txBody>
-                  <a:tcPr marL="63500" marR="63500" marT="38100" marB="38100" anchor="ctr">
-                    <a:lnL w="7620">
-                      <a:noFill/>
-                    </a:lnL>
-                    <a:lnR w="7620">
-                      <a:noFill/>
-                    </a:lnR>
-                    <a:lnT w="15240">
-                      <a:solidFill>
-                        <a:srgbClr val="626669"/>
-                      </a:solidFill>
-                      <a:prstDash val="solid"/>
-                    </a:lnT>
-                    <a:lnB w="7620">
-                      <a:solidFill>
-                        <a:srgbClr val="626669"/>
-                      </a:solidFill>
-                      <a:prstDash val="solid"/>
-                    </a:lnB>
-                    <a:solidFill>
-                      <a:srgbClr val="FFFEF8"/>
-                    </a:solidFill>
-                  </a:tcPr>
-                </a:tc>
-              </a:tr>
-              <a:tr h="347980">
-                <a:tc>
-                  <a:txBody>
-                    <a:bodyPr wrap="square">
-                      <a:noAutofit/>
-                    </a:bodyPr>
-                    <a:lstStyle/>
-                    <a:p>
-                      <a:pPr algn="l">
-                        <a:lnSpc>
-                          <a:spcPts val="1839"/>
-                        </a:lnSpc>
-                        <a:buNone/>
-                        <a:defRPr sz="1600" b="0">
-                          <a:solidFill>
-                            <a:srgbClr val="303437"/>
-                          </a:solidFill>
-                          <a:latin typeface="Noto Sans"/>
-                        </a:defRPr>
-                      </a:pPr>
-                      <a:r>
-                        <a:rPr sz="1600" b="0" lang="ja-JP" altLang="en-US">
-                          <a:solidFill>
-                            <a:srgbClr val="303437"/>
-                          </a:solidFill>
-                          <a:latin typeface="Noto Sans"/>
-                          <a:ea typeface="Noto Sans CJK JP"/>
-                          <a:cs typeface="Noto Sans"/>
-                        </a:rPr>
-                        <a:t>代数</a:t>
-                      </a:r>
-                    </a:p>
-                  </a:txBody>
-                  <a:tcPr marL="63500" marR="63500" marT="38100" marB="38100" anchor="ctr">
-                    <a:lnL w="7620">
-                      <a:noFill/>
-                    </a:lnL>
-                    <a:lnR w="7620">
-                      <a:noFill/>
-                    </a:lnR>
-                    <a:lnT w="7620">
-                      <a:solidFill>
-                        <a:srgbClr val="626669"/>
-                      </a:solidFill>
-                      <a:prstDash val="solid"/>
-                    </a:lnT>
-                    <a:lnB w="7620">
-                      <a:noFill/>
-                    </a:lnB>
-                    <a:solidFill>
-                      <a:srgbClr val="FFFEF8"/>
-                    </a:solidFill>
-                  </a:tcPr>
-                </a:tc>
-                <a:tc>
-                  <a:txBody>
-                    <a:bodyPr wrap="square">
-                      <a:noAutofit/>
-                    </a:bodyPr>
-                    <a:lstStyle/>
-                    <a:p>
-                      <a:pPr algn="r">
-                        <a:lnSpc>
-                          <a:spcPts val="1839"/>
-                        </a:lnSpc>
-                        <a:buNone/>
-                        <a:defRPr sz="1600" b="0">
-                          <a:solidFill>
-                            <a:srgbClr val="303437"/>
-                          </a:solidFill>
-                          <a:latin typeface="Noto Sans"/>
-                        </a:defRPr>
-                      </a:pPr>
-                      <a:r>
-                        <a:rPr sz="1600" b="0" lang="ja-JP" altLang="en-US">
-                          <a:solidFill>
-                            <a:srgbClr val="303437"/>
-                          </a:solidFill>
-                          <a:latin typeface="Noto Sans"/>
-                          <a:ea typeface="Noto Sans CJK JP"/>
-                          <a:cs typeface="Noto Sans"/>
-                        </a:rPr>
-                        <a:t>28.15%</a:t>
-                      </a:r>
-                    </a:p>
-                  </a:txBody>
-                  <a:tcPr marL="63500" marR="63500" marT="38100" marB="38100" anchor="ctr">
-                    <a:lnL w="7620">
-                      <a:noFill/>
-                    </a:lnL>
-                    <a:lnR w="7620">
-                      <a:noFill/>
-                    </a:lnR>
-                    <a:lnT w="7620">
-                      <a:solidFill>
-                        <a:srgbClr val="626669"/>
-                      </a:solidFill>
-                      <a:prstDash val="solid"/>
-                    </a:lnT>
-                    <a:lnB w="7620">
-                      <a:noFill/>
-                    </a:lnB>
-                    <a:solidFill>
-                      <a:srgbClr val="FFFEF8"/>
-                    </a:solidFill>
-                  </a:tcPr>
-                </a:tc>
-                <a:tc>
-                  <a:txBody>
-                    <a:bodyPr wrap="square">
-                      <a:noAutofit/>
-                    </a:bodyPr>
-                    <a:lstStyle/>
-                    <a:p>
-                      <a:pPr algn="r">
-                        <a:lnSpc>
-                          <a:spcPts val="1839"/>
-                        </a:lnSpc>
-                        <a:buNone/>
-                        <a:defRPr sz="1600" b="0">
-                          <a:solidFill>
-                            <a:srgbClr val="303437"/>
-                          </a:solidFill>
-                          <a:latin typeface="Noto Sans"/>
-                        </a:defRPr>
-                      </a:pPr>
-                      <a:r>
-                        <a:rPr sz="1600" b="0" lang="ja-JP" altLang="en-US">
-                          <a:solidFill>
-                            <a:srgbClr val="303437"/>
-                          </a:solidFill>
-                          <a:latin typeface="Noto Sans"/>
-                          <a:ea typeface="Noto Sans CJK JP"/>
-                          <a:cs typeface="Noto Sans"/>
-                        </a:rPr>
-                        <a:t>50.37%</a:t>
-                      </a:r>
-                    </a:p>
-                  </a:txBody>
-                  <a:tcPr marL="63500" marR="63500" marT="38100" marB="38100" anchor="ctr">
-                    <a:lnL w="7620">
-                      <a:noFill/>
-                    </a:lnL>
-                    <a:lnR w="7620">
-                      <a:noFill/>
-                    </a:lnR>
-                    <a:lnT w="7620">
-                      <a:solidFill>
-                        <a:srgbClr val="626669"/>
-                      </a:solidFill>
-                      <a:prstDash val="solid"/>
-                    </a:lnT>
-                    <a:lnB w="7620">
-                      <a:noFill/>
-                    </a:lnB>
-                    <a:solidFill>
-                      <a:srgbClr val="FFFEF8"/>
-                    </a:solidFill>
-                  </a:tcPr>
-                </a:tc>
-              </a:tr>
-              <a:tr h="347980">
-                <a:tc>
-                  <a:txBody>
-                    <a:bodyPr wrap="square">
-                      <a:noAutofit/>
-                    </a:bodyPr>
-                    <a:lstStyle/>
-                    <a:p>
-                      <a:pPr algn="l">
-                        <a:lnSpc>
-                          <a:spcPts val="1839"/>
-                        </a:lnSpc>
-                        <a:buNone/>
-                        <a:defRPr sz="1600" b="0">
-                          <a:solidFill>
-                            <a:srgbClr val="303437"/>
-                          </a:solidFill>
-                          <a:latin typeface="Noto Sans"/>
-                        </a:defRPr>
-                      </a:pPr>
-                      <a:r>
-                        <a:rPr sz="1600" b="0" lang="ja-JP" altLang="en-US">
-                          <a:solidFill>
-                            <a:srgbClr val="303437"/>
-                          </a:solidFill>
-                          <a:latin typeface="Noto Sans"/>
-                          <a:ea typeface="Noto Sans CJK JP"/>
-                          <a:cs typeface="Noto Sans"/>
-                        </a:rPr>
-                        <a:t>場合の数・確率</a:t>
-                      </a:r>
-                    </a:p>
-                  </a:txBody>
-                  <a:tcPr marL="63500" marR="63500" marT="38100" marB="38100" anchor="ctr">
-                    <a:lnL w="7620">
-                      <a:noFill/>
-                    </a:lnL>
-                    <a:lnR w="7620">
-                      <a:noFill/>
-                    </a:lnR>
-                    <a:lnT w="7620">
-                      <a:noFill/>
-                    </a:lnT>
-                    <a:lnB w="7620">
-                      <a:noFill/>
-                    </a:lnB>
-                    <a:solidFill>
-                      <a:srgbClr val="FFFEF8"/>
-                    </a:solidFill>
-                  </a:tcPr>
-                </a:tc>
-                <a:tc>
-                  <a:txBody>
-                    <a:bodyPr wrap="square">
-                      <a:noAutofit/>
-                    </a:bodyPr>
-                    <a:lstStyle/>
-                    <a:p>
-                      <a:pPr algn="r">
-                        <a:lnSpc>
-                          <a:spcPts val="1839"/>
-                        </a:lnSpc>
-                        <a:buNone/>
-                        <a:defRPr sz="1600" b="0">
-                          <a:solidFill>
-                            <a:srgbClr val="303437"/>
-                          </a:solidFill>
-                          <a:latin typeface="Noto Sans"/>
-                        </a:defRPr>
-                      </a:pPr>
-                      <a:r>
-                        <a:rPr sz="1600" b="0" lang="ja-JP" altLang="en-US">
-                          <a:solidFill>
-                            <a:srgbClr val="303437"/>
-                          </a:solidFill>
-                          <a:latin typeface="Noto Sans"/>
-                          <a:ea typeface="Noto Sans CJK JP"/>
-                          <a:cs typeface="Noto Sans"/>
-                        </a:rPr>
-                        <a:t>35.04%</a:t>
-                      </a:r>
-                    </a:p>
-                  </a:txBody>
-                  <a:tcPr marL="63500" marR="63500" marT="38100" marB="38100" anchor="ctr">
-                    <a:lnL w="7620">
-                      <a:noFill/>
-                    </a:lnL>
-                    <a:lnR w="7620">
-                      <a:noFill/>
-                    </a:lnR>
-                    <a:lnT w="7620">
-                      <a:noFill/>
-                    </a:lnT>
-                    <a:lnB w="7620">
-                      <a:noFill/>
-                    </a:lnB>
-                    <a:solidFill>
-                      <a:srgbClr val="FFFEF8"/>
-                    </a:solidFill>
-                  </a:tcPr>
-                </a:tc>
-                <a:tc>
-                  <a:txBody>
-                    <a:bodyPr wrap="square">
-                      <a:noAutofit/>
-                    </a:bodyPr>
-                    <a:lstStyle/>
-                    <a:p>
-                      <a:pPr algn="r">
-                        <a:lnSpc>
-                          <a:spcPts val="1839"/>
-                        </a:lnSpc>
-                        <a:buNone/>
-                        <a:defRPr sz="1600" b="0">
-                          <a:solidFill>
-                            <a:srgbClr val="303437"/>
-                          </a:solidFill>
-                          <a:latin typeface="Noto Sans"/>
-                        </a:defRPr>
-                      </a:pPr>
-                      <a:r>
-                        <a:rPr sz="1600" b="0" lang="ja-JP" altLang="en-US">
-                          <a:solidFill>
-                            <a:srgbClr val="303437"/>
-                          </a:solidFill>
-                          <a:latin typeface="Noto Sans"/>
-                          <a:ea typeface="Noto Sans CJK JP"/>
-                          <a:cs typeface="Noto Sans"/>
-                        </a:rPr>
-                        <a:t>44.44%</a:t>
-                      </a:r>
-                    </a:p>
-                  </a:txBody>
-                  <a:tcPr marL="63500" marR="63500" marT="38100" marB="38100" anchor="ctr">
-                    <a:lnL w="7620">
-                      <a:noFill/>
-                    </a:lnL>
-                    <a:lnR w="7620">
-                      <a:noFill/>
-                    </a:lnR>
-                    <a:lnT w="7620">
-                      <a:noFill/>
-                    </a:lnT>
-                    <a:lnB w="7620">
-                      <a:noFill/>
-                    </a:lnB>
-                    <a:solidFill>
-                      <a:srgbClr val="FFFEF8"/>
-                    </a:solidFill>
-                  </a:tcPr>
-                </a:tc>
-              </a:tr>
-              <a:tr h="347980">
-                <a:tc>
-                  <a:txBody>
-                    <a:bodyPr wrap="square">
-                      <a:noAutofit/>
-                    </a:bodyPr>
-                    <a:lstStyle/>
-                    <a:p>
-                      <a:pPr algn="l">
-                        <a:lnSpc>
-                          <a:spcPts val="1839"/>
-                        </a:lnSpc>
-                        <a:buNone/>
-                        <a:defRPr sz="1600" b="0">
-                          <a:solidFill>
-                            <a:srgbClr val="303437"/>
-                          </a:solidFill>
-                          <a:latin typeface="Noto Sans"/>
-                        </a:defRPr>
-                      </a:pPr>
-                      <a:r>
-                        <a:rPr sz="1600" b="0" lang="ja-JP" altLang="en-US">
-                          <a:solidFill>
-                            <a:srgbClr val="303437"/>
-                          </a:solidFill>
-                          <a:latin typeface="Noto Sans"/>
-                          <a:ea typeface="Noto Sans CJK JP"/>
-                          <a:cs typeface="Noto Sans"/>
-                        </a:rPr>
-                        <a:t>幾何</a:t>
-                      </a:r>
-                    </a:p>
-                  </a:txBody>
-                  <a:tcPr marL="63500" marR="63500" marT="38100" marB="38100" anchor="ctr">
-                    <a:lnL w="7620">
-                      <a:noFill/>
-                    </a:lnL>
-                    <a:lnR w="7620">
-                      <a:noFill/>
-                    </a:lnR>
-                    <a:lnT w="7620">
-                      <a:noFill/>
-                    </a:lnT>
-                    <a:lnB w="7620">
-                      <a:noFill/>
-                    </a:lnB>
-                    <a:solidFill>
-                      <a:srgbClr val="FFFEF8"/>
-                    </a:solidFill>
-                  </a:tcPr>
-                </a:tc>
-                <a:tc>
-                  <a:txBody>
-                    <a:bodyPr wrap="square">
-                      <a:noAutofit/>
-                    </a:bodyPr>
-                    <a:lstStyle/>
-                    <a:p>
-                      <a:pPr algn="r">
-                        <a:lnSpc>
-                          <a:spcPts val="1839"/>
-                        </a:lnSpc>
-                        <a:buNone/>
-                        <a:defRPr sz="1600" b="0">
-                          <a:solidFill>
-                            <a:srgbClr val="303437"/>
-                          </a:solidFill>
-                          <a:latin typeface="Noto Sans"/>
-                        </a:defRPr>
-                      </a:pPr>
-                      <a:r>
-                        <a:rPr sz="1600" b="0" lang="ja-JP" altLang="en-US">
-                          <a:solidFill>
-                            <a:srgbClr val="303437"/>
-                          </a:solidFill>
-                          <a:latin typeface="Noto Sans"/>
-                          <a:ea typeface="Noto Sans CJK JP"/>
-                          <a:cs typeface="Noto Sans"/>
-                        </a:rPr>
-                        <a:t>56.14%</a:t>
-                      </a:r>
-                    </a:p>
-                  </a:txBody>
-                  <a:tcPr marL="63500" marR="63500" marT="38100" marB="38100" anchor="ctr">
-                    <a:lnL w="7620">
-                      <a:noFill/>
-                    </a:lnL>
-                    <a:lnR w="7620">
-                      <a:noFill/>
-                    </a:lnR>
-                    <a:lnT w="7620">
-                      <a:noFill/>
-                    </a:lnT>
-                    <a:lnB w="7620">
-                      <a:noFill/>
-                    </a:lnB>
-                    <a:solidFill>
-                      <a:srgbClr val="FFFEF8"/>
-                    </a:solidFill>
-                  </a:tcPr>
-                </a:tc>
-                <a:tc>
-                  <a:txBody>
-                    <a:bodyPr wrap="square">
-                      <a:noAutofit/>
-                    </a:bodyPr>
-                    <a:lstStyle/>
-                    <a:p>
-                      <a:pPr algn="r">
-                        <a:lnSpc>
-                          <a:spcPts val="1839"/>
-                        </a:lnSpc>
-                        <a:buNone/>
-                        <a:defRPr sz="1600" b="0">
-                          <a:solidFill>
-                            <a:srgbClr val="303437"/>
-                          </a:solidFill>
-                          <a:latin typeface="Noto Sans"/>
-                        </a:defRPr>
-                      </a:pPr>
-                      <a:r>
-                        <a:rPr sz="1600" b="0" lang="ja-JP" altLang="en-US">
-                          <a:solidFill>
-                            <a:srgbClr val="303437"/>
-                          </a:solidFill>
-                          <a:latin typeface="Noto Sans"/>
-                          <a:ea typeface="Noto Sans CJK JP"/>
-                          <a:cs typeface="Noto Sans"/>
-                        </a:rPr>
-                        <a:t>44.74%</a:t>
-                      </a:r>
-                    </a:p>
-                  </a:txBody>
-                  <a:tcPr marL="63500" marR="63500" marT="38100" marB="38100" anchor="ctr">
-                    <a:lnL w="7620">
-                      <a:noFill/>
-                    </a:lnL>
-                    <a:lnR w="7620">
-                      <a:noFill/>
-                    </a:lnR>
-                    <a:lnT w="7620">
-                      <a:noFill/>
-                    </a:lnT>
-                    <a:lnB w="7620">
-                      <a:noFill/>
-                    </a:lnB>
-                    <a:solidFill>
-                      <a:srgbClr val="FFFEF8"/>
-                    </a:solidFill>
-                  </a:tcPr>
-                </a:tc>
-              </a:tr>
-              <a:tr h="347980">
-                <a:tc>
-                  <a:txBody>
-                    <a:bodyPr wrap="square">
-                      <a:noAutofit/>
-                    </a:bodyPr>
-                    <a:lstStyle/>
-                    <a:p>
-                      <a:pPr algn="l">
-                        <a:lnSpc>
-                          <a:spcPts val="1839"/>
-                        </a:lnSpc>
-                        <a:buNone/>
-                        <a:defRPr sz="1600" b="0">
-                          <a:solidFill>
-                            <a:srgbClr val="303437"/>
-                          </a:solidFill>
-                          <a:latin typeface="Noto Sans"/>
-                        </a:defRPr>
-                      </a:pPr>
-                      <a:r>
-                        <a:rPr sz="1600" b="0" lang="ja-JP" altLang="en-US">
-                          <a:solidFill>
-                            <a:srgbClr val="303437"/>
-                          </a:solidFill>
-                          <a:latin typeface="Noto Sans"/>
-                          <a:ea typeface="Noto Sans CJK JP"/>
-                          <a:cs typeface="Noto Sans"/>
-                        </a:rPr>
-                        <a:t>中級代数</a:t>
-                      </a:r>
-                    </a:p>
-                  </a:txBody>
-                  <a:tcPr marL="63500" marR="63500" marT="38100" marB="38100" anchor="ctr">
-                    <a:lnL w="7620">
-                      <a:noFill/>
-                    </a:lnL>
-                    <a:lnR w="7620">
-                      <a:noFill/>
-                    </a:lnR>
-                    <a:lnT w="7620">
-                      <a:noFill/>
-                    </a:lnT>
-                    <a:lnB w="7620">
-                      <a:noFill/>
-                    </a:lnB>
-                    <a:solidFill>
-                      <a:srgbClr val="FFFEF8"/>
-                    </a:solidFill>
-                  </a:tcPr>
-                </a:tc>
-                <a:tc>
-                  <a:txBody>
-                    <a:bodyPr wrap="square">
-                      <a:noAutofit/>
-                    </a:bodyPr>
-                    <a:lstStyle/>
-                    <a:p>
-                      <a:pPr algn="r">
-                        <a:lnSpc>
-                          <a:spcPts val="1839"/>
-                        </a:lnSpc>
-                        <a:buNone/>
-                        <a:defRPr sz="1600" b="0">
-                          <a:solidFill>
-                            <a:srgbClr val="303437"/>
-                          </a:solidFill>
-                          <a:latin typeface="Noto Sans"/>
-                        </a:defRPr>
-                      </a:pPr>
-                      <a:r>
-                        <a:rPr sz="1600" b="0" lang="ja-JP" altLang="en-US">
-                          <a:solidFill>
-                            <a:srgbClr val="303437"/>
-                          </a:solidFill>
-                          <a:latin typeface="Noto Sans"/>
-                          <a:ea typeface="Noto Sans CJK JP"/>
-                          <a:cs typeface="Noto Sans"/>
-                        </a:rPr>
-                        <a:t>26.92%</a:t>
-                      </a:r>
-                    </a:p>
-                  </a:txBody>
-                  <a:tcPr marL="63500" marR="63500" marT="38100" marB="38100" anchor="ctr">
-                    <a:lnL w="7620">
-                      <a:noFill/>
-                    </a:lnL>
-                    <a:lnR w="7620">
-                      <a:noFill/>
-                    </a:lnR>
-                    <a:lnT w="7620">
-                      <a:noFill/>
-                    </a:lnT>
-                    <a:lnB w="7620">
-                      <a:noFill/>
-                    </a:lnB>
-                    <a:solidFill>
-                      <a:srgbClr val="FFFEF8"/>
-                    </a:solidFill>
-                  </a:tcPr>
-                </a:tc>
-                <a:tc>
-                  <a:txBody>
-                    <a:bodyPr wrap="square">
-                      <a:noAutofit/>
-                    </a:bodyPr>
-                    <a:lstStyle/>
-                    <a:p>
-                      <a:pPr algn="r">
-                        <a:lnSpc>
-                          <a:spcPts val="1839"/>
-                        </a:lnSpc>
-                        <a:buNone/>
-                        <a:defRPr sz="1600" b="0">
-                          <a:solidFill>
-                            <a:srgbClr val="303437"/>
-                          </a:solidFill>
-                          <a:latin typeface="Noto Sans"/>
-                        </a:defRPr>
-                      </a:pPr>
-                      <a:r>
-                        <a:rPr sz="1600" b="0" lang="ja-JP" altLang="en-US">
-                          <a:solidFill>
-                            <a:srgbClr val="303437"/>
-                          </a:solidFill>
-                          <a:latin typeface="Noto Sans"/>
-                          <a:ea typeface="Noto Sans CJK JP"/>
-                          <a:cs typeface="Noto Sans"/>
-                        </a:rPr>
-                        <a:t>32.05%</a:t>
-                      </a:r>
-                    </a:p>
-                  </a:txBody>
-                  <a:tcPr marL="63500" marR="63500" marT="38100" marB="38100" anchor="ctr">
-                    <a:lnL w="7620">
-                      <a:noFill/>
-                    </a:lnL>
-                    <a:lnR w="7620">
-                      <a:noFill/>
-                    </a:lnR>
-                    <a:lnT w="7620">
-                      <a:noFill/>
-                    </a:lnT>
-                    <a:lnB w="7620">
-                      <a:noFill/>
-                    </a:lnB>
-                    <a:solidFill>
-                      <a:srgbClr val="FFFEF8"/>
-                    </a:solidFill>
-                  </a:tcPr>
-                </a:tc>
-              </a:tr>
-              <a:tr h="347980">
-                <a:tc>
-                  <a:txBody>
-                    <a:bodyPr wrap="square">
-                      <a:noAutofit/>
-                    </a:bodyPr>
-                    <a:lstStyle/>
-                    <a:p>
-                      <a:pPr algn="l">
-                        <a:lnSpc>
-                          <a:spcPts val="1839"/>
-                        </a:lnSpc>
-                        <a:buNone/>
-                        <a:defRPr sz="1600" b="0">
-                          <a:solidFill>
-                            <a:srgbClr val="303437"/>
-                          </a:solidFill>
-                          <a:latin typeface="Noto Sans"/>
-                        </a:defRPr>
-                      </a:pPr>
-                      <a:r>
-                        <a:rPr sz="1600" b="0" lang="ja-JP" altLang="en-US">
-                          <a:solidFill>
-                            <a:srgbClr val="303437"/>
-                          </a:solidFill>
-                          <a:latin typeface="Noto Sans"/>
-                          <a:ea typeface="Noto Sans CJK JP"/>
-                          <a:cs typeface="Noto Sans"/>
-                        </a:rPr>
-                        <a:t>整数論</a:t>
-                      </a:r>
-                    </a:p>
-                  </a:txBody>
-                  <a:tcPr marL="63500" marR="63500" marT="38100" marB="38100" anchor="ctr">
-                    <a:lnL w="7620">
-                      <a:noFill/>
-                    </a:lnL>
-                    <a:lnR w="7620">
-                      <a:noFill/>
-                    </a:lnR>
-                    <a:lnT w="7620">
-                      <a:noFill/>
-                    </a:lnT>
-                    <a:lnB w="7620">
-                      <a:noFill/>
-                    </a:lnB>
-                    <a:solidFill>
-                      <a:srgbClr val="FFFEF8"/>
-                    </a:solidFill>
-                  </a:tcPr>
-                </a:tc>
-                <a:tc>
-                  <a:txBody>
-                    <a:bodyPr wrap="square">
-                      <a:noAutofit/>
-                    </a:bodyPr>
-                    <a:lstStyle/>
-                    <a:p>
-                      <a:pPr algn="r">
-                        <a:lnSpc>
-                          <a:spcPts val="1839"/>
-                        </a:lnSpc>
-                        <a:buNone/>
-                        <a:defRPr sz="1600" b="0">
-                          <a:solidFill>
-                            <a:srgbClr val="303437"/>
-                          </a:solidFill>
-                          <a:latin typeface="Noto Sans"/>
-                        </a:defRPr>
-                      </a:pPr>
-                      <a:r>
-                        <a:rPr sz="1600" b="0" lang="ja-JP" altLang="en-US">
-                          <a:solidFill>
-                            <a:srgbClr val="303437"/>
-                          </a:solidFill>
-                          <a:latin typeface="Noto Sans"/>
-                          <a:ea typeface="Noto Sans CJK JP"/>
-                          <a:cs typeface="Noto Sans"/>
-                        </a:rPr>
-                        <a:t>28.89%</a:t>
-                      </a:r>
-                    </a:p>
-                  </a:txBody>
-                  <a:tcPr marL="63500" marR="63500" marT="38100" marB="38100" anchor="ctr">
-                    <a:lnL w="7620">
-                      <a:noFill/>
-                    </a:lnL>
-                    <a:lnR w="7620">
-                      <a:noFill/>
-                    </a:lnR>
-                    <a:lnT w="7620">
-                      <a:noFill/>
-                    </a:lnT>
-                    <a:lnB w="7620">
-                      <a:noFill/>
-                    </a:lnB>
-                    <a:solidFill>
-                      <a:srgbClr val="FFFEF8"/>
-                    </a:solidFill>
-                  </a:tcPr>
-                </a:tc>
-                <a:tc>
-                  <a:txBody>
-                    <a:bodyPr wrap="square">
-                      <a:noAutofit/>
-                    </a:bodyPr>
-                    <a:lstStyle/>
-                    <a:p>
-                      <a:pPr algn="r">
-                        <a:lnSpc>
-                          <a:spcPts val="1839"/>
-                        </a:lnSpc>
-                        <a:buNone/>
-                        <a:defRPr sz="1600" b="0">
-                          <a:solidFill>
-                            <a:srgbClr val="303437"/>
-                          </a:solidFill>
-                          <a:latin typeface="Noto Sans"/>
-                        </a:defRPr>
-                      </a:pPr>
-                      <a:r>
-                        <a:rPr sz="1600" b="0" lang="ja-JP" altLang="en-US">
-                          <a:solidFill>
-                            <a:srgbClr val="303437"/>
-                          </a:solidFill>
-                          <a:latin typeface="Noto Sans"/>
-                          <a:ea typeface="Noto Sans CJK JP"/>
-                          <a:cs typeface="Noto Sans"/>
-                        </a:rPr>
-                        <a:t>38.89%</a:t>
-                      </a:r>
-                    </a:p>
-                  </a:txBody>
-                  <a:tcPr marL="63500" marR="63500" marT="38100" marB="38100" anchor="ctr">
-                    <a:lnL w="7620">
-                      <a:noFill/>
-                    </a:lnL>
-                    <a:lnR w="7620">
-                      <a:noFill/>
-                    </a:lnR>
-                    <a:lnT w="7620">
-                      <a:noFill/>
-                    </a:lnT>
-                    <a:lnB w="7620">
-                      <a:noFill/>
-                    </a:lnB>
-                    <a:solidFill>
-                      <a:srgbClr val="FFFEF8"/>
-                    </a:solidFill>
-                  </a:tcPr>
-                </a:tc>
-              </a:tr>
-              <a:tr h="347980">
-                <a:tc>
-                  <a:txBody>
-                    <a:bodyPr wrap="square">
-                      <a:noAutofit/>
-                    </a:bodyPr>
-                    <a:lstStyle/>
-                    <a:p>
-                      <a:pPr algn="l">
-                        <a:lnSpc>
-                          <a:spcPts val="1839"/>
-                        </a:lnSpc>
-                        <a:buNone/>
-                        <a:defRPr sz="1600" b="0">
-                          <a:solidFill>
-                            <a:srgbClr val="303437"/>
-                          </a:solidFill>
-                          <a:latin typeface="Noto Sans"/>
-                        </a:defRPr>
-                      </a:pPr>
-                      <a:r>
-                        <a:rPr sz="1600" b="0" lang="ja-JP" altLang="en-US">
-                          <a:solidFill>
-                            <a:srgbClr val="303437"/>
-                          </a:solidFill>
-                          <a:latin typeface="Noto Sans"/>
-                          <a:ea typeface="Noto Sans CJK JP"/>
-                          <a:cs typeface="Noto Sans"/>
-                        </a:rPr>
-                        <a:t>初等代数</a:t>
-                      </a:r>
-                    </a:p>
-                  </a:txBody>
-                  <a:tcPr marL="63500" marR="63500" marT="38100" marB="38100" anchor="ctr">
-                    <a:lnL w="7620">
-                      <a:noFill/>
-                    </a:lnL>
-                    <a:lnR w="7620">
-                      <a:noFill/>
-                    </a:lnR>
-                    <a:lnT w="7620">
-                      <a:noFill/>
-                    </a:lnT>
-                    <a:lnB w="7620">
-                      <a:noFill/>
-                    </a:lnB>
-                    <a:solidFill>
-                      <a:srgbClr val="FFFEF8"/>
-                    </a:solidFill>
-                  </a:tcPr>
-                </a:tc>
-                <a:tc>
-                  <a:txBody>
-                    <a:bodyPr wrap="square">
-                      <a:noAutofit/>
-                    </a:bodyPr>
-                    <a:lstStyle/>
-                    <a:p>
-                      <a:pPr algn="r">
-                        <a:lnSpc>
-                          <a:spcPts val="1839"/>
-                        </a:lnSpc>
-                        <a:buNone/>
-                        <a:defRPr sz="1600" b="0">
-                          <a:solidFill>
-                            <a:srgbClr val="303437"/>
-                          </a:solidFill>
-                          <a:latin typeface="Noto Sans"/>
-                        </a:defRPr>
-                      </a:pPr>
-                      <a:r>
-                        <a:rPr sz="1600" b="0" lang="ja-JP" altLang="en-US">
-                          <a:solidFill>
-                            <a:srgbClr val="303437"/>
-                          </a:solidFill>
-                          <a:latin typeface="Noto Sans"/>
-                          <a:ea typeface="Noto Sans CJK JP"/>
-                          <a:cs typeface="Noto Sans"/>
-                        </a:rPr>
-                        <a:t>54.65%</a:t>
-                      </a:r>
-                    </a:p>
-                  </a:txBody>
-                  <a:tcPr marL="63500" marR="63500" marT="38100" marB="38100" anchor="ctr">
-                    <a:lnL w="7620">
-                      <a:noFill/>
-                    </a:lnL>
-                    <a:lnR w="7620">
-                      <a:noFill/>
-                    </a:lnR>
-                    <a:lnT w="7620">
-                      <a:noFill/>
-                    </a:lnT>
-                    <a:lnB w="7620">
-                      <a:noFill/>
-                    </a:lnB>
-                    <a:solidFill>
-                      <a:srgbClr val="FFFEF8"/>
-                    </a:solidFill>
-                  </a:tcPr>
-                </a:tc>
-                <a:tc>
-                  <a:txBody>
-                    <a:bodyPr wrap="square">
-                      <a:noAutofit/>
-                    </a:bodyPr>
-                    <a:lstStyle/>
-                    <a:p>
-                      <a:pPr algn="r">
-                        <a:lnSpc>
-                          <a:spcPts val="1839"/>
-                        </a:lnSpc>
-                        <a:buNone/>
-                        <a:defRPr sz="1600" b="0">
-                          <a:solidFill>
-                            <a:srgbClr val="303437"/>
-                          </a:solidFill>
-                          <a:latin typeface="Noto Sans"/>
-                        </a:defRPr>
-                      </a:pPr>
-                      <a:r>
-                        <a:rPr sz="1600" b="0" lang="ja-JP" altLang="en-US">
-                          <a:solidFill>
-                            <a:srgbClr val="303437"/>
-                          </a:solidFill>
-                          <a:latin typeface="Noto Sans"/>
-                          <a:ea typeface="Noto Sans CJK JP"/>
-                          <a:cs typeface="Noto Sans"/>
-                        </a:rPr>
-                        <a:t>61.24%</a:t>
-                      </a:r>
-                    </a:p>
-                  </a:txBody>
-                  <a:tcPr marL="63500" marR="63500" marT="38100" marB="38100" anchor="ctr">
-                    <a:lnL w="7620">
-                      <a:noFill/>
-                    </a:lnL>
-                    <a:lnR w="7620">
-                      <a:noFill/>
-                    </a:lnR>
-                    <a:lnT w="7620">
-                      <a:noFill/>
-                    </a:lnT>
-                    <a:lnB w="7620">
-                      <a:noFill/>
-                    </a:lnB>
-                    <a:solidFill>
-                      <a:srgbClr val="FFFEF8"/>
-                    </a:solidFill>
-                  </a:tcPr>
-                </a:tc>
-              </a:tr>
-              <a:tr h="347980">
-                <a:tc>
-                  <a:txBody>
-                    <a:bodyPr wrap="square">
-                      <a:noAutofit/>
-                    </a:bodyPr>
-                    <a:lstStyle/>
-                    <a:p>
-                      <a:pPr algn="l">
-                        <a:lnSpc>
-                          <a:spcPts val="1839"/>
-                        </a:lnSpc>
-                        <a:buNone/>
-                        <a:defRPr sz="1600" b="0">
-                          <a:solidFill>
-                            <a:srgbClr val="303437"/>
-                          </a:solidFill>
-                          <a:latin typeface="Noto Sans"/>
-                        </a:defRPr>
-                      </a:pPr>
-                      <a:r>
-                        <a:rPr sz="1600" b="0" lang="ja-JP" altLang="en-US">
-                          <a:solidFill>
-                            <a:srgbClr val="303437"/>
-                          </a:solidFill>
-                          <a:latin typeface="Noto Sans"/>
-                          <a:ea typeface="Noto Sans CJK JP"/>
-                          <a:cs typeface="Noto Sans"/>
-                        </a:rPr>
-                        <a:t>解析の基礎</a:t>
-                      </a:r>
-                    </a:p>
-                  </a:txBody>
-                  <a:tcPr marL="63500" marR="63500" marT="38100" marB="38100" anchor="ctr">
-                    <a:lnL w="7620">
-                      <a:noFill/>
-                    </a:lnL>
-                    <a:lnR w="7620">
-                      <a:noFill/>
-                    </a:lnR>
-                    <a:lnT w="7620">
-                      <a:noFill/>
-                    </a:lnT>
-                    <a:lnB w="15240">
-                      <a:solidFill>
-                        <a:srgbClr val="626669"/>
-                      </a:solidFill>
-                      <a:prstDash val="solid"/>
-                    </a:lnB>
-                    <a:solidFill>
-                      <a:srgbClr val="FFFEF8"/>
-                    </a:solidFill>
-                  </a:tcPr>
-                </a:tc>
-                <a:tc>
-                  <a:txBody>
-                    <a:bodyPr wrap="square">
-                      <a:noAutofit/>
-                    </a:bodyPr>
-                    <a:lstStyle/>
-                    <a:p>
-                      <a:pPr algn="r">
-                        <a:lnSpc>
-                          <a:spcPts val="1839"/>
-                        </a:lnSpc>
-                        <a:buNone/>
-                        <a:defRPr sz="1600" b="0">
-                          <a:solidFill>
-                            <a:srgbClr val="303437"/>
-                          </a:solidFill>
-                          <a:latin typeface="Noto Sans"/>
-                        </a:defRPr>
-                      </a:pPr>
-                      <a:r>
-                        <a:rPr sz="1600" b="0" lang="ja-JP" altLang="en-US">
-                          <a:solidFill>
-                            <a:srgbClr val="303437"/>
-                          </a:solidFill>
-                          <a:latin typeface="Noto Sans"/>
-                          <a:ea typeface="Noto Sans CJK JP"/>
-                          <a:cs typeface="Noto Sans"/>
-                        </a:rPr>
-                        <a:t>43.27%</a:t>
-                      </a:r>
-                    </a:p>
-                  </a:txBody>
-                  <a:tcPr marL="63500" marR="63500" marT="38100" marB="38100" anchor="ctr">
-                    <a:lnL w="7620">
-                      <a:noFill/>
-                    </a:lnL>
-                    <a:lnR w="7620">
-                      <a:noFill/>
-                    </a:lnR>
-                    <a:lnT w="7620">
-                      <a:noFill/>
-                    </a:lnT>
-                    <a:lnB w="15240">
-                      <a:solidFill>
-                        <a:srgbClr val="626669"/>
-                      </a:solidFill>
-                      <a:prstDash val="solid"/>
-                    </a:lnB>
-                    <a:solidFill>
-                      <a:srgbClr val="FFFEF8"/>
-                    </a:solidFill>
-                  </a:tcPr>
-                </a:tc>
-                <a:tc>
-                  <a:txBody>
-                    <a:bodyPr wrap="square">
-                      <a:noAutofit/>
-                    </a:bodyPr>
-                    <a:lstStyle/>
-                    <a:p>
-                      <a:pPr algn="r">
-                        <a:lnSpc>
-                          <a:spcPts val="1839"/>
-                        </a:lnSpc>
-                        <a:buNone/>
-                        <a:defRPr sz="1600" b="0">
-                          <a:solidFill>
-                            <a:srgbClr val="303437"/>
-                          </a:solidFill>
-                          <a:latin typeface="Noto Sans"/>
-                        </a:defRPr>
-                      </a:pPr>
-                      <a:r>
-                        <a:rPr sz="1600" b="0" lang="ja-JP" altLang="en-US">
-                          <a:solidFill>
-                            <a:srgbClr val="303437"/>
-                          </a:solidFill>
-                          <a:latin typeface="Noto Sans"/>
-                          <a:ea typeface="Noto Sans CJK JP"/>
-                          <a:cs typeface="Noto Sans"/>
-                        </a:rPr>
-                        <a:t>42.69%</a:t>
-                      </a:r>
-                    </a:p>
-                  </a:txBody>
-                  <a:tcPr marL="63500" marR="63500" marT="38100" marB="38100" anchor="ctr">
-                    <a:lnL w="7620">
-                      <a:noFill/>
-                    </a:lnL>
-                    <a:lnR w="7620">
-                      <a:noFill/>
-                    </a:lnR>
-                    <a:lnT w="7620">
-                      <a:noFill/>
-                    </a:lnT>
-                    <a:lnB w="15240">
-                      <a:solidFill>
-                        <a:srgbClr val="626669"/>
-                      </a:solidFill>
-                      <a:prstDash val="solid"/>
-                    </a:lnB>
-                    <a:solidFill>
-                      <a:srgbClr val="FFFEF8"/>
-                    </a:solidFill>
-                  </a:tcPr>
-                </a:tc>
-              </a:tr>
-            </a:tbl>
-          </a:graphicData>
-        </a:graphic>
-      </p:graphicFrame>
-      <p:sp>
-        <p:nvSpPr>
-          <p:cNvPr id="5" name="sources"/>
-          <p:cNvSpPr txBox="1"/>
-          <p:nvPr/>
-        </p:nvSpPr>
-        <p:spPr>
-          <a:xfrm>
-            <a:off x="502920" y="4700016"/>
-            <a:ext cx="8183879" cy="530352"/>
-          </a:xfrm>
-          <a:prstGeom prst="rect">
-            <a:avLst/>
-          </a:prstGeom>
-          <a:noFill/>
-        </p:spPr>
-        <p:txBody>
-          <a:bodyPr wrap="square" lIns="0" rIns="0" tIns="0" bIns="0">
-            <a:noAutofit/>
-          </a:bodyPr>
-          <a:lstStyle/>
-          <a:p>
-            <a:pPr algn="l">
-              <a:lnSpc>
-                <a:spcPts val="940"/>
-              </a:lnSpc>
-              <a:spcBef>
-                <a:spcPts val="0"/>
-              </a:spcBef>
-              <a:spcAft>
-                <a:spcPts val="140"/>
-              </a:spcAft>
-              <a:buNone/>
-              <a:defRPr sz="810" b="0">
-                <a:solidFill>
-                  <a:srgbClr val="303437"/>
-                </a:solidFill>
-                <a:latin typeface="Noto Sans"/>
-              </a:defRPr>
-            </a:pPr>
-            <a:r>
-              <a:rPr sz="810" b="0" lang="ja-JP" altLang="en-US">
-                <a:solidFill>
-                  <a:srgbClr val="626669"/>
-                </a:solidFill>
-                <a:latin typeface="Noto Sans"/>
-                <a:ea typeface="Noto Sans CJK JP"/>
-                <a:cs typeface="Noto Sans"/>
-              </a:rPr>
-              <a:t>[1] HELM Classic v0.4.0. MATH、Level 1の固定評価。2023-11-17公開版。</a:t>
-            </a:r>
-            <a:r>
-              <a:rPr sz="810" b="0" lang="ja-JP" altLang="en-US">
-                <a:solidFill>
-                  <a:srgbClr val="626669"/>
-                </a:solidFill>
-                <a:latin typeface="Noto Sans"/>
-                <a:ea typeface="Noto Sans CJK JP"/>
-                <a:cs typeface="Noto Sans"/>
-              </a:rPr>
-              <a:t>  </a:t>
-            </a:r>
-            <a:r>
-              <a:rPr sz="810" b="0" lang="ja-JP" altLang="en-US">
-                <a:solidFill>
-                  <a:srgbClr val="626669"/>
-                </a:solidFill>
-                <a:latin typeface="Noto Sans"/>
-                <a:ea typeface="Noto Sans CJK JP"/>
-                <a:cs typeface="Noto Sans"/>
-                <a:hlinkClick r:id="rId2"/>
-              </a:rPr>
-              <a:t>https://crfm.stanford.edu/helm/classic/v0.4.0/#/groups/math_regular</a:t>
-            </a:r>
-          </a:p>
-        </p:txBody>
-      </p:sp>
-    </p:spTree>
-  </p:cSld>
-  <p:clrMapOvr>
-    <a:masterClrMapping/>
-  </p:clrMapOvr>
-</p:sld>
-</file>
-
-<file path=ppt/slides/slide48.xml><?xml version="1.0" encoding="utf-8"?>
-<p:sld xmlns:a="http://schemas.openxmlformats.org/drawingml/2006/main" xmlns:p="http://schemas.openxmlformats.org/presentationml/2006/main" xmlns:r="http://schemas.openxmlformats.org/officeDocument/2006/relationships">
-  <p:cSld>
-    <p:spTree>
-      <p:nvGrpSpPr>
-        <p:cNvPr id="1" name=""/>
-        <p:cNvGrpSpPr/>
-        <p:nvPr/>
-      </p:nvGrpSpPr>
-      <p:grpSpPr/>
-      <p:sp>
-        <p:nvSpPr>
-          <p:cNvPr id="2" name="Title 1"/>
-          <p:cNvSpPr>
-            <a:spLocks noGrp="1"/>
-          </p:cNvSpPr>
-          <p:nvPr>
-            <p:ph type="title"/>
-          </p:nvPr>
-        </p:nvSpPr>
-        <p:spPr>
-          <a:xfrm>
-            <a:off x="468172" y="650138"/>
-            <a:ext cx="8206740" cy="616305"/>
-          </a:xfrm>
-        </p:spPr>
-        <p:txBody>
-          <a:bodyPr wrap="square" lIns="0" rIns="0" tIns="0" bIns="0">
-            <a:noAutofit/>
-          </a:bodyPr>
-          <a:lstStyle/>
-          <a:p>
-            <a:pPr algn="l">
-              <a:lnSpc>
-                <a:spcPct val="110000"/>
-              </a:lnSpc>
-              <a:buNone/>
-              <a:defRPr sz="2800" b="0">
-                <a:solidFill>
-                  <a:srgbClr val="303437"/>
-                </a:solidFill>
-                <a:latin typeface="Noto Sans"/>
-              </a:defRPr>
-            </a:pPr>
-            <a:r>
-              <a:rPr sz="2800" b="1" lang="ja-JP" altLang="en-US">
-                <a:solidFill>
-                  <a:srgbClr val="303437"/>
-                </a:solidFill>
-                <a:latin typeface="Noto Sans"/>
-                <a:ea typeface="Noto Sans CJK JP"/>
-                <a:cs typeface="Noto Sans"/>
-              </a:rPr>
-              <a:t>実際の提示例数はモデルと分野で異なる</a:t>
-            </a:r>
-          </a:p>
-        </p:txBody>
-      </p:sp>
-      <p:sp>
-        <p:nvSpPr>
-          <p:cNvPr id="3" name="Text Placeholder 2"/>
-          <p:cNvSpPr>
-            <a:spLocks noGrp="1"/>
-          </p:cNvSpPr>
-          <p:nvPr>
-            <p:ph type="body" idx="1"/>
-          </p:nvPr>
-        </p:nvSpPr>
-        <p:spPr>
-          <a:xfrm>
-            <a:off x="594360" y="1463040"/>
-            <a:ext cx="7955279" cy="3044952"/>
-          </a:xfrm>
-        </p:spPr>
-        <p:txBody>
-          <a:bodyPr wrap="square" tIns="91440" bIns="91440">
-            <a:noAutofit/>
-          </a:bodyPr>
-          <a:lstStyle/>
-          <a:p>
-            <a:pPr marL="457200" indent="-355600">
-              <a:lnSpc>
-                <a:spcPts val="2618"/>
-              </a:lnSpc>
-              <a:spcAft>
-                <a:spcPts val="700"/>
-              </a:spcAft>
-              <a:buSzPct val="60455"/>
-              <a:buFont typeface="Noto Sans CJK JP"/>
-              <a:buChar char="●"/>
-              <a:defRPr sz="2200" b="0">
-                <a:solidFill>
-                  <a:srgbClr val="303437"/>
-                </a:solidFill>
-                <a:latin typeface="Noto Sans"/>
-              </a:defRPr>
-            </a:pPr>
-            <a:r>
-              <a:rPr sz="2200" b="0" lang="ja-JP" altLang="en-US">
-                <a:solidFill>
-                  <a:srgbClr val="303437"/>
-                </a:solidFill>
-                <a:latin typeface="Noto Sans"/>
-                <a:ea typeface="Noto Sans CJK JP"/>
-                <a:cs typeface="Noto Sans"/>
-              </a:rPr>
-              <a:t>regularでは今回の3モデルとも8例。解説付き条件でも、text-davinci-003とAnthropicは全分野で8例だった。</a:t>
-            </a:r>
-          </a:p>
-          <a:p>
-            <a:pPr marL="457200" indent="-355600">
-              <a:lnSpc>
-                <a:spcPts val="2618"/>
-              </a:lnSpc>
-              <a:spcAft>
-                <a:spcPts val="700"/>
-              </a:spcAft>
-              <a:buSzPct val="60455"/>
-              <a:buFont typeface="Noto Sans CJK JP"/>
-              <a:buChar char="●"/>
-              <a:defRPr sz="2200" b="0">
-                <a:solidFill>
-                  <a:srgbClr val="303437"/>
-                </a:solidFill>
-                <a:latin typeface="Noto Sans"/>
-              </a:defRPr>
-            </a:pPr>
-            <a:r>
-              <a:rPr sz="2200" b="0" lang="ja-JP" altLang="en-US">
-                <a:solidFill>
-                  <a:srgbClr val="303437"/>
-                </a:solidFill>
-                <a:latin typeface="Noto Sans"/>
-                <a:ea typeface="Noto Sans CJK JP"/>
-                <a:cs typeface="Noto Sans"/>
-              </a:rPr>
-              <a:t>OPTの解説付き条件は、中級代数5.16例、幾何5.88例、解析の基礎6.88例が平均。ほかは8例。</a:t>
-            </a:r>
-          </a:p>
-          <a:p>
-            <a:pPr marL="457200" indent="-355600">
-              <a:lnSpc>
-                <a:spcPts val="2618"/>
-              </a:lnSpc>
-              <a:spcAft>
-                <a:spcPts val="0"/>
-              </a:spcAft>
-              <a:buSzPct val="60455"/>
-              <a:buFont typeface="Noto Sans CJK JP"/>
-              <a:buChar char="●"/>
-              <a:defRPr sz="2200" b="0">
-                <a:solidFill>
-                  <a:srgbClr val="303437"/>
-                </a:solidFill>
-                <a:latin typeface="Noto Sans"/>
-              </a:defRPr>
-            </a:pPr>
-            <a:r>
-              <a:rPr sz="2200" b="0" lang="ja-JP" altLang="en-US">
-                <a:solidFill>
-                  <a:srgbClr val="303437"/>
-                </a:solidFill>
-                <a:latin typeface="Noto Sans"/>
-                <a:ea typeface="Noto Sans CJK JP"/>
-                <a:cs typeface="Noto Sans"/>
-              </a:rPr>
-              <a:t>入力を切り詰めた割合prompt_truncatedは、今回の42実行すべて0。提示例を減らして収めた場合も、この値は0になる。</a:t>
-            </a:r>
-          </a:p>
-        </p:txBody>
-      </p:sp>
-      <p:sp>
-        <p:nvSpPr>
-          <p:cNvPr id="4" name="Title 3"/>
-          <p:cNvSpPr>
-            <a:spLocks noGrp="1"/>
-          </p:cNvSpPr>
-          <p:nvPr>
-            <p:ph type="title" idx="2"/>
-          </p:nvPr>
-        </p:nvSpPr>
-        <p:spPr>
-          <a:xfrm>
-            <a:off x="75895" y="0"/>
-            <a:ext cx="8115300" cy="480060"/>
-          </a:xfrm>
-        </p:spPr>
-        <p:txBody>
-          <a:bodyPr wrap="square" lIns="0" rIns="0" tIns="0" bIns="0" anchor="ctr">
-            <a:noAutofit/>
-          </a:bodyPr>
-          <a:lstStyle/>
-          <a:p>
-            <a:pPr algn="l">
-              <a:lnSpc>
-                <a:spcPct val="110000"/>
-              </a:lnSpc>
-              <a:buNone/>
-              <a:defRPr sz="1400" b="0">
-                <a:solidFill>
-                  <a:srgbClr val="303437"/>
-                </a:solidFill>
-                <a:latin typeface="Noto Sans"/>
-              </a:defRPr>
-            </a:pPr>
-            <a:r>
-              <a:rPr sz="1400" b="1" lang="ja-JP" altLang="en-US">
-                <a:solidFill>
-                  <a:srgbClr val="FFFEF8"/>
-                </a:solidFill>
-                <a:latin typeface="Noto Sans"/>
-                <a:ea typeface="Noto Sans CJK JP"/>
-                <a:cs typeface="Noto Sans"/>
-              </a:rPr>
-              <a:t>Appendix: 2. 実行条件と配布の補足</a:t>
-            </a:r>
-          </a:p>
-        </p:txBody>
-      </p:sp>
-      <p:sp>
-        <p:nvSpPr>
-          <p:cNvPr id="5" name="sources"/>
-          <p:cNvSpPr txBox="1"/>
-          <p:nvPr/>
-        </p:nvSpPr>
-        <p:spPr>
-          <a:xfrm>
-            <a:off x="502920" y="4700016"/>
-            <a:ext cx="8183879" cy="530352"/>
-          </a:xfrm>
-          <a:prstGeom prst="rect">
-            <a:avLst/>
-          </a:prstGeom>
-          <a:noFill/>
-        </p:spPr>
-        <p:txBody>
-          <a:bodyPr wrap="square" lIns="0" rIns="0" tIns="0" bIns="0">
-            <a:noAutofit/>
-          </a:bodyPr>
-          <a:lstStyle/>
-          <a:p>
-            <a:pPr algn="l">
-              <a:lnSpc>
-                <a:spcPts val="940"/>
-              </a:lnSpc>
-              <a:spcBef>
-                <a:spcPts val="0"/>
-              </a:spcBef>
-              <a:spcAft>
-                <a:spcPts val="140"/>
-              </a:spcAft>
-              <a:buNone/>
-              <a:defRPr sz="810" b="0">
-                <a:solidFill>
-                  <a:srgbClr val="303437"/>
-                </a:solidFill>
-                <a:latin typeface="Noto Sans"/>
-              </a:defRPr>
-            </a:pPr>
-            <a:r>
-              <a:rPr sz="810" b="0" lang="ja-JP" altLang="en-US">
-                <a:solidFill>
-                  <a:srgbClr val="626669"/>
-                </a:solidFill>
-                <a:latin typeface="Noto Sans"/>
-                <a:ea typeface="Noto Sans CJK JP"/>
-                <a:cs typeface="Noto Sans"/>
-              </a:rPr>
-              <a:t>[1] HELM Classic v0.4.0. MATH chain-of-thought、Level 1の固定評価。</a:t>
-            </a:r>
-            <a:r>
-              <a:rPr sz="810" b="0" lang="ja-JP" altLang="en-US">
-                <a:solidFill>
-                  <a:srgbClr val="626669"/>
-                </a:solidFill>
-                <a:latin typeface="Noto Sans"/>
-                <a:ea typeface="Noto Sans CJK JP"/>
-                <a:cs typeface="Noto Sans"/>
-              </a:rPr>
-              <a:t>  </a:t>
-            </a:r>
-            <a:r>
-              <a:rPr sz="810" b="0" lang="ja-JP" altLang="en-US">
-                <a:solidFill>
-                  <a:srgbClr val="626669"/>
-                </a:solidFill>
-                <a:latin typeface="Noto Sans"/>
-                <a:ea typeface="Noto Sans CJK JP"/>
-                <a:cs typeface="Noto Sans"/>
-                <a:hlinkClick r:id="rId2"/>
-              </a:rPr>
-              <a:t>https://crfm.stanford.edu/helm/classic/v0.4.0/#/groups/math_chain_of_thought</a:t>
-            </a:r>
-          </a:p>
-        </p:txBody>
-      </p:sp>
-    </p:spTree>
-  </p:cSld>
-  <p:clrMapOvr>
-    <a:masterClrMapping/>
-  </p:clrMapOvr>
-</p:sld>
-</file>
-
-<file path=ppt/slides/slide49.xml><?xml version="1.0" encoding="utf-8"?>
-<p:sld xmlns:a="http://schemas.openxmlformats.org/drawingml/2006/main" xmlns:p="http://schemas.openxmlformats.org/presentationml/2006/main" xmlns:r="http://schemas.openxmlformats.org/officeDocument/2006/relationships">
-  <p:cSld>
-    <p:spTree>
-      <p:nvGrpSpPr>
-        <p:cNvPr id="1" name=""/>
-        <p:cNvGrpSpPr/>
-        <p:nvPr/>
-      </p:nvGrpSpPr>
-      <p:grpSpPr/>
-      <p:sp>
-        <p:nvSpPr>
-          <p:cNvPr id="2" name="Title 1"/>
-          <p:cNvSpPr>
-            <a:spLocks noGrp="1"/>
-          </p:cNvSpPr>
-          <p:nvPr>
-            <p:ph type="title"/>
-          </p:nvPr>
-        </p:nvSpPr>
-        <p:spPr>
-          <a:xfrm>
-            <a:off x="468172" y="650138"/>
-            <a:ext cx="8206740" cy="616305"/>
-          </a:xfrm>
-        </p:spPr>
-        <p:txBody>
-          <a:bodyPr wrap="square" lIns="0" rIns="0" tIns="0" bIns="0">
-            <a:noAutofit/>
-          </a:bodyPr>
-          <a:lstStyle/>
-          <a:p>
-            <a:pPr algn="l">
-              <a:lnSpc>
-                <a:spcPct val="110000"/>
-              </a:lnSpc>
-              <a:buNone/>
-              <a:defRPr sz="2800" b="0">
-                <a:solidFill>
-                  <a:srgbClr val="303437"/>
-                </a:solidFill>
-                <a:latin typeface="Noto Sans"/>
-              </a:defRPr>
-            </a:pPr>
-            <a:r>
-              <a:rPr sz="2800" b="1" lang="ja-JP" altLang="en-US">
-                <a:solidFill>
-                  <a:srgbClr val="303437"/>
-                </a:solidFill>
-                <a:latin typeface="Noto Sans"/>
-                <a:ea typeface="Noto Sans CJK JP"/>
-                <a:cs typeface="Noto Sans"/>
-              </a:rPr>
-              <a:t>表記の正規化を、数学の同値判定と区別する</a:t>
-            </a:r>
-          </a:p>
-        </p:txBody>
-      </p:sp>
-      <p:sp>
-        <p:nvSpPr>
-          <p:cNvPr id="3" name="Text Placeholder 2"/>
-          <p:cNvSpPr>
-            <a:spLocks noGrp="1"/>
-          </p:cNvSpPr>
-          <p:nvPr>
-            <p:ph type="body" idx="1"/>
-          </p:nvPr>
-        </p:nvSpPr>
-        <p:spPr>
-          <a:xfrm>
-            <a:off x="594360" y="1463040"/>
-            <a:ext cx="7955279" cy="3044952"/>
-          </a:xfrm>
-        </p:spPr>
-        <p:txBody>
-          <a:bodyPr wrap="square" tIns="91440" bIns="91440">
-            <a:noAutofit/>
-          </a:bodyPr>
-          <a:lstStyle/>
-          <a:p>
-            <a:pPr marL="457200" indent="-355600">
-              <a:lnSpc>
-                <a:spcPts val="2618"/>
-              </a:lnSpc>
-              <a:spcAft>
-                <a:spcPts val="700"/>
-              </a:spcAft>
-              <a:buSzPct val="60455"/>
-              <a:buFont typeface="Noto Sans CJK JP"/>
-              <a:buChar char="●"/>
-              <a:defRPr sz="2200" b="0">
-                <a:solidFill>
-                  <a:srgbClr val="303437"/>
-                </a:solidFill>
-                <a:latin typeface="Noto Sans"/>
-              </a:defRPr>
-            </a:pPr>
-            <a:r>
-              <a:rPr sz="2200" b="0" lang="ja-JP" altLang="en-US">
-                <a:solidFill>
-                  <a:srgbClr val="303437"/>
-                </a:solidFill>
-                <a:latin typeface="Noto Sans"/>
-                <a:ea typeface="Noto Sans CJK JP"/>
-                <a:cs typeface="Noto Sans"/>
-              </a:rPr>
-              <a:t>例えば1/2とLaTeXの\frac{1}{2}は、表記をそろえて一致と判定される。</a:t>
-            </a:r>
-          </a:p>
-          <a:p>
-            <a:pPr marL="457200" indent="-355600">
-              <a:lnSpc>
-                <a:spcPts val="2618"/>
-              </a:lnSpc>
-              <a:spcAft>
-                <a:spcPts val="700"/>
-              </a:spcAft>
-              <a:buSzPct val="60455"/>
-              <a:buFont typeface="Noto Sans CJK JP"/>
-              <a:buChar char="●"/>
-              <a:defRPr sz="2200" b="0">
-                <a:solidFill>
-                  <a:srgbClr val="303437"/>
-                </a:solidFill>
-                <a:latin typeface="Noto Sans"/>
-              </a:defRPr>
-            </a:pPr>
-            <a:r>
-              <a:rPr sz="2200" b="0" lang="ja-JP" altLang="en-US">
-                <a:solidFill>
-                  <a:srgbClr val="303437"/>
-                </a:solidFill>
-                <a:latin typeface="Noto Sans"/>
-                <a:ea typeface="Noto Sans CJK JP"/>
-                <a:cs typeface="Noto Sans"/>
-              </a:rPr>
-              <a:t>一方で、(x + 1)²とx² + 2x + 1を一般に展開して比較する記号計算器は使わない。</a:t>
-            </a:r>
-          </a:p>
-          <a:p>
-            <a:pPr marL="457200" indent="-355600">
-              <a:lnSpc>
-                <a:spcPts val="2618"/>
-              </a:lnSpc>
-              <a:spcAft>
-                <a:spcPts val="0"/>
-              </a:spcAft>
-              <a:buSzPct val="60455"/>
-              <a:buFont typeface="Noto Sans CJK JP"/>
-              <a:buChar char="●"/>
-              <a:defRPr sz="2200" b="0">
-                <a:solidFill>
-                  <a:srgbClr val="303437"/>
-                </a:solidFill>
-                <a:latin typeface="Noto Sans"/>
-              </a:defRPr>
-            </a:pPr>
-            <a:r>
-              <a:rPr sz="2200" b="0" lang="ja-JP" altLang="en-US">
-                <a:solidFill>
-                  <a:srgbClr val="303437"/>
-                </a:solidFill>
-                <a:latin typeface="Noto Sans"/>
-                <a:ea typeface="Noto Sans CJK JP"/>
-                <a:cs typeface="Noto Sans"/>
-              </a:rPr>
-              <a:t>chain-of-thought条件では、生成と参照解説の最後のboxedを取り出してから、同じ正規化を行う。</a:t>
-            </a:r>
-          </a:p>
-        </p:txBody>
-      </p:sp>
-      <p:sp>
-        <p:nvSpPr>
-          <p:cNvPr id="4" name="Title 3"/>
-          <p:cNvSpPr>
-            <a:spLocks noGrp="1"/>
-          </p:cNvSpPr>
-          <p:nvPr>
-            <p:ph type="title" idx="2"/>
-          </p:nvPr>
-        </p:nvSpPr>
-        <p:spPr>
-          <a:xfrm>
-            <a:off x="75895" y="0"/>
-            <a:ext cx="8115300" cy="480060"/>
-          </a:xfrm>
-        </p:spPr>
-        <p:txBody>
-          <a:bodyPr wrap="square" lIns="0" rIns="0" tIns="0" bIns="0" anchor="ctr">
-            <a:noAutofit/>
-          </a:bodyPr>
-          <a:lstStyle/>
-          <a:p>
-            <a:pPr algn="l">
-              <a:lnSpc>
-                <a:spcPct val="110000"/>
-              </a:lnSpc>
-              <a:buNone/>
-              <a:defRPr sz="1400" b="0">
-                <a:solidFill>
-                  <a:srgbClr val="303437"/>
-                </a:solidFill>
-                <a:latin typeface="Noto Sans"/>
-              </a:defRPr>
-            </a:pPr>
-            <a:r>
-              <a:rPr sz="1400" b="1" lang="ja-JP" altLang="en-US">
-                <a:solidFill>
-                  <a:srgbClr val="FFFEF8"/>
-                </a:solidFill>
-                <a:latin typeface="Noto Sans"/>
-                <a:ea typeface="Noto Sans CJK JP"/>
-                <a:cs typeface="Noto Sans"/>
-              </a:rPr>
-              <a:t>Appendix: 2. 実行条件と配布の補足</a:t>
-            </a:r>
-          </a:p>
-        </p:txBody>
-      </p:sp>
-      <p:sp>
-        <p:nvSpPr>
-          <p:cNvPr id="5" name="sources"/>
-          <p:cNvSpPr txBox="1"/>
-          <p:nvPr/>
-        </p:nvSpPr>
-        <p:spPr>
-          <a:xfrm>
-            <a:off x="502920" y="4700016"/>
-            <a:ext cx="8183879" cy="530352"/>
-          </a:xfrm>
-          <a:prstGeom prst="rect">
-            <a:avLst/>
-          </a:prstGeom>
-          <a:noFill/>
-        </p:spPr>
-        <p:txBody>
-          <a:bodyPr wrap="square" lIns="0" rIns="0" tIns="0" bIns="0">
-            <a:noAutofit/>
-          </a:bodyPr>
-          <a:lstStyle/>
-          <a:p>
-            <a:pPr algn="l">
-              <a:lnSpc>
-                <a:spcPts val="940"/>
-              </a:lnSpc>
-              <a:spcBef>
-                <a:spcPts val="0"/>
-              </a:spcBef>
-              <a:spcAft>
-                <a:spcPts val="140"/>
-              </a:spcAft>
-              <a:buNone/>
-              <a:defRPr sz="810" b="0">
-                <a:solidFill>
-                  <a:srgbClr val="303437"/>
-                </a:solidFill>
-                <a:latin typeface="Noto Sans"/>
-              </a:defRPr>
-            </a:pPr>
-            <a:r>
-              <a:rPr sz="810" b="0" lang="ja-JP" altLang="en-US">
-                <a:solidFill>
-                  <a:srgbClr val="626669"/>
-                </a:solidFill>
-                <a:latin typeface="Noto Sans"/>
-                <a:ea typeface="Noto Sans CJK JP"/>
-                <a:cs typeface="Noto Sans"/>
-              </a:rPr>
-              <a:t>[1] Stanford CRFM. MATHScenario v0.3.0. 参照解答の抽出と表記正規化。</a:t>
-            </a:r>
-          </a:p>
-          <a:p>
-            <a:pPr>
-              <a:lnSpc>
-                <a:spcPts val="940"/>
-              </a:lnSpc>
-              <a:buNone/>
-              <a:defRPr sz="810" b="0">
-                <a:solidFill>
-                  <a:srgbClr val="303437"/>
-                </a:solidFill>
-                <a:latin typeface="Noto Sans"/>
-              </a:defRPr>
-            </a:pPr>
-            <a:r>
-              <a:rPr sz="810" b="0" lang="ja-JP" altLang="en-US">
-                <a:solidFill>
-                  <a:srgbClr val="626669"/>
-                </a:solidFill>
-                <a:latin typeface="Noto Sans"/>
-                <a:ea typeface="Noto Sans CJK JP"/>
-                <a:cs typeface="Noto Sans"/>
-                <a:hlinkClick r:id="rId2"/>
-              </a:rPr>
-              <a:t>https://github.com/stanford-crfm/helm/blob/v0.3.0/src/helm/benchmark/scenarios/math_scenario.py</a:t>
+              <a:t>Appendix: 2. 解答と人手評価の補足</a:t>
             </a:r>
           </a:p>
         </p:txBody>
@@ -28346,7 +21050,7 @@
                 <a:ea typeface="Noto Sans CJK JP"/>
                 <a:cs typeface="Noto Sans"/>
               </a:rPr>
-              <a:t>MATHは、競技数学の12,500問に、途中の解説と最終解答を付けたデータセット。</a:t>
+              <a:t>MATHは、競技数学の12,500問に、途中の解説と最終解答を付けたデータセット。Dan Hendrycksらが2021年に公開した。</a:t>
             </a:r>
           </a:p>
           <a:p>
@@ -28406,7 +21110,7 @@
                 <a:ea typeface="Noto Sans CJK JP"/>
                 <a:cs typeface="Noto Sans"/>
               </a:rPr>
-              <a:t>最終解答はLaTeXのboxedに入る。解答だけを出す条件と、解説を含めて出す条件の両方で使われる。</a:t>
+              <a:t>解説の最後には、LaTeXのboxed命令で囲んだ最終解答がある。問題から解答を生成する学習や評価に使える。</a:t>
             </a:r>
           </a:p>
         </p:txBody>
@@ -28761,7 +21465,7 @@
                 <a:ea typeface="Noto Sans CJK JP"/>
                 <a:cs typeface="Noto Sans"/>
               </a:rPr>
-              <a:t>Appendix: 2. 実行条件と配布の補足</a:t>
+              <a:t>Appendix: 2. 解答と人手評価の補足</a:t>
             </a:r>
           </a:p>
         </p:txBody>
@@ -28907,7 +21611,7 @@
                 <a:ea typeface="Noto Sans CJK JP"/>
                 <a:cs typeface="Noto Sans"/>
               </a:rPr>
-              <a:t>解説の符号も、最終解答とは別に確かめる</a:t>
+              <a:t>配布解説には、途中の式の誤りもある</a:t>
             </a:r>
           </a:p>
         </p:txBody>
@@ -28960,7 +21664,7 @@
                 <a:ea typeface="Noto Sans CJK JP"/>
                 <a:cs typeface="Noto Sans"/>
               </a:rPr>
-              <a:t>実例13の配布解説では、sin x = 4/5、cos x = −3/5を導いた後、最後の分数で符号の位置が入れ替わっている。</a:t>
+              <a:t>実例13の配布解説は、sin x = 4/5、cos x = −3/5を導いた後、最後の分数で符号の位置を入れ替えている。</a:t>
             </a:r>
           </a:p>
           <a:p>
@@ -28990,37 +21694,7 @@
                 <a:ea typeface="Noto Sans CJK JP"/>
                 <a:cs typeface="Noto Sans"/>
               </a:rPr>
-              <a:t>最終解答−4/3は変わらないが、途中の式は、(4/5) ÷ (−3/5)と書くのが導出に対応する。</a:t>
-            </a:r>
-          </a:p>
-          <a:p>
-            <a:pPr marL="457200" indent="-355600">
-              <a:lnSpc>
-                <a:spcPts val="2618"/>
-              </a:lnSpc>
-              <a:spcAft>
-                <a:spcPts val="0"/>
-              </a:spcAft>
-              <a:buSzPct val="60455"/>
-              <a:buFont typeface="Noto Sans CJK JP"/>
-              <a:buChar char="●"/>
-              <a:defRPr sz="2200" b="0">
-                <a:solidFill>
-                  <a:srgbClr val="303437"/>
-                </a:solidFill>
-                <a:latin typeface="Noto Sans"/>
-              </a:defRPr>
-            </a:pPr>
-            <a:r>
-              <a:rPr sz="2200" b="0" lang="ja-JP" altLang="en-US">
-                <a:solidFill>
-                  <a:srgbClr val="303437"/>
-                </a:solidFill>
-                <a:latin typeface="Noto Sans"/>
-                <a:ea typeface="Noto Sans CJK JP"/>
-                <a:cs typeface="Noto Sans"/>
-              </a:rPr>
-              <a:t>資料の解説はこの対応を保って説明し、配布解説の原文は変更せず検証記録へ保存した。</a:t>
+              <a:t>最終解答−4/3は変わらないが、導出に対応する式は、(4/5) ÷ (−3/5)である。</a:t>
             </a:r>
           </a:p>
         </p:txBody>
@@ -29068,7 +21742,7 @@
                 <a:ea typeface="Noto Sans CJK JP"/>
                 <a:cs typeface="Noto Sans"/>
               </a:rPr>
-              <a:t>Appendix: 2. 実行条件と配布の補足</a:t>
+              <a:t>Appendix: 2. 解答と人手評価の補足</a:t>
             </a:r>
           </a:p>
         </p:txBody>
@@ -29122,18 +21796,7 @@
                 <a:ea typeface="Noto Sans CJK JP"/>
                 <a:cs typeface="Noto Sans"/>
               </a:rPr>
-              <a:t>[1] MATH, EleutherAI/hendrycks_math. 固定revisionのtest分割。元の競技問題・解説の著者に帰属。</a:t>
-            </a:r>
-            <a:r>
-              <a:rPr sz="810" b="0" lang="ja-JP" altLang="en-US">
-                <a:solidFill>
-                  <a:srgbClr val="626669"/>
-                </a:solidFill>
-                <a:latin typeface="Noto Sans"/>
-                <a:ea typeface="Noto Sans CJK JP"/>
-                <a:cs typeface="Noto Sans"/>
-              </a:rPr>
-              <a:t>  </a:t>
+              <a:t>[1] Hendrycks et al. MATH. 公開データ。 </a:t>
             </a:r>
             <a:r>
               <a:rPr sz="810" b="0" lang="ja-JP" altLang="en-US">
@@ -29378,7 +22041,7 @@
                 <a:ea typeface="Noto Sans CJK JP"/>
                 <a:cs typeface="Noto Sans"/>
               </a:rPr>
-              <a:t>第一著者はDan Hendrycks、最終著者はJacob Steinhardt。計8人の著者による研究としてNeurIPS 2021 Datasets and Benchmarksに発表された。</a:t>
+              <a:t>Dan Hendrycks、Collin Burnsら8人が構築し、NeurIPS 2021のDatasets and Benchmarks Trackで発表した。</a:t>
             </a:r>
           </a:p>
           <a:p>
@@ -29951,7 +22614,7 @@
                 <a:ea typeface="Noto Sans CJK JP"/>
                 <a:cs typeface="Noto Sans"/>
               </a:rPr>
-              <a:t>Holistic Evaluation of Language Models</a:t>
+              <a:t>MATH Dataset</a:t>
             </a:r>
           </a:p>
         </p:txBody>
@@ -30005,7 +22668,7 @@
                 <a:ea typeface="Noto Sans CJK JP"/>
                 <a:cs typeface="Noto Sans"/>
               </a:rPr>
-              <a:t>Percy Liang et al. · 2023 · TMLR</a:t>
+              <a:t>Hendrycks et al. · n.d. · 公式リポジトリ（2026-10-19参照）</a:t>
             </a:r>
           </a:p>
         </p:txBody>
@@ -30059,7 +22722,7 @@
                 <a:ea typeface="Noto Sans CJK JP"/>
                 <a:cs typeface="Noto Sans"/>
               </a:rPr>
-              <a:t>共通の適応方法と複数の指標を使い、MATHを含む多数の課題で言語モデルを比較する。</a:t>
+              <a:t>データの取得先、データを読むコード、解答の評価コード、AMPSを案内する。</a:t>
             </a:r>
           </a:p>
         </p:txBody>
@@ -30112,557 +22775,9 @@
                 <a:latin typeface="Noto Sans"/>
                 <a:ea typeface="Noto Sans CJK JP"/>
                 <a:cs typeface="Noto Sans"/>
-                <a:hlinkClick r:id="rId3"/>
-              </a:rPr>
-              <a:t>https://arxiv.org/abs/2211.09110</a:t>
-            </a:r>
-          </a:p>
-        </p:txBody>
-      </p:sp>
-    </p:spTree>
-  </p:cSld>
-  <p:clrMapOvr>
-    <a:masterClrMapping/>
-  </p:clrMapOvr>
-</p:sld>
-</file>
-
-<file path=ppt/slides/slide55.xml><?xml version="1.0" encoding="utf-8"?>
-<p:sld xmlns:a="http://schemas.openxmlformats.org/drawingml/2006/main" xmlns:p="http://schemas.openxmlformats.org/presentationml/2006/main" xmlns:r="http://schemas.openxmlformats.org/officeDocument/2006/relationships">
-  <p:cSld>
-    <p:spTree>
-      <p:nvGrpSpPr>
-        <p:cNvPr id="1" name=""/>
-        <p:cNvGrpSpPr/>
-        <p:nvPr/>
-      </p:nvGrpSpPr>
-      <p:grpSpPr/>
-      <p:sp>
-        <p:nvSpPr>
-          <p:cNvPr id="2" name="Title 1"/>
-          <p:cNvSpPr>
-            <a:spLocks noGrp="1"/>
-          </p:cNvSpPr>
-          <p:nvPr>
-            <p:ph type="title"/>
-          </p:nvPr>
-        </p:nvSpPr>
-        <p:spPr>
-          <a:xfrm>
-            <a:off x="468172" y="650138"/>
-            <a:ext cx="8206740" cy="616305"/>
-          </a:xfrm>
-        </p:spPr>
-        <p:txBody>
-          <a:bodyPr wrap="square" lIns="0" rIns="0" tIns="0" bIns="0">
-            <a:noAutofit/>
-          </a:bodyPr>
-          <a:lstStyle/>
-          <a:p>
-            <a:pPr algn="l">
-              <a:lnSpc>
-                <a:spcPct val="110000"/>
-              </a:lnSpc>
-              <a:buNone/>
-              <a:defRPr sz="2800" b="0">
-                <a:solidFill>
-                  <a:srgbClr val="303437"/>
-                </a:solidFill>
-                <a:latin typeface="Noto Sans"/>
-              </a:defRPr>
-            </a:pPr>
-            <a:r>
-              <a:rPr sz="2800" b="1" lang="ja-JP" altLang="en-US">
-                <a:solidFill>
-                  <a:srgbClr val="303437"/>
-                </a:solidFill>
-                <a:latin typeface="Noto Sans"/>
-                <a:ea typeface="Noto Sans CJK JP"/>
-                <a:cs typeface="Noto Sans"/>
-              </a:rPr>
-              <a:t>参考文献</a:t>
-            </a:r>
-          </a:p>
-        </p:txBody>
-      </p:sp>
-      <p:sp>
-        <p:nvSpPr>
-          <p:cNvPr id="3" name="Title 2"/>
-          <p:cNvSpPr>
-            <a:spLocks noGrp="1"/>
-          </p:cNvSpPr>
-          <p:nvPr>
-            <p:ph type="title" idx="2"/>
-          </p:nvPr>
-        </p:nvSpPr>
-        <p:spPr>
-          <a:xfrm>
-            <a:off x="75895" y="0"/>
-            <a:ext cx="8115300" cy="480060"/>
-          </a:xfrm>
-        </p:spPr>
-        <p:txBody>
-          <a:bodyPr wrap="square" lIns="0" rIns="0" tIns="0" bIns="0" anchor="ctr">
-            <a:noAutofit/>
-          </a:bodyPr>
-          <a:lstStyle/>
-          <a:p>
-            <a:pPr algn="l">
-              <a:lnSpc>
-                <a:spcPct val="110000"/>
-              </a:lnSpc>
-              <a:buNone/>
-              <a:defRPr sz="1400" b="0">
-                <a:solidFill>
-                  <a:srgbClr val="303437"/>
-                </a:solidFill>
-                <a:latin typeface="Noto Sans"/>
-              </a:defRPr>
-            </a:pPr>
-            <a:r>
-              <a:rPr sz="1400" b="1" lang="ja-JP" altLang="en-US">
-                <a:solidFill>
-                  <a:srgbClr val="FFFEF8"/>
-                </a:solidFill>
-                <a:latin typeface="Noto Sans"/>
-                <a:ea typeface="Noto Sans CJK JP"/>
-                <a:cs typeface="Noto Sans"/>
-              </a:rPr>
-              <a:t>Appendix: 3. 研究と参考文献</a:t>
-            </a:r>
-          </a:p>
-        </p:txBody>
-      </p:sp>
-      <p:sp>
-        <p:nvSpPr>
-          <p:cNvPr id="4" name="TextBox 3"/>
-          <p:cNvSpPr txBox="1"/>
-          <p:nvPr/>
-        </p:nvSpPr>
-        <p:spPr>
-          <a:xfrm>
-            <a:off x="548640" y="1426464"/>
-            <a:ext cx="8046720" cy="288035"/>
-          </a:xfrm>
-          <a:prstGeom prst="rect">
-            <a:avLst/>
-          </a:prstGeom>
-          <a:noFill/>
-        </p:spPr>
-        <p:txBody>
-          <a:bodyPr wrap="square" lIns="0" rIns="0" tIns="0" bIns="0">
-            <a:noAutofit/>
-          </a:bodyPr>
-          <a:lstStyle/>
-          <a:p>
-            <a:pPr algn="l">
-              <a:lnSpc>
-                <a:spcPts val="2052"/>
-              </a:lnSpc>
-              <a:spcBef>
-                <a:spcPts val="0"/>
-              </a:spcBef>
-              <a:spcAft>
-                <a:spcPts val="0"/>
-              </a:spcAft>
-              <a:buNone/>
-              <a:defRPr sz="1800" b="0">
-                <a:solidFill>
-                  <a:srgbClr val="303437"/>
-                </a:solidFill>
-                <a:latin typeface="Noto Sans"/>
-              </a:defRPr>
-            </a:pPr>
-            <a:r>
-              <a:rPr sz="1800" b="1" lang="ja-JP" altLang="en-US">
-                <a:solidFill>
-                  <a:srgbClr val="303437"/>
-                </a:solidFill>
-                <a:latin typeface="Noto Sans"/>
-                <a:ea typeface="Noto Sans CJK JP"/>
-                <a:cs typeface="Noto Sans"/>
-              </a:rPr>
-              <a:t>MATH Dataset</a:t>
-            </a:r>
-          </a:p>
-        </p:txBody>
-      </p:sp>
-      <p:sp>
-        <p:nvSpPr>
-          <p:cNvPr id="5" name="TextBox 4"/>
-          <p:cNvSpPr txBox="1"/>
-          <p:nvPr/>
-        </p:nvSpPr>
-        <p:spPr>
-          <a:xfrm>
-            <a:off x="548640" y="1752600"/>
-            <a:ext cx="8046720" cy="201168"/>
-          </a:xfrm>
-          <a:prstGeom prst="rect">
-            <a:avLst/>
-          </a:prstGeom>
-          <a:noFill/>
-        </p:spPr>
-        <p:txBody>
-          <a:bodyPr wrap="square" lIns="0" rIns="0" tIns="0" bIns="0">
-            <a:noAutofit/>
-          </a:bodyPr>
-          <a:lstStyle/>
-          <a:p>
-            <a:pPr algn="l">
-              <a:lnSpc>
-                <a:spcPts val="1368"/>
-              </a:lnSpc>
-              <a:spcBef>
-                <a:spcPts val="0"/>
-              </a:spcBef>
-              <a:spcAft>
-                <a:spcPts val="0"/>
-              </a:spcAft>
-              <a:buNone/>
-              <a:defRPr sz="1200" b="0">
-                <a:solidFill>
-                  <a:srgbClr val="303437"/>
-                </a:solidFill>
-                <a:latin typeface="Noto Sans"/>
-              </a:defRPr>
-            </a:pPr>
-            <a:r>
-              <a:rPr sz="1200" b="0" lang="ja-JP" altLang="en-US">
-                <a:solidFill>
-                  <a:srgbClr val="626669"/>
-                </a:solidFill>
-                <a:latin typeface="Noto Sans"/>
-                <a:ea typeface="Noto Sans CJK JP"/>
-                <a:cs typeface="Noto Sans"/>
-              </a:rPr>
-              <a:t>Dan Hendrycks et al. · 公式リポジトリ</a:t>
-            </a:r>
-          </a:p>
-        </p:txBody>
-      </p:sp>
-      <p:sp>
-        <p:nvSpPr>
-          <p:cNvPr id="6" name="TextBox 5"/>
-          <p:cNvSpPr txBox="1"/>
-          <p:nvPr/>
-        </p:nvSpPr>
-        <p:spPr>
-          <a:xfrm>
-            <a:off x="548640" y="2004567"/>
-            <a:ext cx="8046720" cy="266319"/>
-          </a:xfrm>
-          <a:prstGeom prst="rect">
-            <a:avLst/>
-          </a:prstGeom>
-          <a:noFill/>
-        </p:spPr>
-        <p:txBody>
-          <a:bodyPr wrap="square" lIns="0" rIns="0" tIns="0" bIns="0">
-            <a:noAutofit/>
-          </a:bodyPr>
-          <a:lstStyle/>
-          <a:p>
-            <a:pPr algn="l">
-              <a:lnSpc>
-                <a:spcPts val="1880"/>
-              </a:lnSpc>
-              <a:spcBef>
-                <a:spcPts val="0"/>
-              </a:spcBef>
-              <a:spcAft>
-                <a:spcPts val="0"/>
-              </a:spcAft>
-              <a:buNone/>
-              <a:defRPr sz="1650" b="0">
-                <a:solidFill>
-                  <a:srgbClr val="303437"/>
-                </a:solidFill>
-                <a:latin typeface="Noto Sans"/>
-              </a:defRPr>
-            </a:pPr>
-            <a:r>
-              <a:rPr sz="1650" b="0" lang="ja-JP" altLang="en-US">
-                <a:solidFill>
-                  <a:srgbClr val="303437"/>
-                </a:solidFill>
-                <a:latin typeface="Noto Sans"/>
-                <a:ea typeface="Noto Sans CJK JP"/>
-                <a:cs typeface="Noto Sans"/>
-              </a:rPr>
-              <a:t>データの取得先、解答抽出と正規化、評価コード、AMPSの配布を案内する。</a:t>
-            </a:r>
-          </a:p>
-        </p:txBody>
-      </p:sp>
-      <p:sp>
-        <p:nvSpPr>
-          <p:cNvPr id="7" name="TextBox 6"/>
-          <p:cNvSpPr txBox="1"/>
-          <p:nvPr/>
-        </p:nvSpPr>
-        <p:spPr>
-          <a:xfrm>
-            <a:off x="548640" y="2321687"/>
-            <a:ext cx="8046720" cy="179450"/>
-          </a:xfrm>
-          <a:prstGeom prst="rect">
-            <a:avLst/>
-          </a:prstGeom>
-          <a:noFill/>
-        </p:spPr>
-        <p:txBody>
-          <a:bodyPr wrap="square" lIns="0" rIns="0" tIns="0" bIns="0">
-            <a:noAutofit/>
-          </a:bodyPr>
-          <a:lstStyle/>
-          <a:p>
-            <a:pPr algn="l">
-              <a:lnSpc>
-                <a:spcPts val="1197"/>
-              </a:lnSpc>
-              <a:spcBef>
-                <a:spcPts val="0"/>
-              </a:spcBef>
-              <a:spcAft>
-                <a:spcPts val="0"/>
-              </a:spcAft>
-              <a:buNone/>
-              <a:defRPr sz="1050" b="0">
-                <a:solidFill>
-                  <a:srgbClr val="303437"/>
-                </a:solidFill>
-                <a:latin typeface="Noto Sans"/>
-              </a:defRPr>
-            </a:pPr>
-            <a:r>
-              <a:rPr sz="1050" b="0" lang="ja-JP" altLang="en-US">
-                <a:solidFill>
-                  <a:srgbClr val="626669"/>
-                </a:solidFill>
-                <a:latin typeface="Noto Sans"/>
-                <a:ea typeface="Noto Sans CJK JP"/>
-                <a:cs typeface="Noto Sans"/>
-                <a:hlinkClick r:id="rId2"/>
+                <a:hlinkClick r:id="rId4"/>
               </a:rPr>
               <a:t>https://github.com/hendrycks/math</a:t>
-            </a:r>
-          </a:p>
-        </p:txBody>
-      </p:sp>
-      <p:sp>
-        <p:nvSpPr>
-          <p:cNvPr id="8" name="TextBox 7"/>
-          <p:cNvSpPr txBox="1"/>
-          <p:nvPr/>
-        </p:nvSpPr>
-        <p:spPr>
-          <a:xfrm>
-            <a:off x="548640" y="2748026"/>
-            <a:ext cx="8046720" cy="288035"/>
-          </a:xfrm>
-          <a:prstGeom prst="rect">
-            <a:avLst/>
-          </a:prstGeom>
-          <a:noFill/>
-        </p:spPr>
-        <p:txBody>
-          <a:bodyPr wrap="square" lIns="0" rIns="0" tIns="0" bIns="0">
-            <a:noAutofit/>
-          </a:bodyPr>
-          <a:lstStyle/>
-          <a:p>
-            <a:pPr algn="l">
-              <a:lnSpc>
-                <a:spcPts val="2052"/>
-              </a:lnSpc>
-              <a:spcBef>
-                <a:spcPts val="0"/>
-              </a:spcBef>
-              <a:spcAft>
-                <a:spcPts val="0"/>
-              </a:spcAft>
-              <a:buNone/>
-              <a:defRPr sz="1800" b="0">
-                <a:solidFill>
-                  <a:srgbClr val="303437"/>
-                </a:solidFill>
-                <a:latin typeface="Noto Sans"/>
-              </a:defRPr>
-            </a:pPr>
-            <a:r>
-              <a:rPr sz="1800" b="1" lang="ja-JP" altLang="en-US">
-                <a:solidFill>
-                  <a:srgbClr val="303437"/>
-                </a:solidFill>
-                <a:latin typeface="Noto Sans"/>
-                <a:ea typeface="Noto Sans CJK JP"/>
-                <a:cs typeface="Noto Sans"/>
-              </a:rPr>
-              <a:t>MATHScenario</a:t>
-            </a:r>
-          </a:p>
-        </p:txBody>
-      </p:sp>
-      <p:sp>
-        <p:nvSpPr>
-          <p:cNvPr id="9" name="TextBox 8"/>
-          <p:cNvSpPr txBox="1"/>
-          <p:nvPr/>
-        </p:nvSpPr>
-        <p:spPr>
-          <a:xfrm>
-            <a:off x="548640" y="3074161"/>
-            <a:ext cx="8046720" cy="201168"/>
-          </a:xfrm>
-          <a:prstGeom prst="rect">
-            <a:avLst/>
-          </a:prstGeom>
-          <a:noFill/>
-        </p:spPr>
-        <p:txBody>
-          <a:bodyPr wrap="square" lIns="0" rIns="0" tIns="0" bIns="0">
-            <a:noAutofit/>
-          </a:bodyPr>
-          <a:lstStyle/>
-          <a:p>
-            <a:pPr algn="l">
-              <a:lnSpc>
-                <a:spcPts val="1368"/>
-              </a:lnSpc>
-              <a:spcBef>
-                <a:spcPts val="0"/>
-              </a:spcBef>
-              <a:spcAft>
-                <a:spcPts val="0"/>
-              </a:spcAft>
-              <a:buNone/>
-              <a:defRPr sz="1200" b="0">
-                <a:solidFill>
-                  <a:srgbClr val="303437"/>
-                </a:solidFill>
-                <a:latin typeface="Noto Sans"/>
-              </a:defRPr>
-            </a:pPr>
-            <a:r>
-              <a:rPr sz="1200" b="0" lang="ja-JP" altLang="en-US">
-                <a:solidFill>
-                  <a:srgbClr val="626669"/>
-                </a:solidFill>
-                <a:latin typeface="Noto Sans"/>
-                <a:ea typeface="Noto Sans CJK JP"/>
-                <a:cs typeface="Noto Sans"/>
-              </a:rPr>
-              <a:t>Stanford CRFM · HELM v0.3.0</a:t>
-            </a:r>
-          </a:p>
-        </p:txBody>
-      </p:sp>
-      <p:sp>
-        <p:nvSpPr>
-          <p:cNvPr id="10" name="TextBox 9"/>
-          <p:cNvSpPr txBox="1"/>
-          <p:nvPr/>
-        </p:nvSpPr>
-        <p:spPr>
-          <a:xfrm>
-            <a:off x="548640" y="3326129"/>
-            <a:ext cx="8046720" cy="266319"/>
-          </a:xfrm>
-          <a:prstGeom prst="rect">
-            <a:avLst/>
-          </a:prstGeom>
-          <a:noFill/>
-        </p:spPr>
-        <p:txBody>
-          <a:bodyPr wrap="square" lIns="0" rIns="0" tIns="0" bIns="0">
-            <a:noAutofit/>
-          </a:bodyPr>
-          <a:lstStyle/>
-          <a:p>
-            <a:pPr algn="l">
-              <a:lnSpc>
-                <a:spcPts val="1880"/>
-              </a:lnSpc>
-              <a:spcBef>
-                <a:spcPts val="0"/>
-              </a:spcBef>
-              <a:spcAft>
-                <a:spcPts val="0"/>
-              </a:spcAft>
-              <a:buNone/>
-              <a:defRPr sz="1650" b="0">
-                <a:solidFill>
-                  <a:srgbClr val="303437"/>
-                </a:solidFill>
-                <a:latin typeface="Noto Sans"/>
-              </a:defRPr>
-            </a:pPr>
-            <a:r>
-              <a:rPr sz="1650" b="0" lang="ja-JP" altLang="en-US">
-                <a:solidFill>
-                  <a:srgbClr val="303437"/>
-                </a:solidFill>
-                <a:latin typeface="Noto Sans"/>
-                <a:ea typeface="Noto Sans CJK JP"/>
-                <a:cs typeface="Noto Sans"/>
-              </a:rPr>
-              <a:t>Level 1の抽出、公式提示例、解説付き条件の参照、解答の比較関数を実装する。</a:t>
-            </a:r>
-          </a:p>
-        </p:txBody>
-      </p:sp>
-      <p:sp>
-        <p:nvSpPr>
-          <p:cNvPr id="11" name="TextBox 10"/>
-          <p:cNvSpPr txBox="1"/>
-          <p:nvPr/>
-        </p:nvSpPr>
-        <p:spPr>
-          <a:xfrm>
-            <a:off x="548640" y="3643249"/>
-            <a:ext cx="8046720" cy="179450"/>
-          </a:xfrm>
-          <a:prstGeom prst="rect">
-            <a:avLst/>
-          </a:prstGeom>
-          <a:noFill/>
-        </p:spPr>
-        <p:txBody>
-          <a:bodyPr wrap="square" lIns="0" rIns="0" tIns="0" bIns="0">
-            <a:noAutofit/>
-          </a:bodyPr>
-          <a:lstStyle/>
-          <a:p>
-            <a:pPr algn="l">
-              <a:lnSpc>
-                <a:spcPts val="1197"/>
-              </a:lnSpc>
-              <a:spcBef>
-                <a:spcPts val="0"/>
-              </a:spcBef>
-              <a:spcAft>
-                <a:spcPts val="0"/>
-              </a:spcAft>
-              <a:buNone/>
-              <a:defRPr sz="1050" b="0">
-                <a:solidFill>
-                  <a:srgbClr val="303437"/>
-                </a:solidFill>
-                <a:latin typeface="Noto Sans"/>
-              </a:defRPr>
-            </a:pPr>
-            <a:r>
-              <a:rPr sz="1050" b="0" lang="ja-JP" altLang="en-US">
-                <a:solidFill>
-                  <a:srgbClr val="626669"/>
-                </a:solidFill>
-                <a:latin typeface="Noto Sans"/>
-                <a:ea typeface="Noto Sans CJK JP"/>
-                <a:cs typeface="Noto Sans"/>
-                <a:hlinkClick r:id="rId3"/>
-              </a:rPr>
-              <a:t>https://github.com/stanford-crfm/helm/blob/v0.3.0/src/helm/benchmark/scenarios/math_scenario.py</a:t>
             </a:r>
           </a:p>
         </p:txBody>
@@ -31174,22 +23289,8 @@
                 <a:ea typeface="Noto Sans CJK JP"/>
                 <a:cs typeface="Noto Sans"/>
               </a:rPr>
-              <a:t>[1] MATH, EleutherAI/hendrycks_math. 固定revisionのtest分割。元の競技問題・解説の著者に帰属。 algebra / test row 372</a:t>
-            </a:r>
-          </a:p>
-          <a:p>
-            <a:pPr>
-              <a:lnSpc>
-                <a:spcPts val="940"/>
-              </a:lnSpc>
-              <a:buNone/>
-              <a:defRPr sz="810" b="0">
-                <a:solidFill>
-                  <a:srgbClr val="303437"/>
-                </a:solidFill>
-                <a:latin typeface="Noto Sans"/>
-              </a:defRPr>
-            </a:pPr>
+              <a:t>[1] Hendrycks et al. MATH. 公開データ。 </a:t>
+            </a:r>
             <a:r>
               <a:rPr sz="810" b="0" lang="ja-JP" altLang="en-US">
                 <a:solidFill>
@@ -31201,310 +23302,6 @@
                 <a:hlinkClick r:id="rId2"/>
               </a:rPr>
               <a:t>https://huggingface.co/datasets/EleutherAI/hendrycks_math</a:t>
-            </a:r>
-          </a:p>
-        </p:txBody>
-      </p:sp>
-    </p:spTree>
-  </p:cSld>
-  <p:clrMapOvr>
-    <a:masterClrMapping/>
-  </p:clrMapOvr>
-</p:sld>
-</file>
-
-<file path=ppt/slides/slide7.xml><?xml version="1.0" encoding="utf-8"?>
-<p:sld xmlns:a="http://schemas.openxmlformats.org/drawingml/2006/main" xmlns:p="http://schemas.openxmlformats.org/presentationml/2006/main" xmlns:r="http://schemas.openxmlformats.org/officeDocument/2006/relationships">
-  <p:cSld>
-    <p:spTree>
-      <p:nvGrpSpPr>
-        <p:cNvPr id="1" name=""/>
-        <p:cNvGrpSpPr/>
-        <p:nvPr/>
-      </p:nvGrpSpPr>
-      <p:grpSpPr/>
-      <p:sp>
-        <p:nvSpPr>
-          <p:cNvPr id="2" name="Title 1"/>
-          <p:cNvSpPr>
-            <a:spLocks noGrp="1"/>
-          </p:cNvSpPr>
-          <p:nvPr>
-            <p:ph type="title"/>
-          </p:nvPr>
-        </p:nvSpPr>
-        <p:spPr>
-          <a:xfrm>
-            <a:off x="468172" y="650138"/>
-            <a:ext cx="8206740" cy="616305"/>
-          </a:xfrm>
-        </p:spPr>
-        <p:txBody>
-          <a:bodyPr wrap="square" lIns="0" rIns="0" tIns="0" bIns="0">
-            <a:noAutofit/>
-          </a:bodyPr>
-          <a:lstStyle/>
-          <a:p>
-            <a:pPr algn="l">
-              <a:lnSpc>
-                <a:spcPct val="110000"/>
-              </a:lnSpc>
-              <a:buNone/>
-              <a:defRPr sz="2800" b="0">
-                <a:solidFill>
-                  <a:srgbClr val="303437"/>
-                </a:solidFill>
-                <a:latin typeface="Noto Sans"/>
-              </a:defRPr>
-            </a:pPr>
-            <a:r>
-              <a:rPr sz="2800" b="1" lang="ja-JP" altLang="en-US">
-                <a:solidFill>
-                  <a:srgbClr val="303437"/>
-                </a:solidFill>
-                <a:latin typeface="Noto Sans"/>
-                <a:ea typeface="Noto Sans CJK JP"/>
-                <a:cs typeface="Noto Sans"/>
-              </a:rPr>
-              <a:t>同じ問題でも、モデルの出力は異なる</a:t>
-            </a:r>
-          </a:p>
-        </p:txBody>
-      </p:sp>
-      <p:sp>
-        <p:nvSpPr>
-          <p:cNvPr id="3" name="Text Placeholder 2"/>
-          <p:cNvSpPr>
-            <a:spLocks noGrp="1"/>
-          </p:cNvSpPr>
-          <p:nvPr>
-            <p:ph type="body" idx="1"/>
-          </p:nvPr>
-        </p:nvSpPr>
-        <p:spPr>
-          <a:xfrm>
-            <a:off x="594360" y="1463040"/>
-            <a:ext cx="7955279" cy="3044952"/>
-          </a:xfrm>
-        </p:spPr>
-        <p:txBody>
-          <a:bodyPr wrap="square" tIns="91440" bIns="91440">
-            <a:noAutofit/>
-          </a:bodyPr>
-          <a:lstStyle/>
-          <a:p>
-            <a:pPr marL="457200" indent="-355600">
-              <a:lnSpc>
-                <a:spcPts val="2618"/>
-              </a:lnSpc>
-              <a:spcAft>
-                <a:spcPts val="700"/>
-              </a:spcAft>
-              <a:buSzPct val="60455"/>
-              <a:buFont typeface="Noto Sans CJK JP"/>
-              <a:buChar char="●"/>
-              <a:defRPr sz="2200" b="0">
-                <a:solidFill>
-                  <a:srgbClr val="303437"/>
-                </a:solidFill>
-                <a:latin typeface="Noto Sans"/>
-              </a:defRPr>
-            </a:pPr>
-            <a:r>
-              <a:rPr sz="2200" b="0" lang="ja-JP" altLang="en-US">
-                <a:solidFill>
-                  <a:srgbClr val="303437"/>
-                </a:solidFill>
-                <a:latin typeface="Noto Sans"/>
-                <a:ea typeface="Noto Sans CJK JP"/>
-                <a:cs typeface="Noto Sans"/>
-              </a:rPr>
-              <a:t>式に値を代入すれば、(15 + 5)(15 − 5) = 20 × 10で200になる。</a:t>
-            </a:r>
-          </a:p>
-          <a:p>
-            <a:pPr marL="457200" indent="-355600">
-              <a:lnSpc>
-                <a:spcPts val="2618"/>
-              </a:lnSpc>
-              <a:spcAft>
-                <a:spcPts val="700"/>
-              </a:spcAft>
-              <a:buSzPct val="60455"/>
-              <a:buFont typeface="Noto Sans CJK JP"/>
-              <a:buChar char="●"/>
-              <a:defRPr sz="2200" b="0">
-                <a:solidFill>
-                  <a:srgbClr val="303437"/>
-                </a:solidFill>
-                <a:latin typeface="Noto Sans"/>
-              </a:defRPr>
-            </a:pPr>
-            <a:r>
-              <a:rPr sz="2200" b="0" lang="ja-JP" altLang="en-US">
-                <a:solidFill>
-                  <a:srgbClr val="303437"/>
-                </a:solidFill>
-                <a:latin typeface="Noto Sans"/>
-                <a:ea typeface="Noto Sans CJK JP"/>
-                <a:cs typeface="Noto Sans"/>
-              </a:rPr>
-              <a:t>HELMの公開実行では、text-davinci-003が解答だけの条件で100、解説を出す条件で200と答えた。</a:t>
-            </a:r>
-          </a:p>
-          <a:p>
-            <a:pPr marL="457200" indent="-355600">
-              <a:lnSpc>
-                <a:spcPts val="2618"/>
-              </a:lnSpc>
-              <a:spcAft>
-                <a:spcPts val="0"/>
-              </a:spcAft>
-              <a:buSzPct val="60455"/>
-              <a:buFont typeface="Noto Sans CJK JP"/>
-              <a:buChar char="●"/>
-              <a:defRPr sz="2200" b="0">
-                <a:solidFill>
-                  <a:srgbClr val="303437"/>
-                </a:solidFill>
-                <a:latin typeface="Noto Sans"/>
-              </a:defRPr>
-            </a:pPr>
-            <a:r>
-              <a:rPr sz="2200" b="0" lang="ja-JP" altLang="en-US">
-                <a:solidFill>
-                  <a:srgbClr val="303437"/>
-                </a:solidFill>
-                <a:latin typeface="Noto Sans"/>
-                <a:ea typeface="Noto Sans CJK JP"/>
-                <a:cs typeface="Noto Sans"/>
-              </a:rPr>
-              <a:t>二つの条件では提示する例も変わる。具体的な入力条件と採点は次の章で扱う。</a:t>
-            </a:r>
-          </a:p>
-        </p:txBody>
-      </p:sp>
-      <p:sp>
-        <p:nvSpPr>
-          <p:cNvPr id="4" name="Title 3"/>
-          <p:cNvSpPr>
-            <a:spLocks noGrp="1"/>
-          </p:cNvSpPr>
-          <p:nvPr>
-            <p:ph type="title" idx="2"/>
-          </p:nvPr>
-        </p:nvSpPr>
-        <p:spPr>
-          <a:xfrm>
-            <a:off x="75895" y="0"/>
-            <a:ext cx="8115300" cy="480060"/>
-          </a:xfrm>
-        </p:spPr>
-        <p:txBody>
-          <a:bodyPr wrap="square" lIns="0" rIns="0" tIns="0" bIns="0" anchor="ctr">
-            <a:noAutofit/>
-          </a:bodyPr>
-          <a:lstStyle/>
-          <a:p>
-            <a:pPr algn="l">
-              <a:lnSpc>
-                <a:spcPct val="110000"/>
-              </a:lnSpc>
-              <a:buNone/>
-              <a:defRPr sz="1400" b="0">
-                <a:solidFill>
-                  <a:srgbClr val="303437"/>
-                </a:solidFill>
-                <a:latin typeface="Noto Sans"/>
-              </a:defRPr>
-            </a:pPr>
-            <a:r>
-              <a:rPr sz="1400" b="1" lang="ja-JP" altLang="en-US">
-                <a:solidFill>
-                  <a:srgbClr val="FFFEF8"/>
-                </a:solidFill>
-                <a:latin typeface="Noto Sans"/>
-                <a:ea typeface="Noto Sans CJK JP"/>
-                <a:cs typeface="Noto Sans"/>
-              </a:rPr>
-              <a:t>1. 競技数学の問題と解答</a:t>
-            </a:r>
-          </a:p>
-        </p:txBody>
-      </p:sp>
-      <p:sp>
-        <p:nvSpPr>
-          <p:cNvPr id="5" name="sources"/>
-          <p:cNvSpPr txBox="1"/>
-          <p:nvPr/>
-        </p:nvSpPr>
-        <p:spPr>
-          <a:xfrm>
-            <a:off x="502920" y="4700016"/>
-            <a:ext cx="8183879" cy="530352"/>
-          </a:xfrm>
-          <a:prstGeom prst="rect">
-            <a:avLst/>
-          </a:prstGeom>
-          <a:noFill/>
-        </p:spPr>
-        <p:txBody>
-          <a:bodyPr wrap="square" lIns="0" rIns="0" tIns="0" bIns="0">
-            <a:noAutofit/>
-          </a:bodyPr>
-          <a:lstStyle/>
-          <a:p>
-            <a:pPr algn="l">
-              <a:lnSpc>
-                <a:spcPts val="940"/>
-              </a:lnSpc>
-              <a:spcBef>
-                <a:spcPts val="0"/>
-              </a:spcBef>
-              <a:spcAft>
-                <a:spcPts val="140"/>
-              </a:spcAft>
-              <a:buNone/>
-              <a:defRPr sz="810" b="0">
-                <a:solidFill>
-                  <a:srgbClr val="303437"/>
-                </a:solidFill>
-                <a:latin typeface="Noto Sans"/>
-              </a:defRPr>
-            </a:pPr>
-            <a:r>
-              <a:rPr sz="810" b="0" lang="ja-JP" altLang="en-US">
-                <a:solidFill>
-                  <a:srgbClr val="626669"/>
-                </a:solidFill>
-                <a:latin typeface="Noto Sans"/>
-                <a:ea typeface="Noto Sans CJK JP"/>
-                <a:cs typeface="Noto Sans"/>
-              </a:rPr>
-              <a:t>[1] HELM Classic v0.4.0. MATH、Level 1の固定評価。2023-11-17公開版。</a:t>
-            </a:r>
-            <a:r>
-              <a:rPr sz="810" b="0" lang="ja-JP" altLang="en-US">
-                <a:solidFill>
-                  <a:srgbClr val="626669"/>
-                </a:solidFill>
-                <a:latin typeface="Noto Sans"/>
-                <a:ea typeface="Noto Sans CJK JP"/>
-                <a:cs typeface="Noto Sans"/>
-              </a:rPr>
-              <a:t>  </a:t>
-            </a:r>
-            <a:r>
-              <a:rPr sz="810" b="0" lang="ja-JP" altLang="en-US">
-                <a:solidFill>
-                  <a:srgbClr val="626669"/>
-                </a:solidFill>
-                <a:latin typeface="Noto Sans"/>
-                <a:ea typeface="Noto Sans CJK JP"/>
-                <a:cs typeface="Noto Sans"/>
-                <a:hlinkClick r:id="rId2"/>
-              </a:rPr>
-              <a:t>https://crfm.stanford.edu/helm/classic/v0.4.0/#/groups/math_regular</a:t>
             </a:r>
           </a:p>
         </p:txBody>
@@ -32016,22 +23813,8 @@
                 <a:ea typeface="Noto Sans CJK JP"/>
                 <a:cs typeface="Noto Sans"/>
               </a:rPr>
-              <a:t>[1] MATH, EleutherAI/hendrycks_math. 固定revisionのtest分割。元の競技問題・解説の著者に帰属。 intermediate_algebra / test row 457</a:t>
-            </a:r>
-          </a:p>
-          <a:p>
-            <a:pPr>
-              <a:lnSpc>
-                <a:spcPts val="940"/>
-              </a:lnSpc>
-              <a:buNone/>
-              <a:defRPr sz="810" b="0">
-                <a:solidFill>
-                  <a:srgbClr val="303437"/>
-                </a:solidFill>
-                <a:latin typeface="Noto Sans"/>
-              </a:defRPr>
-            </a:pPr>
+              <a:t>[1] Hendrycks et al. MATH. 公開データ。 </a:t>
+            </a:r>
             <a:r>
               <a:rPr sz="810" b="0" lang="ja-JP" altLang="en-US">
                 <a:solidFill>
